--- a/THESIS_FA_slides.pptx
+++ b/THESIS_FA_slides.pptx
@@ -17711,7 +17711,7 @@
                 <a:ea typeface="B Nazanin"/>
                 <a:cs typeface="B Nazanin"/>
               </a:rPr>
-              <a:t>پرسش و پاسخ</a:t>
+              <a:t>ممنون از توجه شما</a:t>
             </a:r>
           </a:p>
         </p:txBody>

--- a/THESIS_FA_slides.pptx
+++ b/THESIS_FA_slides.pptx
@@ -29,6 +29,7 @@
     <p:sldId id="277" r:id="rId28"/>
     <p:sldId id="278" r:id="rId29"/>
     <p:sldId id="279" r:id="rId30"/>
+    <p:sldId id="280" r:id="rId31"/>
   </p:sldIdLst>
   <p:sldSz cx="12191695" cy="6858000" type="screen4x3"/>
   <p:notesSz cx="6858000" cy="9144000"/>
@@ -4381,7 +4382,7 @@
                 <a:ea typeface="B Nazanin"/>
                 <a:cs typeface="B Nazanin"/>
               </a:rPr>
-              <a:t>برش گروه، داخل ساخت افراز</a:t>
+              <a:t>اپسیلون، مرز منظم و نامنظم</a:t>
             </a:r>
           </a:p>
         </p:txBody>
@@ -4522,7 +4523,7 @@
         <p:spPr>
           <a:xfrm>
             <a:off x="329184" y="1170432"/>
-            <a:ext cx="7360920" cy="5212080"/>
+            <a:ext cx="8366760" cy="5212080"/>
           </a:xfrm>
           <a:prstGeom prst="roundRect">
             <a:avLst>
@@ -4574,7 +4575,7 @@
         <p:spPr>
           <a:xfrm>
             <a:off x="420624" y="1261872"/>
-            <a:ext cx="7178040" cy="5029200"/>
+            <a:ext cx="8183880" cy="5029200"/>
           </a:xfrm>
           <a:prstGeom prst="roundRect">
             <a:avLst>
@@ -4612,7 +4613,7 @@
       </p:sp>
       <p:pic>
         <p:nvPicPr>
-          <p:cNvPr id="13" name="Picture 12" descr="concept_refine.png"/>
+          <p:cNvPr id="13" name="Picture 12" descr="fig_eps_regular_pair.png"/>
           <p:cNvPicPr>
             <a:picLocks noChangeAspect="1"/>
           </p:cNvPicPr>
@@ -4626,8 +4627,8 @@
         </p:blipFill>
         <p:spPr>
           <a:xfrm>
-            <a:off x="530352" y="2067346"/>
-            <a:ext cx="6958584" cy="3418251"/>
+            <a:off x="530352" y="1536478"/>
+            <a:ext cx="7964424" cy="4479988"/>
           </a:xfrm>
           <a:prstGeom prst="rect">
             <a:avLst/>
@@ -4642,8 +4643,8 @@
         </p:nvSpPr>
         <p:spPr>
           <a:xfrm>
-            <a:off x="7836408" y="1170432"/>
-            <a:ext cx="4050791" cy="5212080"/>
+            <a:off x="8842248" y="1170432"/>
+            <a:ext cx="3044952" cy="5212080"/>
           </a:xfrm>
           <a:prstGeom prst="roundRect">
             <a:avLst>
@@ -4737,8 +4738,8 @@
         </p:nvSpPr>
         <p:spPr>
           <a:xfrm>
-            <a:off x="8001000" y="1353312"/>
-            <a:ext cx="3666744" cy="4846320"/>
+            <a:off x="9006840" y="1353312"/>
+            <a:ext cx="2660904" cy="4846320"/>
           </a:xfrm>
           <a:prstGeom prst="rect">
             <a:avLst/>
@@ -4767,7 +4768,18 @@
                 <a:ea typeface="B Nazanin"/>
                 <a:cs typeface="B Nazanin"/>
               </a:rPr>
-              <a:t>جای این کار در راه لم، بعد از آزمون جفت‌ها و قبل از ساخت گراف کوچک است.</a:t>
+              <a:t>چپ جفت منظم است: چگالی تقریباً ثابت و نزدیک </a:t>
+            </a:r>
+            <a:r>
+              <a:rPr sz="1800" b="0" rtl="0" lang="en-US">
+                <a:solidFill>
+                  <a:srgbClr val="1B1816"/>
+                </a:solidFill>
+                <a:latin typeface="Calibri"/>
+                <a:ea typeface="Calibri"/>
+                <a:cs typeface="Calibri"/>
+              </a:rPr>
+              <a:t>d.</a:t>
             </a:r>
           </a:p>
           <a:p>
@@ -4787,7 +4799,7 @@
                 <a:ea typeface="B Nazanin"/>
                 <a:cs typeface="B Nazanin"/>
               </a:rPr>
-              <a:t>هنوز خوشه‌بندی نیست. گروه نامنظم دو تکه می‌شود تا بشود یال‌ها را با یک چگالی عوض کرد.</a:t>
+              <a:t>راست جفت نامنظم است: یک تکه شلوغ و بقیه خلوت.</a:t>
             </a:r>
           </a:p>
           <a:p>
@@ -4807,29 +4819,7 @@
                 <a:ea typeface="B Nazanin"/>
                 <a:cs typeface="B Nazanin"/>
               </a:rPr>
-              <a:t>تکه قرمز همان </a:t>
-            </a:r>
-            <a:r>
-              <a:rPr sz="1800" b="0" rtl="0" lang="en-US">
-                <a:solidFill>
-                  <a:srgbClr val="1B1816"/>
-                </a:solidFill>
-                <a:latin typeface="Calibri"/>
-                <a:ea typeface="Calibri"/>
-                <a:cs typeface="Calibri"/>
-              </a:rPr>
-              <a:t>certificate</a:t>
-            </a:r>
-            <a:r>
-              <a:rPr sz="1800" b="0" rtl="1" lang="fa-IR">
-                <a:solidFill>
-                  <a:srgbClr val="1B1816"/>
-                </a:solidFill>
-                <a:latin typeface="Calibri"/>
-                <a:ea typeface="B Nazanin"/>
-                <a:cs typeface="B Nazanin"/>
-              </a:rPr>
-              <a:t> است و از گروه جدا می‌شود. بقیه گروه سر جایش می‌ماند.</a:t>
+              <a:t>اپسیلون هم حد اختلاف چگالی است و هم کف اندازه زیرمجموعه.</a:t>
             </a:r>
           </a:p>
           <a:p>
@@ -4849,7 +4839,7 @@
                 <a:ea typeface="B Nazanin"/>
                 <a:cs typeface="B Nazanin"/>
               </a:rPr>
-              <a:t>خرده‌هایی که به هیچ تکه‌ای نمی‌خورند به مجموعه استثنایی می‌روند.</a:t>
+              <a:t>زیرمجموعه کوچک‌تر از این کف کنار گذاشته می‌شود. بزرگ‌تر از آن، باید چگالی‌اش نزدیک چگالی کل بماند.</a:t>
             </a:r>
           </a:p>
         </p:txBody>
@@ -5144,7 +5134,7 @@
                 <a:ea typeface="B Nazanin"/>
                 <a:cs typeface="B Nazanin"/>
               </a:rPr>
-              <a:t>سه اصلاح مقاله روی همین افراز</a:t>
+              <a:t>چطور جفت نامنظم را پیدا می‌کنیم</a:t>
             </a:r>
           </a:p>
         </p:txBody>
@@ -5284,8 +5274,8 @@
         </p:nvSpPr>
         <p:spPr>
           <a:xfrm>
-            <a:off x="457200" y="1261872"/>
-            <a:ext cx="11292840" cy="841248"/>
+            <a:off x="8089392" y="1371600"/>
+            <a:ext cx="3614928" cy="4709160"/>
           </a:xfrm>
           <a:prstGeom prst="roundRect">
             <a:avLst>
@@ -5299,9 +5289,9 @@
             <a:noFill/>
           </a:ln>
           <a:effectLst>
-            <a:outerShdw blurRad="182880" dist="45720" dir="7200000" algn="ctr" rotWithShape="0">
+            <a:outerShdw blurRad="256032" dist="73152" dir="7200000" algn="ctr" rotWithShape="0">
               <a:srgbClr val="1A334A">
-                <a:alpha val="14000"/>
+                <a:alpha val="18000"/>
               </a:srgbClr>
             </a:outerShdw>
           </a:effectLst>
@@ -5336,8 +5326,8 @@
         </p:nvSpPr>
         <p:spPr>
           <a:xfrm>
-            <a:off x="11594592" y="1371600"/>
-            <a:ext cx="91440" cy="621792"/>
+            <a:off x="8089392" y="1371600"/>
+            <a:ext cx="3614928" cy="91440"/>
           </a:xfrm>
           <a:prstGeom prst="rect">
             <a:avLst/>
@@ -5379,8 +5369,8 @@
         </p:nvSpPr>
         <p:spPr>
           <a:xfrm>
-            <a:off x="10561320" y="1389888"/>
-            <a:ext cx="914400" cy="640080"/>
+            <a:off x="8253984" y="1554480"/>
+            <a:ext cx="3285744" cy="292608"/>
           </a:xfrm>
           <a:prstGeom prst="rect">
             <a:avLst/>
@@ -5399,7 +5389,7 @@
               </a:spcAft>
             </a:pPr>
             <a:r>
-              <a:rPr sz="1600" b="1" rtl="1" lang="fa-IR">
+              <a:rPr sz="1400" b="0" rtl="1" lang="fa-IR">
                 <a:solidFill>
                   <a:srgbClr val="A33B24"/>
                 </a:solidFill>
@@ -5407,7 +5397,7 @@
                 <a:ea typeface="B Nazanin"/>
                 <a:cs typeface="B Nazanin"/>
               </a:rPr>
-              <a:t>۰۱</a:t>
+              <a:t>آزمون ۱</a:t>
             </a:r>
           </a:p>
         </p:txBody>
@@ -5420,8 +5410,8 @@
         </p:nvSpPr>
         <p:spPr>
           <a:xfrm>
-            <a:off x="685800" y="1389888"/>
-            <a:ext cx="9738360" cy="640080"/>
+            <a:off x="8253984" y="1847088"/>
+            <a:ext cx="3285744" cy="640080"/>
           </a:xfrm>
           <a:prstGeom prst="rect">
             <a:avLst/>
@@ -5440,124 +5430,29 @@
               </a:spcAft>
             </a:pPr>
             <a:r>
-              <a:rPr sz="1800" b="0" rtl="1" lang="fa-IR">
-                <a:solidFill>
-                  <a:srgbClr val="1B1816"/>
+              <a:rPr sz="1800" b="1" rtl="1" lang="fa-IR">
+                <a:solidFill>
+                  <a:srgbClr val="1A334A"/>
                 </a:solidFill>
                 <a:latin typeface="Calibri"/>
                 <a:ea typeface="B Nazanin"/>
                 <a:cs typeface="B Nazanin"/>
               </a:rPr>
-              <a:t>هر گروه حداکثر با یک گروه دیگر نامنظم حساب می‌شود. بدون این قید، تعداد گروه‌ها در هر دور چند برابر می‌شود.</a:t>
-            </a:r>
-          </a:p>
-        </p:txBody>
-      </p:sp>
-      <p:sp>
-        <p:nvSpPr>
-          <p:cNvPr id="15" name="Rounded Rectangle 14"/>
-          <p:cNvSpPr/>
-          <p:nvPr/>
-        </p:nvSpPr>
-        <p:spPr>
-          <a:xfrm>
-            <a:off x="457200" y="2194560"/>
-            <a:ext cx="11292840" cy="841248"/>
-          </a:xfrm>
-          <a:prstGeom prst="roundRect">
-            <a:avLst>
-              <a:gd name="adj" fmla="val 10000"/>
-            </a:avLst>
-          </a:prstGeom>
-          <a:solidFill>
-            <a:srgbClr val="FFFCF8"/>
-          </a:solidFill>
-          <a:ln>
-            <a:noFill/>
-          </a:ln>
-          <a:effectLst>
-            <a:outerShdw blurRad="182880" dist="45720" dir="7200000" algn="ctr" rotWithShape="0">
-              <a:srgbClr val="1A334A">
-                <a:alpha val="14000"/>
-              </a:srgbClr>
-            </a:outerShdw>
-          </a:effectLst>
-        </p:spPr>
-        <p:style>
-          <a:lnRef idx="1">
-            <a:schemeClr val="accent1"/>
-          </a:lnRef>
-          <a:fillRef idx="3">
-            <a:schemeClr val="accent1"/>
-          </a:fillRef>
-          <a:effectRef idx="2">
-            <a:schemeClr val="accent1"/>
-          </a:effectRef>
-          <a:fontRef idx="minor">
-            <a:schemeClr val="lt1"/>
-          </a:fontRef>
-        </p:style>
-        <p:txBody>
-          <a:bodyPr rtlCol="0" anchor="ctr"/>
-          <a:lstStyle/>
-          <a:p>
-            <a:pPr algn="ctr"/>
-          </a:p>
-        </p:txBody>
-      </p:sp>
-      <p:sp>
-        <p:nvSpPr>
-          <p:cNvPr id="16" name="Rectangle 15"/>
-          <p:cNvSpPr/>
-          <p:nvPr/>
-        </p:nvSpPr>
-        <p:spPr>
-          <a:xfrm>
-            <a:off x="11594592" y="2304288"/>
-            <a:ext cx="91440" cy="621792"/>
-          </a:xfrm>
-          <a:prstGeom prst="rect">
-            <a:avLst/>
-          </a:prstGeom>
-          <a:solidFill>
-            <a:srgbClr val="1A334A"/>
-          </a:solidFill>
-          <a:ln>
-            <a:noFill/>
-          </a:ln>
-        </p:spPr>
-        <p:style>
-          <a:lnRef idx="1">
-            <a:schemeClr val="accent1"/>
-          </a:lnRef>
-          <a:fillRef idx="3">
-            <a:schemeClr val="accent1"/>
-          </a:fillRef>
-          <a:effectRef idx="2">
-            <a:schemeClr val="accent1"/>
-          </a:effectRef>
-          <a:fontRef idx="minor">
-            <a:schemeClr val="lt1"/>
-          </a:fontRef>
-        </p:style>
-        <p:txBody>
-          <a:bodyPr rtlCol="0" anchor="ctr"/>
-          <a:lstStyle/>
-          <a:p>
-            <a:pPr algn="ctr"/>
-          </a:p>
-        </p:txBody>
-      </p:sp>
-      <p:sp>
-        <p:nvSpPr>
-          <p:cNvPr id="17" name="TextBox 16"/>
+              <a:t>یال خیلی کم، جفت منظم است</a:t>
+            </a:r>
+          </a:p>
+        </p:txBody>
+      </p:sp>
+      <p:sp>
+        <p:nvSpPr>
+          <p:cNvPr id="15" name="TextBox 14"/>
           <p:cNvSpPr txBox="1"/>
           <p:nvPr/>
         </p:nvSpPr>
         <p:spPr>
           <a:xfrm>
-            <a:off x="10561320" y="2322576"/>
-            <a:ext cx="914400" cy="640080"/>
+            <a:off x="8253984" y="2468880"/>
+            <a:ext cx="3285744" cy="1143000"/>
           </a:xfrm>
           <a:prstGeom prst="rect">
             <a:avLst/>
@@ -5576,29 +5471,148 @@
               </a:spcAft>
             </a:pPr>
             <a:r>
-              <a:rPr sz="1600" b="1" rtl="1" lang="fa-IR">
-                <a:solidFill>
-                  <a:srgbClr val="A33B24"/>
+              <a:rPr sz="1400" b="0" rtl="1" lang="fa-IR">
+                <a:solidFill>
+                  <a:srgbClr val="1B1816"/>
                 </a:solidFill>
                 <a:latin typeface="Calibri"/>
                 <a:ea typeface="B Nazanin"/>
                 <a:cs typeface="B Nazanin"/>
               </a:rPr>
-              <a:t>۰۲</a:t>
-            </a:r>
-          </a:p>
-        </p:txBody>
-      </p:sp>
-      <p:sp>
-        <p:nvSpPr>
-          <p:cNvPr id="18" name="TextBox 17"/>
+              <a:t>اگر میانگین یال بین دو گروه از حدی کمتر باشد، جفت را منظم می‌گیریم. گراف خالی هم منظم است.</a:t>
+            </a:r>
+          </a:p>
+        </p:txBody>
+      </p:sp>
+      <p:pic>
+        <p:nvPicPr>
+          <p:cNvPr id="16" name="Picture 15" descr="concept_alon1.png"/>
+          <p:cNvPicPr>
+            <a:picLocks noChangeAspect="1"/>
+          </p:cNvPicPr>
+          <p:nvPr/>
+        </p:nvPicPr>
+        <p:blipFill>
+          <a:blip r:embed="rId2"/>
+          <a:stretch>
+            <a:fillRect/>
+          </a:stretch>
+        </p:blipFill>
+        <p:spPr>
+          <a:xfrm>
+            <a:off x="8382000" y="3823106"/>
+            <a:ext cx="3029712" cy="1817827"/>
+          </a:xfrm>
+          <a:prstGeom prst="rect">
+            <a:avLst/>
+          </a:prstGeom>
+        </p:spPr>
+      </p:pic>
+      <p:sp>
+        <p:nvSpPr>
+          <p:cNvPr id="17" name="Rounded Rectangle 16"/>
+          <p:cNvSpPr/>
+          <p:nvPr/>
+        </p:nvSpPr>
+        <p:spPr>
+          <a:xfrm>
+            <a:off x="4273296" y="1371600"/>
+            <a:ext cx="3614928" cy="4709160"/>
+          </a:xfrm>
+          <a:prstGeom prst="roundRect">
+            <a:avLst>
+              <a:gd name="adj" fmla="val 10000"/>
+            </a:avLst>
+          </a:prstGeom>
+          <a:solidFill>
+            <a:srgbClr val="FFFCF8"/>
+          </a:solidFill>
+          <a:ln>
+            <a:noFill/>
+          </a:ln>
+          <a:effectLst>
+            <a:outerShdw blurRad="256032" dist="73152" dir="7200000" algn="ctr" rotWithShape="0">
+              <a:srgbClr val="1A334A">
+                <a:alpha val="18000"/>
+              </a:srgbClr>
+            </a:outerShdw>
+          </a:effectLst>
+        </p:spPr>
+        <p:style>
+          <a:lnRef idx="1">
+            <a:schemeClr val="accent1"/>
+          </a:lnRef>
+          <a:fillRef idx="3">
+            <a:schemeClr val="accent1"/>
+          </a:fillRef>
+          <a:effectRef idx="2">
+            <a:schemeClr val="accent1"/>
+          </a:effectRef>
+          <a:fontRef idx="minor">
+            <a:schemeClr val="lt1"/>
+          </a:fontRef>
+        </p:style>
+        <p:txBody>
+          <a:bodyPr rtlCol="0" anchor="ctr"/>
+          <a:lstStyle/>
+          <a:p>
+            <a:pPr algn="ctr"/>
+          </a:p>
+        </p:txBody>
+      </p:sp>
+      <p:sp>
+        <p:nvSpPr>
+          <p:cNvPr id="18" name="Rectangle 17"/>
+          <p:cNvSpPr/>
+          <p:nvPr/>
+        </p:nvSpPr>
+        <p:spPr>
+          <a:xfrm>
+            <a:off x="4273296" y="1371600"/>
+            <a:ext cx="3614928" cy="91440"/>
+          </a:xfrm>
+          <a:prstGeom prst="rect">
+            <a:avLst/>
+          </a:prstGeom>
+          <a:solidFill>
+            <a:srgbClr val="1A334A"/>
+          </a:solidFill>
+          <a:ln>
+            <a:noFill/>
+          </a:ln>
+        </p:spPr>
+        <p:style>
+          <a:lnRef idx="1">
+            <a:schemeClr val="accent1"/>
+          </a:lnRef>
+          <a:fillRef idx="3">
+            <a:schemeClr val="accent1"/>
+          </a:fillRef>
+          <a:effectRef idx="2">
+            <a:schemeClr val="accent1"/>
+          </a:effectRef>
+          <a:fontRef idx="minor">
+            <a:schemeClr val="lt1"/>
+          </a:fontRef>
+        </p:style>
+        <p:txBody>
+          <a:bodyPr rtlCol="0" anchor="ctr"/>
+          <a:lstStyle/>
+          <a:p>
+            <a:pPr algn="ctr"/>
+          </a:p>
+        </p:txBody>
+      </p:sp>
+      <p:sp>
+        <p:nvSpPr>
+          <p:cNvPr id="19" name="TextBox 18"/>
           <p:cNvSpPr txBox="1"/>
           <p:nvPr/>
         </p:nvSpPr>
         <p:spPr>
           <a:xfrm>
-            <a:off x="685800" y="2322576"/>
-            <a:ext cx="9738360" cy="640080"/>
+            <a:off x="4437888" y="1554480"/>
+            <a:ext cx="3285744" cy="292608"/>
           </a:xfrm>
           <a:prstGeom prst="rect">
             <a:avLst/>
@@ -5617,157 +5631,29 @@
               </a:spcAft>
             </a:pPr>
             <a:r>
-              <a:rPr sz="1800" b="0" rtl="1" lang="fa-IR">
-                <a:solidFill>
-                  <a:srgbClr val="1B1816"/>
+              <a:rPr sz="1400" b="0" rtl="1" lang="fa-IR">
+                <a:solidFill>
+                  <a:srgbClr val="A33B24"/>
                 </a:solidFill>
                 <a:latin typeface="Calibri"/>
                 <a:ea typeface="B Nazanin"/>
                 <a:cs typeface="B Nazanin"/>
               </a:rPr>
-              <a:t>تکه نامنظم با روش درجه </a:t>
-            </a:r>
-            <a:r>
-              <a:rPr sz="1800" b="0" rtl="0" lang="en-US">
-                <a:solidFill>
-                  <a:srgbClr val="1B1816"/>
-                </a:solidFill>
-                <a:latin typeface="Calibri"/>
-                <a:ea typeface="Calibri"/>
-                <a:cs typeface="Calibri"/>
-              </a:rPr>
-              <a:t>Fiorucci</a:t>
-            </a:r>
-            <a:r>
-              <a:rPr sz="1800" b="0" rtl="1" lang="fa-IR">
-                <a:solidFill>
-                  <a:srgbClr val="1B1816"/>
-                </a:solidFill>
-                <a:latin typeface="Calibri"/>
-                <a:ea typeface="B Nazanin"/>
-                <a:cs typeface="B Nazanin"/>
-              </a:rPr>
-              <a:t> پیدا می‌شود، نه با جست‌وجوی کامل نسخه اصلی </a:t>
-            </a:r>
-            <a:r>
-              <a:rPr sz="1800" b="0" rtl="0" lang="en-US">
-                <a:solidFill>
-                  <a:srgbClr val="1B1816"/>
-                </a:solidFill>
-                <a:latin typeface="Calibri"/>
-                <a:ea typeface="Calibri"/>
-                <a:cs typeface="Calibri"/>
-              </a:rPr>
-              <a:t>Alon.</a:t>
-            </a:r>
-          </a:p>
-        </p:txBody>
-      </p:sp>
-      <p:sp>
-        <p:nvSpPr>
-          <p:cNvPr id="19" name="Rounded Rectangle 18"/>
-          <p:cNvSpPr/>
-          <p:nvPr/>
-        </p:nvSpPr>
-        <p:spPr>
-          <a:xfrm>
-            <a:off x="457200" y="3127248"/>
-            <a:ext cx="11292840" cy="841248"/>
-          </a:xfrm>
-          <a:prstGeom prst="roundRect">
-            <a:avLst>
-              <a:gd name="adj" fmla="val 10000"/>
-            </a:avLst>
-          </a:prstGeom>
-          <a:solidFill>
-            <a:srgbClr val="FFFCF8"/>
-          </a:solidFill>
-          <a:ln>
-            <a:noFill/>
-          </a:ln>
-          <a:effectLst>
-            <a:outerShdw blurRad="182880" dist="45720" dir="7200000" algn="ctr" rotWithShape="0">
-              <a:srgbClr val="1A334A">
-                <a:alpha val="14000"/>
-              </a:srgbClr>
-            </a:outerShdw>
-          </a:effectLst>
-        </p:spPr>
-        <p:style>
-          <a:lnRef idx="1">
-            <a:schemeClr val="accent1"/>
-          </a:lnRef>
-          <a:fillRef idx="3">
-            <a:schemeClr val="accent1"/>
-          </a:fillRef>
-          <a:effectRef idx="2">
-            <a:schemeClr val="accent1"/>
-          </a:effectRef>
-          <a:fontRef idx="minor">
-            <a:schemeClr val="lt1"/>
-          </a:fontRef>
-        </p:style>
-        <p:txBody>
-          <a:bodyPr rtlCol="0" anchor="ctr"/>
-          <a:lstStyle/>
-          <a:p>
-            <a:pPr algn="ctr"/>
-          </a:p>
-        </p:txBody>
-      </p:sp>
-      <p:sp>
-        <p:nvSpPr>
-          <p:cNvPr id="20" name="Rectangle 19"/>
-          <p:cNvSpPr/>
-          <p:nvPr/>
-        </p:nvSpPr>
-        <p:spPr>
-          <a:xfrm>
-            <a:off x="11594592" y="3236976"/>
-            <a:ext cx="91440" cy="621792"/>
-          </a:xfrm>
-          <a:prstGeom prst="rect">
-            <a:avLst/>
-          </a:prstGeom>
-          <a:solidFill>
-            <a:srgbClr val="1A334A"/>
-          </a:solidFill>
-          <a:ln>
-            <a:noFill/>
-          </a:ln>
-        </p:spPr>
-        <p:style>
-          <a:lnRef idx="1">
-            <a:schemeClr val="accent1"/>
-          </a:lnRef>
-          <a:fillRef idx="3">
-            <a:schemeClr val="accent1"/>
-          </a:fillRef>
-          <a:effectRef idx="2">
-            <a:schemeClr val="accent1"/>
-          </a:effectRef>
-          <a:fontRef idx="minor">
-            <a:schemeClr val="lt1"/>
-          </a:fontRef>
-        </p:style>
-        <p:txBody>
-          <a:bodyPr rtlCol="0" anchor="ctr"/>
-          <a:lstStyle/>
-          <a:p>
-            <a:pPr algn="ctr"/>
-          </a:p>
-        </p:txBody>
-      </p:sp>
-      <p:sp>
-        <p:nvSpPr>
-          <p:cNvPr id="21" name="TextBox 20"/>
+              <a:t>آزمون ۳</a:t>
+            </a:r>
+          </a:p>
+        </p:txBody>
+      </p:sp>
+      <p:sp>
+        <p:nvSpPr>
+          <p:cNvPr id="20" name="TextBox 19"/>
           <p:cNvSpPr txBox="1"/>
           <p:nvPr/>
         </p:nvSpPr>
         <p:spPr>
           <a:xfrm>
-            <a:off x="10561320" y="3255264"/>
-            <a:ext cx="914400" cy="640080"/>
+            <a:off x="4437888" y="1847088"/>
+            <a:ext cx="3285744" cy="640080"/>
           </a:xfrm>
           <a:prstGeom prst="rect">
             <a:avLst/>
@@ -5786,29 +5672,29 @@
               </a:spcAft>
             </a:pPr>
             <a:r>
-              <a:rPr sz="1600" b="1" rtl="1" lang="fa-IR">
-                <a:solidFill>
-                  <a:srgbClr val="A33B24"/>
+              <a:rPr sz="1800" b="1" rtl="1" lang="fa-IR">
+                <a:solidFill>
+                  <a:srgbClr val="1A334A"/>
                 </a:solidFill>
                 <a:latin typeface="Calibri"/>
                 <a:ea typeface="B Nazanin"/>
                 <a:cs typeface="B Nazanin"/>
               </a:rPr>
-              <a:t>۰۳</a:t>
-            </a:r>
-          </a:p>
-        </p:txBody>
-      </p:sp>
-      <p:sp>
-        <p:nvSpPr>
-          <p:cNvPr id="22" name="TextBox 21"/>
+              <a:t>همسایه مشترکِ زیاد</a:t>
+            </a:r>
+          </a:p>
+        </p:txBody>
+      </p:sp>
+      <p:sp>
+        <p:nvSpPr>
+          <p:cNvPr id="21" name="TextBox 20"/>
           <p:cNvSpPr txBox="1"/>
           <p:nvPr/>
         </p:nvSpPr>
         <p:spPr>
           <a:xfrm>
-            <a:off x="685800" y="3255264"/>
-            <a:ext cx="9738360" cy="640080"/>
+            <a:off x="4437888" y="2468880"/>
+            <a:ext cx="3285744" cy="1143000"/>
           </a:xfrm>
           <a:prstGeom prst="rect">
             <a:avLst/>
@@ -5827,7 +5713,7 @@
               </a:spcAft>
             </a:pPr>
             <a:r>
-              <a:rPr sz="1800" b="0" rtl="1" lang="fa-IR">
+              <a:rPr sz="1400" b="0" rtl="1" lang="fa-IR">
                 <a:solidFill>
                   <a:srgbClr val="1B1816"/>
                 </a:solidFill>
@@ -5835,11 +5721,299 @@
                 <a:ea typeface="B Nazanin"/>
                 <a:cs typeface="B Nazanin"/>
               </a:rPr>
-              <a:t>وقتی گروه‌ها به‌قدر کافی کوچک شدند، حلقه می‌ایستد. نتیجه تقریباً منظم است، نه یک افراز اثبات‌شده.</a:t>
-            </a:r>
-          </a:p>
-        </p:txBody>
-      </p:sp>
+              <a:t>اگر دسته‌ای از رأس‌ها همسایه‌های خیلی شبیه داشته باشند، همان دسته شاهد نامنظمی است.</a:t>
+            </a:r>
+          </a:p>
+        </p:txBody>
+      </p:sp>
+      <p:pic>
+        <p:nvPicPr>
+          <p:cNvPr id="22" name="Picture 21" descr="concept_alon3.png"/>
+          <p:cNvPicPr>
+            <a:picLocks noChangeAspect="1"/>
+          </p:cNvPicPr>
+          <p:nvPr/>
+        </p:nvPicPr>
+        <p:blipFill>
+          <a:blip r:embed="rId3"/>
+          <a:stretch>
+            <a:fillRect/>
+          </a:stretch>
+        </p:blipFill>
+        <p:spPr>
+          <a:xfrm>
+            <a:off x="4565904" y="3823106"/>
+            <a:ext cx="3029712" cy="1817827"/>
+          </a:xfrm>
+          <a:prstGeom prst="rect">
+            <a:avLst/>
+          </a:prstGeom>
+        </p:spPr>
+      </p:pic>
+      <p:sp>
+        <p:nvSpPr>
+          <p:cNvPr id="23" name="Rounded Rectangle 22"/>
+          <p:cNvSpPr/>
+          <p:nvPr/>
+        </p:nvSpPr>
+        <p:spPr>
+          <a:xfrm>
+            <a:off x="457200" y="1371600"/>
+            <a:ext cx="3614928" cy="4709160"/>
+          </a:xfrm>
+          <a:prstGeom prst="roundRect">
+            <a:avLst>
+              <a:gd name="adj" fmla="val 10000"/>
+            </a:avLst>
+          </a:prstGeom>
+          <a:solidFill>
+            <a:srgbClr val="FFFCF8"/>
+          </a:solidFill>
+          <a:ln>
+            <a:noFill/>
+          </a:ln>
+          <a:effectLst>
+            <a:outerShdw blurRad="256032" dist="73152" dir="7200000" algn="ctr" rotWithShape="0">
+              <a:srgbClr val="1A334A">
+                <a:alpha val="18000"/>
+              </a:srgbClr>
+            </a:outerShdw>
+          </a:effectLst>
+        </p:spPr>
+        <p:style>
+          <a:lnRef idx="1">
+            <a:schemeClr val="accent1"/>
+          </a:lnRef>
+          <a:fillRef idx="3">
+            <a:schemeClr val="accent1"/>
+          </a:fillRef>
+          <a:effectRef idx="2">
+            <a:schemeClr val="accent1"/>
+          </a:effectRef>
+          <a:fontRef idx="minor">
+            <a:schemeClr val="lt1"/>
+          </a:fontRef>
+        </p:style>
+        <p:txBody>
+          <a:bodyPr rtlCol="0" anchor="ctr"/>
+          <a:lstStyle/>
+          <a:p>
+            <a:pPr algn="ctr"/>
+          </a:p>
+        </p:txBody>
+      </p:sp>
+      <p:sp>
+        <p:nvSpPr>
+          <p:cNvPr id="24" name="Rectangle 23"/>
+          <p:cNvSpPr/>
+          <p:nvPr/>
+        </p:nvSpPr>
+        <p:spPr>
+          <a:xfrm>
+            <a:off x="457200" y="1371600"/>
+            <a:ext cx="3614928" cy="91440"/>
+          </a:xfrm>
+          <a:prstGeom prst="rect">
+            <a:avLst/>
+          </a:prstGeom>
+          <a:solidFill>
+            <a:srgbClr val="1A334A"/>
+          </a:solidFill>
+          <a:ln>
+            <a:noFill/>
+          </a:ln>
+        </p:spPr>
+        <p:style>
+          <a:lnRef idx="1">
+            <a:schemeClr val="accent1"/>
+          </a:lnRef>
+          <a:fillRef idx="3">
+            <a:schemeClr val="accent1"/>
+          </a:fillRef>
+          <a:effectRef idx="2">
+            <a:schemeClr val="accent1"/>
+          </a:effectRef>
+          <a:fontRef idx="minor">
+            <a:schemeClr val="lt1"/>
+          </a:fontRef>
+        </p:style>
+        <p:txBody>
+          <a:bodyPr rtlCol="0" anchor="ctr"/>
+          <a:lstStyle/>
+          <a:p>
+            <a:pPr algn="ctr"/>
+          </a:p>
+        </p:txBody>
+      </p:sp>
+      <p:sp>
+        <p:nvSpPr>
+          <p:cNvPr id="25" name="TextBox 24"/>
+          <p:cNvSpPr txBox="1"/>
+          <p:nvPr/>
+        </p:nvSpPr>
+        <p:spPr>
+          <a:xfrm>
+            <a:off x="621792" y="1554480"/>
+            <a:ext cx="3285744" cy="292608"/>
+          </a:xfrm>
+          <a:prstGeom prst="rect">
+            <a:avLst/>
+          </a:prstGeom>
+          <a:noFill/>
+        </p:spPr>
+        <p:txBody>
+          <a:bodyPr wrap="square">
+            <a:spAutoFit/>
+          </a:bodyPr>
+          <a:lstStyle/>
+          <a:p>
+            <a:pPr algn="r" rtl="1">
+              <a:spcAft>
+                <a:spcPts val="0"/>
+              </a:spcAft>
+            </a:pPr>
+            <a:r>
+              <a:rPr sz="1400" b="0" rtl="1" lang="fa-IR">
+                <a:solidFill>
+                  <a:srgbClr val="A33B24"/>
+                </a:solidFill>
+                <a:latin typeface="Calibri"/>
+                <a:ea typeface="B Nazanin"/>
+                <a:cs typeface="B Nazanin"/>
+              </a:rPr>
+              <a:t>آزمون ۲</a:t>
+            </a:r>
+          </a:p>
+        </p:txBody>
+      </p:sp>
+      <p:sp>
+        <p:nvSpPr>
+          <p:cNvPr id="26" name="TextBox 25"/>
+          <p:cNvSpPr txBox="1"/>
+          <p:nvPr/>
+        </p:nvSpPr>
+        <p:spPr>
+          <a:xfrm>
+            <a:off x="621792" y="1847088"/>
+            <a:ext cx="3285744" cy="640080"/>
+          </a:xfrm>
+          <a:prstGeom prst="rect">
+            <a:avLst/>
+          </a:prstGeom>
+          <a:noFill/>
+        </p:spPr>
+        <p:txBody>
+          <a:bodyPr wrap="square">
+            <a:spAutoFit/>
+          </a:bodyPr>
+          <a:lstStyle/>
+          <a:p>
+            <a:pPr algn="r" rtl="1">
+              <a:spcAft>
+                <a:spcPts val="0"/>
+              </a:spcAft>
+            </a:pPr>
+            <a:r>
+              <a:rPr sz="1800" b="1" rtl="1" lang="fa-IR">
+                <a:solidFill>
+                  <a:srgbClr val="1A334A"/>
+                </a:solidFill>
+                <a:latin typeface="Calibri"/>
+                <a:ea typeface="B Nazanin"/>
+                <a:cs typeface="B Nazanin"/>
+              </a:rPr>
+              <a:t>درجه خیلی دور از میانگین</a:t>
+            </a:r>
+          </a:p>
+        </p:txBody>
+      </p:sp>
+      <p:sp>
+        <p:nvSpPr>
+          <p:cNvPr id="27" name="TextBox 26"/>
+          <p:cNvSpPr txBox="1"/>
+          <p:nvPr/>
+        </p:nvSpPr>
+        <p:spPr>
+          <a:xfrm>
+            <a:off x="621792" y="2468880"/>
+            <a:ext cx="3285744" cy="1143000"/>
+          </a:xfrm>
+          <a:prstGeom prst="rect">
+            <a:avLst/>
+          </a:prstGeom>
+          <a:noFill/>
+        </p:spPr>
+        <p:txBody>
+          <a:bodyPr wrap="square">
+            <a:spAutoFit/>
+          </a:bodyPr>
+          <a:lstStyle/>
+          <a:p>
+            <a:pPr algn="r" rtl="1">
+              <a:spcAft>
+                <a:spcPts val="0"/>
+              </a:spcAft>
+            </a:pPr>
+            <a:r>
+              <a:rPr sz="1400" b="0" rtl="1" lang="fa-IR">
+                <a:solidFill>
+                  <a:srgbClr val="1B1816"/>
+                </a:solidFill>
+                <a:latin typeface="Calibri"/>
+                <a:ea typeface="B Nazanin"/>
+                <a:cs typeface="B Nazanin"/>
+              </a:rPr>
+              <a:t>رأس‌هایی که درجه‌شان از میانگین خیلی پرت است جمع می‌شوند. اگر تعدادشان زیاد باشد، </a:t>
+            </a:r>
+            <a:r>
+              <a:rPr sz="1400" b="0" rtl="0" lang="en-US">
+                <a:solidFill>
+                  <a:srgbClr val="1B1816"/>
+                </a:solidFill>
+                <a:latin typeface="Calibri"/>
+                <a:ea typeface="Calibri"/>
+                <a:cs typeface="Calibri"/>
+              </a:rPr>
+              <a:t>certificate</a:t>
+            </a:r>
+            <a:r>
+              <a:rPr sz="1400" b="0" rtl="1" lang="fa-IR">
+                <a:solidFill>
+                  <a:srgbClr val="1B1816"/>
+                </a:solidFill>
+                <a:latin typeface="Calibri"/>
+                <a:ea typeface="B Nazanin"/>
+                <a:cs typeface="B Nazanin"/>
+              </a:rPr>
+              <a:t> همان‌هاست.</a:t>
+            </a:r>
+          </a:p>
+        </p:txBody>
+      </p:sp>
+      <p:pic>
+        <p:nvPicPr>
+          <p:cNvPr id="28" name="Picture 27" descr="concept_alon2.png"/>
+          <p:cNvPicPr>
+            <a:picLocks noChangeAspect="1"/>
+          </p:cNvPicPr>
+          <p:nvPr/>
+        </p:nvPicPr>
+        <p:blipFill>
+          <a:blip r:embed="rId4"/>
+          <a:stretch>
+            <a:fillRect/>
+          </a:stretch>
+        </p:blipFill>
+        <p:spPr>
+          <a:xfrm>
+            <a:off x="749808" y="3823106"/>
+            <a:ext cx="3029712" cy="1817827"/>
+          </a:xfrm>
+          <a:prstGeom prst="rect">
+            <a:avLst/>
+          </a:prstGeom>
+        </p:spPr>
+      </p:pic>
     </p:spTree>
   </p:cSld>
   <p:clrMapOvr>
@@ -6130,7 +6304,7 @@
                 <a:ea typeface="B Nazanin"/>
                 <a:cs typeface="B Nazanin"/>
               </a:rPr>
-              <a:t>از یال‌های بین دو گروه تا یک چگالی</a:t>
+              <a:t>برش گروه، داخل ساخت افراز</a:t>
             </a:r>
           </a:p>
         </p:txBody>
@@ -6361,7 +6535,7 @@
       </p:sp>
       <p:pic>
         <p:nvPicPr>
-          <p:cNvPr id="13" name="Picture 12" descr="concept_density.png"/>
+          <p:cNvPr id="13" name="Picture 12" descr="concept_refine.png"/>
           <p:cNvPicPr>
             <a:picLocks noChangeAspect="1"/>
           </p:cNvPicPr>
@@ -6375,8 +6549,8 @@
         </p:blipFill>
         <p:spPr>
           <a:xfrm>
-            <a:off x="530352" y="1878676"/>
-            <a:ext cx="6958584" cy="3795591"/>
+            <a:off x="530352" y="2067346"/>
+            <a:ext cx="6958584" cy="3418251"/>
           </a:xfrm>
           <a:prstGeom prst="rect">
             <a:avLst/>
@@ -6516,7 +6690,7 @@
                 <a:ea typeface="B Nazanin"/>
                 <a:cs typeface="B Nazanin"/>
               </a:rPr>
-              <a:t>چپ، همه یال‌های بین دو گروه را نشان می‌دهد.</a:t>
+              <a:t>جای این کار در راه لم، بعد از آزمون جفت‌ها و قبل از ساخت گراف کوچک است.</a:t>
             </a:r>
           </a:p>
           <a:p>
@@ -6536,7 +6710,7 @@
                 <a:ea typeface="B Nazanin"/>
                 <a:cs typeface="B Nazanin"/>
               </a:rPr>
-              <a:t>راست، همان رابطه فقط با یک میله مانده است.</a:t>
+              <a:t>هنوز خوشه‌بندی نیست. گروه نامنظم دو تکه می‌شود تا بشود یال‌ها را با یک چگالی عوض کرد.</a:t>
             </a:r>
           </a:p>
           <a:p>
@@ -6556,7 +6730,49 @@
                 <a:ea typeface="B Nazanin"/>
                 <a:cs typeface="B Nazanin"/>
               </a:rPr>
-              <a:t>ضخامت میله یعنی چگالی: سهم یال‌های موجود از همه یال‌های ممکن.</a:t>
+              <a:t>تکه قرمز همان </a:t>
+            </a:r>
+            <a:r>
+              <a:rPr sz="1800" b="0" rtl="0" lang="en-US">
+                <a:solidFill>
+                  <a:srgbClr val="1B1816"/>
+                </a:solidFill>
+                <a:latin typeface="Calibri"/>
+                <a:ea typeface="Calibri"/>
+                <a:cs typeface="Calibri"/>
+              </a:rPr>
+              <a:t>certificate</a:t>
+            </a:r>
+            <a:r>
+              <a:rPr sz="1800" b="0" rtl="1" lang="fa-IR">
+                <a:solidFill>
+                  <a:srgbClr val="1B1816"/>
+                </a:solidFill>
+                <a:latin typeface="Calibri"/>
+                <a:ea typeface="B Nazanin"/>
+                <a:cs typeface="B Nazanin"/>
+              </a:rPr>
+              <a:t> است و از گروه جدا می‌شود. بقیه گروه سر جایش می‌ماند.</a:t>
+            </a:r>
+          </a:p>
+          <a:p>
+            <a:pPr algn="r" rtl="1">
+              <a:spcAft>
+                <a:spcPts val="1200"/>
+              </a:spcAft>
+              <a:buFont typeface="Calibri"/>
+              <a:buChar char="•"/>
+            </a:pPr>
+            <a:r>
+              <a:rPr sz="1800" b="0" rtl="1" lang="fa-IR">
+                <a:solidFill>
+                  <a:srgbClr val="1B1816"/>
+                </a:solidFill>
+                <a:latin typeface="Calibri"/>
+                <a:ea typeface="B Nazanin"/>
+                <a:cs typeface="B Nazanin"/>
+              </a:rPr>
+              <a:t>خرده‌هایی که به هیچ تکه‌ای نمی‌خورند به مجموعه استثنایی می‌روند.</a:t>
             </a:r>
           </a:p>
         </p:txBody>
@@ -6851,7 +7067,7 @@
                 <a:ea typeface="B Nazanin"/>
                 <a:cs typeface="B Nazanin"/>
               </a:rPr>
-              <a:t>گراف کوچک: هر گروه یک رأس</a:t>
+              <a:t>سه اصلاح مقاله روی همین افراز</a:t>
             </a:r>
           </a:p>
         </p:txBody>
@@ -6991,8 +7207,8 @@
         </p:nvSpPr>
         <p:spPr>
           <a:xfrm>
-            <a:off x="329184" y="1170432"/>
-            <a:ext cx="7360920" cy="5212080"/>
+            <a:off x="457200" y="1261872"/>
+            <a:ext cx="11292840" cy="841248"/>
           </a:xfrm>
           <a:prstGeom prst="roundRect">
             <a:avLst>
@@ -7000,15 +7216,15 @@
             </a:avLst>
           </a:prstGeom>
           <a:solidFill>
-            <a:srgbClr val="DED5C4"/>
+            <a:srgbClr val="FFFCF8"/>
           </a:solidFill>
           <a:ln>
             <a:noFill/>
           </a:ln>
           <a:effectLst>
-            <a:outerShdw blurRad="201168" dist="54864" dir="7200000" algn="ctr" rotWithShape="0">
+            <a:outerShdw blurRad="182880" dist="45720" dir="7200000" algn="ctr" rotWithShape="0">
               <a:srgbClr val="1A334A">
-                <a:alpha val="16000"/>
+                <a:alpha val="14000"/>
               </a:srgbClr>
             </a:outerShdw>
           </a:effectLst>
@@ -7037,14 +7253,139 @@
       </p:sp>
       <p:sp>
         <p:nvSpPr>
-          <p:cNvPr id="12" name="Rounded Rectangle 11"/>
-          <p:cNvSpPr/>
-          <p:nvPr/>
-        </p:nvSpPr>
-        <p:spPr>
-          <a:xfrm>
-            <a:off x="420624" y="1261872"/>
-            <a:ext cx="7178040" cy="5029200"/>
+          <p:cNvPr id="12" name="Rectangle 11"/>
+          <p:cNvSpPr/>
+          <p:nvPr/>
+        </p:nvSpPr>
+        <p:spPr>
+          <a:xfrm>
+            <a:off x="11594592" y="1371600"/>
+            <a:ext cx="91440" cy="621792"/>
+          </a:xfrm>
+          <a:prstGeom prst="rect">
+            <a:avLst/>
+          </a:prstGeom>
+          <a:solidFill>
+            <a:srgbClr val="A33B24"/>
+          </a:solidFill>
+          <a:ln>
+            <a:noFill/>
+          </a:ln>
+        </p:spPr>
+        <p:style>
+          <a:lnRef idx="1">
+            <a:schemeClr val="accent1"/>
+          </a:lnRef>
+          <a:fillRef idx="3">
+            <a:schemeClr val="accent1"/>
+          </a:fillRef>
+          <a:effectRef idx="2">
+            <a:schemeClr val="accent1"/>
+          </a:effectRef>
+          <a:fontRef idx="minor">
+            <a:schemeClr val="lt1"/>
+          </a:fontRef>
+        </p:style>
+        <p:txBody>
+          <a:bodyPr rtlCol="0" anchor="ctr"/>
+          <a:lstStyle/>
+          <a:p>
+            <a:pPr algn="ctr"/>
+          </a:p>
+        </p:txBody>
+      </p:sp>
+      <p:sp>
+        <p:nvSpPr>
+          <p:cNvPr id="13" name="TextBox 12"/>
+          <p:cNvSpPr txBox="1"/>
+          <p:nvPr/>
+        </p:nvSpPr>
+        <p:spPr>
+          <a:xfrm>
+            <a:off x="10561320" y="1389888"/>
+            <a:ext cx="914400" cy="640080"/>
+          </a:xfrm>
+          <a:prstGeom prst="rect">
+            <a:avLst/>
+          </a:prstGeom>
+          <a:noFill/>
+        </p:spPr>
+        <p:txBody>
+          <a:bodyPr wrap="square">
+            <a:spAutoFit/>
+          </a:bodyPr>
+          <a:lstStyle/>
+          <a:p>
+            <a:pPr algn="r" rtl="1">
+              <a:spcAft>
+                <a:spcPts val="0"/>
+              </a:spcAft>
+            </a:pPr>
+            <a:r>
+              <a:rPr sz="1600" b="1" rtl="1" lang="fa-IR">
+                <a:solidFill>
+                  <a:srgbClr val="A33B24"/>
+                </a:solidFill>
+                <a:latin typeface="Calibri"/>
+                <a:ea typeface="B Nazanin"/>
+                <a:cs typeface="B Nazanin"/>
+              </a:rPr>
+              <a:t>۰۱</a:t>
+            </a:r>
+          </a:p>
+        </p:txBody>
+      </p:sp>
+      <p:sp>
+        <p:nvSpPr>
+          <p:cNvPr id="14" name="TextBox 13"/>
+          <p:cNvSpPr txBox="1"/>
+          <p:nvPr/>
+        </p:nvSpPr>
+        <p:spPr>
+          <a:xfrm>
+            <a:off x="685800" y="1389888"/>
+            <a:ext cx="9738360" cy="640080"/>
+          </a:xfrm>
+          <a:prstGeom prst="rect">
+            <a:avLst/>
+          </a:prstGeom>
+          <a:noFill/>
+        </p:spPr>
+        <p:txBody>
+          <a:bodyPr wrap="square">
+            <a:spAutoFit/>
+          </a:bodyPr>
+          <a:lstStyle/>
+          <a:p>
+            <a:pPr algn="r" rtl="1">
+              <a:spcAft>
+                <a:spcPts val="0"/>
+              </a:spcAft>
+            </a:pPr>
+            <a:r>
+              <a:rPr sz="1800" b="0" rtl="1" lang="fa-IR">
+                <a:solidFill>
+                  <a:srgbClr val="1B1816"/>
+                </a:solidFill>
+                <a:latin typeface="Calibri"/>
+                <a:ea typeface="B Nazanin"/>
+                <a:cs typeface="B Nazanin"/>
+              </a:rPr>
+              <a:t>هر گروه حداکثر با یک گروه دیگر نامنظم حساب می‌شود. بدون این قید، تعداد گروه‌ها در هر دور چند برابر می‌شود.</a:t>
+            </a:r>
+          </a:p>
+        </p:txBody>
+      </p:sp>
+      <p:sp>
+        <p:nvSpPr>
+          <p:cNvPr id="15" name="Rounded Rectangle 14"/>
+          <p:cNvSpPr/>
+          <p:nvPr/>
+        </p:nvSpPr>
+        <p:spPr>
+          <a:xfrm>
+            <a:off x="457200" y="2194560"/>
+            <a:ext cx="11292840" cy="841248"/>
           </a:xfrm>
           <a:prstGeom prst="roundRect">
             <a:avLst>
@@ -7057,63 +7398,204 @@
           <a:ln>
             <a:noFill/>
           </a:ln>
-        </p:spPr>
-        <p:style>
-          <a:lnRef idx="1">
-            <a:schemeClr val="accent1"/>
-          </a:lnRef>
-          <a:fillRef idx="3">
-            <a:schemeClr val="accent1"/>
-          </a:fillRef>
-          <a:effectRef idx="2">
-            <a:schemeClr val="accent1"/>
-          </a:effectRef>
-          <a:fontRef idx="minor">
-            <a:schemeClr val="lt1"/>
-          </a:fontRef>
-        </p:style>
-        <p:txBody>
-          <a:bodyPr rtlCol="0" anchor="ctr"/>
-          <a:lstStyle/>
-          <a:p>
-            <a:pPr algn="ctr"/>
-          </a:p>
-        </p:txBody>
-      </p:sp>
-      <p:pic>
-        <p:nvPicPr>
-          <p:cNvPr id="13" name="Picture 12" descr="concept_reduced.png"/>
-          <p:cNvPicPr>
-            <a:picLocks noChangeAspect="1"/>
-          </p:cNvPicPr>
-          <p:nvPr/>
-        </p:nvPicPr>
-        <p:blipFill>
-          <a:blip r:embed="rId2"/>
-          <a:stretch>
-            <a:fillRect/>
-          </a:stretch>
-        </p:blipFill>
-        <p:spPr>
-          <a:xfrm>
-            <a:off x="530352" y="1878676"/>
-            <a:ext cx="6958584" cy="3795591"/>
-          </a:xfrm>
-          <a:prstGeom prst="rect">
-            <a:avLst/>
-          </a:prstGeom>
-        </p:spPr>
-      </p:pic>
-      <p:sp>
-        <p:nvSpPr>
-          <p:cNvPr id="14" name="Rounded Rectangle 13"/>
-          <p:cNvSpPr/>
-          <p:nvPr/>
-        </p:nvSpPr>
-        <p:spPr>
-          <a:xfrm>
-            <a:off x="7836408" y="1170432"/>
-            <a:ext cx="4050791" cy="5212080"/>
+          <a:effectLst>
+            <a:outerShdw blurRad="182880" dist="45720" dir="7200000" algn="ctr" rotWithShape="0">
+              <a:srgbClr val="1A334A">
+                <a:alpha val="14000"/>
+              </a:srgbClr>
+            </a:outerShdw>
+          </a:effectLst>
+        </p:spPr>
+        <p:style>
+          <a:lnRef idx="1">
+            <a:schemeClr val="accent1"/>
+          </a:lnRef>
+          <a:fillRef idx="3">
+            <a:schemeClr val="accent1"/>
+          </a:fillRef>
+          <a:effectRef idx="2">
+            <a:schemeClr val="accent1"/>
+          </a:effectRef>
+          <a:fontRef idx="minor">
+            <a:schemeClr val="lt1"/>
+          </a:fontRef>
+        </p:style>
+        <p:txBody>
+          <a:bodyPr rtlCol="0" anchor="ctr"/>
+          <a:lstStyle/>
+          <a:p>
+            <a:pPr algn="ctr"/>
+          </a:p>
+        </p:txBody>
+      </p:sp>
+      <p:sp>
+        <p:nvSpPr>
+          <p:cNvPr id="16" name="Rectangle 15"/>
+          <p:cNvSpPr/>
+          <p:nvPr/>
+        </p:nvSpPr>
+        <p:spPr>
+          <a:xfrm>
+            <a:off x="11594592" y="2304288"/>
+            <a:ext cx="91440" cy="621792"/>
+          </a:xfrm>
+          <a:prstGeom prst="rect">
+            <a:avLst/>
+          </a:prstGeom>
+          <a:solidFill>
+            <a:srgbClr val="1A334A"/>
+          </a:solidFill>
+          <a:ln>
+            <a:noFill/>
+          </a:ln>
+        </p:spPr>
+        <p:style>
+          <a:lnRef idx="1">
+            <a:schemeClr val="accent1"/>
+          </a:lnRef>
+          <a:fillRef idx="3">
+            <a:schemeClr val="accent1"/>
+          </a:fillRef>
+          <a:effectRef idx="2">
+            <a:schemeClr val="accent1"/>
+          </a:effectRef>
+          <a:fontRef idx="minor">
+            <a:schemeClr val="lt1"/>
+          </a:fontRef>
+        </p:style>
+        <p:txBody>
+          <a:bodyPr rtlCol="0" anchor="ctr"/>
+          <a:lstStyle/>
+          <a:p>
+            <a:pPr algn="ctr"/>
+          </a:p>
+        </p:txBody>
+      </p:sp>
+      <p:sp>
+        <p:nvSpPr>
+          <p:cNvPr id="17" name="TextBox 16"/>
+          <p:cNvSpPr txBox="1"/>
+          <p:nvPr/>
+        </p:nvSpPr>
+        <p:spPr>
+          <a:xfrm>
+            <a:off x="10561320" y="2322576"/>
+            <a:ext cx="914400" cy="640080"/>
+          </a:xfrm>
+          <a:prstGeom prst="rect">
+            <a:avLst/>
+          </a:prstGeom>
+          <a:noFill/>
+        </p:spPr>
+        <p:txBody>
+          <a:bodyPr wrap="square">
+            <a:spAutoFit/>
+          </a:bodyPr>
+          <a:lstStyle/>
+          <a:p>
+            <a:pPr algn="r" rtl="1">
+              <a:spcAft>
+                <a:spcPts val="0"/>
+              </a:spcAft>
+            </a:pPr>
+            <a:r>
+              <a:rPr sz="1600" b="1" rtl="1" lang="fa-IR">
+                <a:solidFill>
+                  <a:srgbClr val="A33B24"/>
+                </a:solidFill>
+                <a:latin typeface="Calibri"/>
+                <a:ea typeface="B Nazanin"/>
+                <a:cs typeface="B Nazanin"/>
+              </a:rPr>
+              <a:t>۰۲</a:t>
+            </a:r>
+          </a:p>
+        </p:txBody>
+      </p:sp>
+      <p:sp>
+        <p:nvSpPr>
+          <p:cNvPr id="18" name="TextBox 17"/>
+          <p:cNvSpPr txBox="1"/>
+          <p:nvPr/>
+        </p:nvSpPr>
+        <p:spPr>
+          <a:xfrm>
+            <a:off x="685800" y="2322576"/>
+            <a:ext cx="9738360" cy="640080"/>
+          </a:xfrm>
+          <a:prstGeom prst="rect">
+            <a:avLst/>
+          </a:prstGeom>
+          <a:noFill/>
+        </p:spPr>
+        <p:txBody>
+          <a:bodyPr wrap="square">
+            <a:spAutoFit/>
+          </a:bodyPr>
+          <a:lstStyle/>
+          <a:p>
+            <a:pPr algn="r" rtl="1">
+              <a:spcAft>
+                <a:spcPts val="0"/>
+              </a:spcAft>
+            </a:pPr>
+            <a:r>
+              <a:rPr sz="1800" b="0" rtl="1" lang="fa-IR">
+                <a:solidFill>
+                  <a:srgbClr val="1B1816"/>
+                </a:solidFill>
+                <a:latin typeface="Calibri"/>
+                <a:ea typeface="B Nazanin"/>
+                <a:cs typeface="B Nazanin"/>
+              </a:rPr>
+              <a:t>تکه نامنظم با روش درجه </a:t>
+            </a:r>
+            <a:r>
+              <a:rPr sz="1800" b="0" rtl="0" lang="en-US">
+                <a:solidFill>
+                  <a:srgbClr val="1B1816"/>
+                </a:solidFill>
+                <a:latin typeface="Calibri"/>
+                <a:ea typeface="Calibri"/>
+                <a:cs typeface="Calibri"/>
+              </a:rPr>
+              <a:t>Fiorucci</a:t>
+            </a:r>
+            <a:r>
+              <a:rPr sz="1800" b="0" rtl="1" lang="fa-IR">
+                <a:solidFill>
+                  <a:srgbClr val="1B1816"/>
+                </a:solidFill>
+                <a:latin typeface="Calibri"/>
+                <a:ea typeface="B Nazanin"/>
+                <a:cs typeface="B Nazanin"/>
+              </a:rPr>
+              <a:t> پیدا می‌شود، نه با جست‌وجوی کامل نسخه اصلی </a:t>
+            </a:r>
+            <a:r>
+              <a:rPr sz="1800" b="0" rtl="0" lang="en-US">
+                <a:solidFill>
+                  <a:srgbClr val="1B1816"/>
+                </a:solidFill>
+                <a:latin typeface="Calibri"/>
+                <a:ea typeface="Calibri"/>
+                <a:cs typeface="Calibri"/>
+              </a:rPr>
+              <a:t>Alon.</a:t>
+            </a:r>
+          </a:p>
+        </p:txBody>
+      </p:sp>
+      <p:sp>
+        <p:nvSpPr>
+          <p:cNvPr id="19" name="Rounded Rectangle 18"/>
+          <p:cNvSpPr/>
+          <p:nvPr/>
+        </p:nvSpPr>
+        <p:spPr>
+          <a:xfrm>
+            <a:off x="457200" y="3127248"/>
+            <a:ext cx="11292840" cy="841248"/>
           </a:xfrm>
           <a:prstGeom prst="roundRect">
             <a:avLst>
@@ -7127,9 +7609,9 @@
             <a:noFill/>
           </a:ln>
           <a:effectLst>
-            <a:outerShdw blurRad="201168" dist="54864" dir="7200000" algn="ctr" rotWithShape="0">
+            <a:outerShdw blurRad="182880" dist="45720" dir="7200000" algn="ctr" rotWithShape="0">
               <a:srgbClr val="1A334A">
-                <a:alpha val="16000"/>
+                <a:alpha val="14000"/>
               </a:srgbClr>
             </a:outerShdw>
           </a:effectLst>
@@ -7158,57 +7640,57 @@
       </p:sp>
       <p:sp>
         <p:nvSpPr>
-          <p:cNvPr id="15" name="Rectangle 14"/>
-          <p:cNvSpPr/>
-          <p:nvPr/>
-        </p:nvSpPr>
-        <p:spPr>
-          <a:xfrm>
-            <a:off x="11649456" y="1170432"/>
-            <a:ext cx="91440" cy="5212080"/>
-          </a:xfrm>
-          <a:prstGeom prst="rect">
-            <a:avLst/>
-          </a:prstGeom>
-          <a:solidFill>
-            <a:srgbClr val="A33B24"/>
-          </a:solidFill>
-          <a:ln>
-            <a:noFill/>
-          </a:ln>
-        </p:spPr>
-        <p:style>
-          <a:lnRef idx="1">
-            <a:schemeClr val="accent1"/>
-          </a:lnRef>
-          <a:fillRef idx="3">
-            <a:schemeClr val="accent1"/>
-          </a:fillRef>
-          <a:effectRef idx="2">
-            <a:schemeClr val="accent1"/>
-          </a:effectRef>
-          <a:fontRef idx="minor">
-            <a:schemeClr val="lt1"/>
-          </a:fontRef>
-        </p:style>
-        <p:txBody>
-          <a:bodyPr rtlCol="0" anchor="ctr"/>
-          <a:lstStyle/>
-          <a:p>
-            <a:pPr algn="ctr"/>
-          </a:p>
-        </p:txBody>
-      </p:sp>
-      <p:sp>
-        <p:nvSpPr>
-          <p:cNvPr id="16" name="TextBox 15"/>
+          <p:cNvPr id="20" name="Rectangle 19"/>
+          <p:cNvSpPr/>
+          <p:nvPr/>
+        </p:nvSpPr>
+        <p:spPr>
+          <a:xfrm>
+            <a:off x="11594592" y="3236976"/>
+            <a:ext cx="91440" cy="621792"/>
+          </a:xfrm>
+          <a:prstGeom prst="rect">
+            <a:avLst/>
+          </a:prstGeom>
+          <a:solidFill>
+            <a:srgbClr val="1A334A"/>
+          </a:solidFill>
+          <a:ln>
+            <a:noFill/>
+          </a:ln>
+        </p:spPr>
+        <p:style>
+          <a:lnRef idx="1">
+            <a:schemeClr val="accent1"/>
+          </a:lnRef>
+          <a:fillRef idx="3">
+            <a:schemeClr val="accent1"/>
+          </a:fillRef>
+          <a:effectRef idx="2">
+            <a:schemeClr val="accent1"/>
+          </a:effectRef>
+          <a:fontRef idx="minor">
+            <a:schemeClr val="lt1"/>
+          </a:fontRef>
+        </p:style>
+        <p:txBody>
+          <a:bodyPr rtlCol="0" anchor="ctr"/>
+          <a:lstStyle/>
+          <a:p>
+            <a:pPr algn="ctr"/>
+          </a:p>
+        </p:txBody>
+      </p:sp>
+      <p:sp>
+        <p:nvSpPr>
+          <p:cNvPr id="21" name="TextBox 20"/>
           <p:cNvSpPr txBox="1"/>
           <p:nvPr/>
         </p:nvSpPr>
         <p:spPr>
           <a:xfrm>
-            <a:off x="8001000" y="1353312"/>
-            <a:ext cx="3666744" cy="4846320"/>
+            <a:off x="10561320" y="3255264"/>
+            <a:ext cx="914400" cy="640080"/>
           </a:xfrm>
           <a:prstGeom prst="rect">
             <a:avLst/>
@@ -7216,37 +7698,56 @@
           <a:noFill/>
         </p:spPr>
         <p:txBody>
-          <a:bodyPr wrap="square" anchor="ctr">
+          <a:bodyPr wrap="square">
             <a:spAutoFit/>
           </a:bodyPr>
           <a:lstStyle/>
           <a:p>
             <a:pPr algn="r" rtl="1">
               <a:spcAft>
-                <a:spcPts val="1200"/>
+                <a:spcPts val="0"/>
               </a:spcAft>
-              <a:buFont typeface="Calibri"/>
-              <a:buChar char="•"/>
             </a:pPr>
             <a:r>
-              <a:rPr sz="1800" b="0" rtl="1" lang="fa-IR">
-                <a:solidFill>
-                  <a:srgbClr val="1B1816"/>
+              <a:rPr sz="1600" b="1" rtl="1" lang="fa-IR">
+                <a:solidFill>
+                  <a:srgbClr val="A33B24"/>
                 </a:solidFill>
                 <a:latin typeface="Calibri"/>
                 <a:ea typeface="B Nazanin"/>
                 <a:cs typeface="B Nazanin"/>
               </a:rPr>
-              <a:t>هر گروه با فلش به یک رأس هم‌رنگ تبدیل می‌شود.</a:t>
-            </a:r>
-          </a:p>
+              <a:t>۰۳</a:t>
+            </a:r>
+          </a:p>
+        </p:txBody>
+      </p:sp>
+      <p:sp>
+        <p:nvSpPr>
+          <p:cNvPr id="22" name="TextBox 21"/>
+          <p:cNvSpPr txBox="1"/>
+          <p:nvPr/>
+        </p:nvSpPr>
+        <p:spPr>
+          <a:xfrm>
+            <a:off x="685800" y="3255264"/>
+            <a:ext cx="9738360" cy="640080"/>
+          </a:xfrm>
+          <a:prstGeom prst="rect">
+            <a:avLst/>
+          </a:prstGeom>
+          <a:noFill/>
+        </p:spPr>
+        <p:txBody>
+          <a:bodyPr wrap="square">
+            <a:spAutoFit/>
+          </a:bodyPr>
+          <a:lstStyle/>
           <a:p>
             <a:pPr algn="r" rtl="1">
               <a:spcAft>
-                <a:spcPts val="1200"/>
+                <a:spcPts val="0"/>
               </a:spcAft>
-              <a:buFont typeface="Calibri"/>
-              <a:buChar char="•"/>
             </a:pPr>
             <a:r>
               <a:rPr sz="1800" b="0" rtl="1" lang="fa-IR">
@@ -7257,47 +7758,7 @@
                 <a:ea typeface="B Nazanin"/>
                 <a:cs typeface="B Nazanin"/>
               </a:rPr>
-              <a:t>آن رأس نماینده همه نمونه‌های گروه است.</a:t>
-            </a:r>
-          </a:p>
-          <a:p>
-            <a:pPr algn="r" rtl="1">
-              <a:spcAft>
-                <a:spcPts val="1200"/>
-              </a:spcAft>
-              <a:buFont typeface="Calibri"/>
-              <a:buChar char="•"/>
-            </a:pPr>
-            <a:r>
-              <a:rPr sz="1800" b="0" rtl="1" lang="fa-IR">
-                <a:solidFill>
-                  <a:srgbClr val="1B1816"/>
-                </a:solidFill>
-                <a:latin typeface="Calibri"/>
-                <a:ea typeface="B Nazanin"/>
-                <a:cs typeface="B Nazanin"/>
-              </a:rPr>
-              <a:t>ضخامت یال بین دو رأس، همان چگالی دو گروه است.</a:t>
-            </a:r>
-          </a:p>
-          <a:p>
-            <a:pPr algn="r" rtl="1">
-              <a:spcAft>
-                <a:spcPts val="1200"/>
-              </a:spcAft>
-              <a:buFont typeface="Calibri"/>
-              <a:buChar char="•"/>
-            </a:pPr>
-            <a:r>
-              <a:rPr sz="1800" b="0" rtl="1" lang="fa-IR">
-                <a:solidFill>
-                  <a:srgbClr val="1B1816"/>
-                </a:solidFill>
-                <a:latin typeface="Calibri"/>
-                <a:ea typeface="B Nazanin"/>
-                <a:cs typeface="B Nazanin"/>
-              </a:rPr>
-              <a:t>خوشه‌بندی از اینجا به بعد روی همین گراف کوچک انجام می‌شود.</a:t>
+              <a:t>وقتی گروه‌ها به‌قدر کافی کوچک شدند، حلقه می‌ایستد. نتیجه تقریباً منظم است، نه یک افراز اثبات‌شده.</a:t>
             </a:r>
           </a:p>
         </p:txBody>
@@ -7592,7 +8053,7 @@
                 <a:ea typeface="B Nazanin"/>
                 <a:cs typeface="B Nazanin"/>
               </a:rPr>
-              <a:t>همان گراف، یک بار مستقیم و یک بار با لم</a:t>
+              <a:t>از یال‌های بین دو گروه تا یک چگالی</a:t>
             </a:r>
           </a:p>
         </p:txBody>
@@ -7732,8 +8193,8 @@
         </p:nvSpPr>
         <p:spPr>
           <a:xfrm>
-            <a:off x="6309360" y="1353312"/>
-            <a:ext cx="5669280" cy="4754880"/>
+            <a:off x="329184" y="1170432"/>
+            <a:ext cx="7360920" cy="5212080"/>
           </a:xfrm>
           <a:prstGeom prst="roundRect">
             <a:avLst>
@@ -7741,15 +8202,15 @@
             </a:avLst>
           </a:prstGeom>
           <a:solidFill>
-            <a:srgbClr val="FFFCF8"/>
+            <a:srgbClr val="DED5C4"/>
           </a:solidFill>
           <a:ln>
             <a:noFill/>
           </a:ln>
           <a:effectLst>
-            <a:outerShdw blurRad="256032" dist="73152" dir="7200000" algn="ctr" rotWithShape="0">
+            <a:outerShdw blurRad="201168" dist="54864" dir="7200000" algn="ctr" rotWithShape="0">
               <a:srgbClr val="1A334A">
-                <a:alpha val="18000"/>
+                <a:alpha val="16000"/>
               </a:srgbClr>
             </a:outerShdw>
           </a:effectLst>
@@ -7778,91 +8239,52 @@
       </p:sp>
       <p:sp>
         <p:nvSpPr>
-          <p:cNvPr id="12" name="Rectangle 11"/>
-          <p:cNvSpPr/>
-          <p:nvPr/>
-        </p:nvSpPr>
-        <p:spPr>
-          <a:xfrm>
-            <a:off x="6309360" y="1353312"/>
-            <a:ext cx="5669280" cy="91440"/>
-          </a:xfrm>
-          <a:prstGeom prst="rect">
-            <a:avLst/>
-          </a:prstGeom>
-          <a:solidFill>
-            <a:srgbClr val="A33B24"/>
-          </a:solidFill>
-          <a:ln>
-            <a:noFill/>
-          </a:ln>
-        </p:spPr>
-        <p:style>
-          <a:lnRef idx="1">
-            <a:schemeClr val="accent1"/>
-          </a:lnRef>
-          <a:fillRef idx="3">
-            <a:schemeClr val="accent1"/>
-          </a:fillRef>
-          <a:effectRef idx="2">
-            <a:schemeClr val="accent1"/>
-          </a:effectRef>
-          <a:fontRef idx="minor">
-            <a:schemeClr val="lt1"/>
-          </a:fontRef>
-        </p:style>
-        <p:txBody>
-          <a:bodyPr rtlCol="0" anchor="ctr"/>
-          <a:lstStyle/>
-          <a:p>
-            <a:pPr algn="ctr"/>
-          </a:p>
-        </p:txBody>
-      </p:sp>
-      <p:sp>
-        <p:nvSpPr>
-          <p:cNvPr id="13" name="TextBox 12"/>
-          <p:cNvSpPr txBox="1"/>
-          <p:nvPr/>
-        </p:nvSpPr>
-        <p:spPr>
-          <a:xfrm>
-            <a:off x="6537960" y="1536192"/>
-            <a:ext cx="5212080" cy="411480"/>
-          </a:xfrm>
-          <a:prstGeom prst="rect">
-            <a:avLst/>
-          </a:prstGeom>
-          <a:noFill/>
-        </p:spPr>
-        <p:txBody>
-          <a:bodyPr wrap="square">
-            <a:spAutoFit/>
-          </a:bodyPr>
-          <a:lstStyle/>
-          <a:p>
-            <a:pPr algn="r" rtl="1">
-              <a:spcAft>
-                <a:spcPts val="0"/>
-              </a:spcAft>
-            </a:pPr>
-            <a:r>
-              <a:rPr sz="2200" b="1" rtl="1" lang="fa-IR">
-                <a:solidFill>
-                  <a:srgbClr val="1A334A"/>
-                </a:solidFill>
-                <a:latin typeface="Calibri"/>
-                <a:ea typeface="B Nazanin"/>
-                <a:cs typeface="B Nazanin"/>
-              </a:rPr>
-              <a:t>راه پایه</a:t>
-            </a:r>
+          <p:cNvPr id="12" name="Rounded Rectangle 11"/>
+          <p:cNvSpPr/>
+          <p:nvPr/>
+        </p:nvSpPr>
+        <p:spPr>
+          <a:xfrm>
+            <a:off x="420624" y="1261872"/>
+            <a:ext cx="7178040" cy="5029200"/>
+          </a:xfrm>
+          <a:prstGeom prst="roundRect">
+            <a:avLst>
+              <a:gd name="adj" fmla="val 10000"/>
+            </a:avLst>
+          </a:prstGeom>
+          <a:solidFill>
+            <a:srgbClr val="FFFCF8"/>
+          </a:solidFill>
+          <a:ln>
+            <a:noFill/>
+          </a:ln>
+        </p:spPr>
+        <p:style>
+          <a:lnRef idx="1">
+            <a:schemeClr val="accent1"/>
+          </a:lnRef>
+          <a:fillRef idx="3">
+            <a:schemeClr val="accent1"/>
+          </a:fillRef>
+          <a:effectRef idx="2">
+            <a:schemeClr val="accent1"/>
+          </a:effectRef>
+          <a:fontRef idx="minor">
+            <a:schemeClr val="lt1"/>
+          </a:fontRef>
+        </p:style>
+        <p:txBody>
+          <a:bodyPr rtlCol="0" anchor="ctr"/>
+          <a:lstStyle/>
+          <a:p>
+            <a:pPr algn="ctr"/>
           </a:p>
         </p:txBody>
       </p:sp>
       <p:pic>
         <p:nvPicPr>
-          <p:cNvPr id="14" name="Picture 13" descr="concept_path_direct.png"/>
+          <p:cNvPr id="13" name="Picture 12" descr="concept_density.png"/>
           <p:cNvPicPr>
             <a:picLocks noChangeAspect="1"/>
           </p:cNvPicPr>
@@ -7876,8 +8298,8 @@
         </p:blipFill>
         <p:spPr>
           <a:xfrm>
-            <a:off x="7399210" y="1965960"/>
-            <a:ext cx="3489579" cy="3246120"/>
+            <a:off x="530352" y="1878676"/>
+            <a:ext cx="6958584" cy="3795591"/>
           </a:xfrm>
           <a:prstGeom prst="rect">
             <a:avLst/>
@@ -7886,14 +8308,109 @@
       </p:pic>
       <p:sp>
         <p:nvSpPr>
-          <p:cNvPr id="15" name="TextBox 14"/>
+          <p:cNvPr id="14" name="Rounded Rectangle 13"/>
+          <p:cNvSpPr/>
+          <p:nvPr/>
+        </p:nvSpPr>
+        <p:spPr>
+          <a:xfrm>
+            <a:off x="7836408" y="1170432"/>
+            <a:ext cx="4050791" cy="5212080"/>
+          </a:xfrm>
+          <a:prstGeom prst="roundRect">
+            <a:avLst>
+              <a:gd name="adj" fmla="val 10000"/>
+            </a:avLst>
+          </a:prstGeom>
+          <a:solidFill>
+            <a:srgbClr val="FFFCF8"/>
+          </a:solidFill>
+          <a:ln>
+            <a:noFill/>
+          </a:ln>
+          <a:effectLst>
+            <a:outerShdw blurRad="201168" dist="54864" dir="7200000" algn="ctr" rotWithShape="0">
+              <a:srgbClr val="1A334A">
+                <a:alpha val="16000"/>
+              </a:srgbClr>
+            </a:outerShdw>
+          </a:effectLst>
+        </p:spPr>
+        <p:style>
+          <a:lnRef idx="1">
+            <a:schemeClr val="accent1"/>
+          </a:lnRef>
+          <a:fillRef idx="3">
+            <a:schemeClr val="accent1"/>
+          </a:fillRef>
+          <a:effectRef idx="2">
+            <a:schemeClr val="accent1"/>
+          </a:effectRef>
+          <a:fontRef idx="minor">
+            <a:schemeClr val="lt1"/>
+          </a:fontRef>
+        </p:style>
+        <p:txBody>
+          <a:bodyPr rtlCol="0" anchor="ctr"/>
+          <a:lstStyle/>
+          <a:p>
+            <a:pPr algn="ctr"/>
+          </a:p>
+        </p:txBody>
+      </p:sp>
+      <p:sp>
+        <p:nvSpPr>
+          <p:cNvPr id="15" name="Rectangle 14"/>
+          <p:cNvSpPr/>
+          <p:nvPr/>
+        </p:nvSpPr>
+        <p:spPr>
+          <a:xfrm>
+            <a:off x="11649456" y="1170432"/>
+            <a:ext cx="91440" cy="5212080"/>
+          </a:xfrm>
+          <a:prstGeom prst="rect">
+            <a:avLst/>
+          </a:prstGeom>
+          <a:solidFill>
+            <a:srgbClr val="A33B24"/>
+          </a:solidFill>
+          <a:ln>
+            <a:noFill/>
+          </a:ln>
+        </p:spPr>
+        <p:style>
+          <a:lnRef idx="1">
+            <a:schemeClr val="accent1"/>
+          </a:lnRef>
+          <a:fillRef idx="3">
+            <a:schemeClr val="accent1"/>
+          </a:fillRef>
+          <a:effectRef idx="2">
+            <a:schemeClr val="accent1"/>
+          </a:effectRef>
+          <a:fontRef idx="minor">
+            <a:schemeClr val="lt1"/>
+          </a:fontRef>
+        </p:style>
+        <p:txBody>
+          <a:bodyPr rtlCol="0" anchor="ctr"/>
+          <a:lstStyle/>
+          <a:p>
+            <a:pPr algn="ctr"/>
+          </a:p>
+        </p:txBody>
+      </p:sp>
+      <p:sp>
+        <p:nvSpPr>
+          <p:cNvPr id="16" name="TextBox 15"/>
           <p:cNvSpPr txBox="1"/>
           <p:nvPr/>
         </p:nvSpPr>
         <p:spPr>
           <a:xfrm>
-            <a:off x="6537960" y="5257800"/>
-            <a:ext cx="5212080" cy="731520"/>
+            <a:off x="8001000" y="1353312"/>
+            <a:ext cx="3666744" cy="4846320"/>
           </a:xfrm>
           <a:prstGeom prst="rect">
             <a:avLst/>
@@ -7901,18 +8418,20 @@
           <a:noFill/>
         </p:spPr>
         <p:txBody>
-          <a:bodyPr wrap="square">
+          <a:bodyPr wrap="square" anchor="ctr">
             <a:spAutoFit/>
           </a:bodyPr>
           <a:lstStyle/>
           <a:p>
             <a:pPr algn="r" rtl="1">
               <a:spcAft>
-                <a:spcPts val="0"/>
+                <a:spcPts val="1200"/>
               </a:spcAft>
+              <a:buFont typeface="Calibri"/>
+              <a:buChar char="•"/>
             </a:pPr>
             <a:r>
-              <a:rPr sz="1600" b="0" rtl="1" lang="fa-IR">
+              <a:rPr sz="1800" b="0" rtl="1" lang="fa-IR">
                 <a:solidFill>
                   <a:srgbClr val="1B1816"/>
                 </a:solidFill>
@@ -7920,200 +8439,39 @@
                 <a:ea typeface="B Nazanin"/>
                 <a:cs typeface="B Nazanin"/>
               </a:rPr>
-              <a:t>خوشه‌بندی مستقیم روی گراف اصلی. رنگ هر رأس همان خوشه اوست.</a:t>
-            </a:r>
-          </a:p>
-        </p:txBody>
-      </p:sp>
-      <p:sp>
-        <p:nvSpPr>
-          <p:cNvPr id="16" name="Rounded Rectangle 15"/>
-          <p:cNvSpPr/>
-          <p:nvPr/>
-        </p:nvSpPr>
-        <p:spPr>
-          <a:xfrm>
-            <a:off x="411480" y="1353312"/>
-            <a:ext cx="5669280" cy="4754880"/>
-          </a:xfrm>
-          <a:prstGeom prst="roundRect">
-            <a:avLst>
-              <a:gd name="adj" fmla="val 10000"/>
-            </a:avLst>
-          </a:prstGeom>
-          <a:solidFill>
-            <a:srgbClr val="FFFCF8"/>
-          </a:solidFill>
-          <a:ln>
-            <a:noFill/>
-          </a:ln>
-          <a:effectLst>
-            <a:outerShdw blurRad="256032" dist="73152" dir="7200000" algn="ctr" rotWithShape="0">
-              <a:srgbClr val="1A334A">
-                <a:alpha val="18000"/>
-              </a:srgbClr>
-            </a:outerShdw>
-          </a:effectLst>
-        </p:spPr>
-        <p:style>
-          <a:lnRef idx="1">
-            <a:schemeClr val="accent1"/>
-          </a:lnRef>
-          <a:fillRef idx="3">
-            <a:schemeClr val="accent1"/>
-          </a:fillRef>
-          <a:effectRef idx="2">
-            <a:schemeClr val="accent1"/>
-          </a:effectRef>
-          <a:fontRef idx="minor">
-            <a:schemeClr val="lt1"/>
-          </a:fontRef>
-        </p:style>
-        <p:txBody>
-          <a:bodyPr rtlCol="0" anchor="ctr"/>
-          <a:lstStyle/>
-          <a:p>
-            <a:pPr algn="ctr"/>
-          </a:p>
-        </p:txBody>
-      </p:sp>
-      <p:sp>
-        <p:nvSpPr>
-          <p:cNvPr id="17" name="Rectangle 16"/>
-          <p:cNvSpPr/>
-          <p:nvPr/>
-        </p:nvSpPr>
-        <p:spPr>
-          <a:xfrm>
-            <a:off x="411480" y="1353312"/>
-            <a:ext cx="5669280" cy="91440"/>
-          </a:xfrm>
-          <a:prstGeom prst="rect">
-            <a:avLst/>
-          </a:prstGeom>
-          <a:solidFill>
-            <a:srgbClr val="1A334A"/>
-          </a:solidFill>
-          <a:ln>
-            <a:noFill/>
-          </a:ln>
-        </p:spPr>
-        <p:style>
-          <a:lnRef idx="1">
-            <a:schemeClr val="accent1"/>
-          </a:lnRef>
-          <a:fillRef idx="3">
-            <a:schemeClr val="accent1"/>
-          </a:fillRef>
-          <a:effectRef idx="2">
-            <a:schemeClr val="accent1"/>
-          </a:effectRef>
-          <a:fontRef idx="minor">
-            <a:schemeClr val="lt1"/>
-          </a:fontRef>
-        </p:style>
-        <p:txBody>
-          <a:bodyPr rtlCol="0" anchor="ctr"/>
-          <a:lstStyle/>
-          <a:p>
-            <a:pPr algn="ctr"/>
-          </a:p>
-        </p:txBody>
-      </p:sp>
-      <p:sp>
-        <p:nvSpPr>
-          <p:cNvPr id="18" name="TextBox 17"/>
-          <p:cNvSpPr txBox="1"/>
-          <p:nvPr/>
-        </p:nvSpPr>
-        <p:spPr>
-          <a:xfrm>
-            <a:off x="640080" y="1536192"/>
-            <a:ext cx="5212080" cy="411480"/>
-          </a:xfrm>
-          <a:prstGeom prst="rect">
-            <a:avLst/>
-          </a:prstGeom>
-          <a:noFill/>
-        </p:spPr>
-        <p:txBody>
-          <a:bodyPr wrap="square">
-            <a:spAutoFit/>
-          </a:bodyPr>
-          <a:lstStyle/>
+              <a:t>چپ، همه یال‌های بین دو گروه را نشان می‌دهد.</a:t>
+            </a:r>
+          </a:p>
           <a:p>
             <a:pPr algn="r" rtl="1">
               <a:spcAft>
-                <a:spcPts val="0"/>
+                <a:spcPts val="1200"/>
               </a:spcAft>
+              <a:buFont typeface="Calibri"/>
+              <a:buChar char="•"/>
             </a:pPr>
             <a:r>
-              <a:rPr sz="2200" b="1" rtl="1" lang="fa-IR">
-                <a:solidFill>
-                  <a:srgbClr val="1A334A"/>
+              <a:rPr sz="1800" b="0" rtl="1" lang="fa-IR">
+                <a:solidFill>
+                  <a:srgbClr val="1B1816"/>
                 </a:solidFill>
                 <a:latin typeface="Calibri"/>
                 <a:ea typeface="B Nazanin"/>
                 <a:cs typeface="B Nazanin"/>
               </a:rPr>
-              <a:t>راه لم</a:t>
-            </a:r>
-          </a:p>
-        </p:txBody>
-      </p:sp>
-      <p:pic>
-        <p:nvPicPr>
-          <p:cNvPr id="19" name="Picture 18" descr="concept_path_lemma.png"/>
-          <p:cNvPicPr>
-            <a:picLocks noChangeAspect="1"/>
-          </p:cNvPicPr>
-          <p:nvPr/>
-        </p:nvPicPr>
-        <p:blipFill>
-          <a:blip r:embed="rId3"/>
-          <a:stretch>
-            <a:fillRect/>
-          </a:stretch>
-        </p:blipFill>
-        <p:spPr>
-          <a:xfrm>
-            <a:off x="2176810" y="1965960"/>
-            <a:ext cx="2138620" cy="3246120"/>
-          </a:xfrm>
-          <a:prstGeom prst="rect">
-            <a:avLst/>
-          </a:prstGeom>
-        </p:spPr>
-      </p:pic>
-      <p:sp>
-        <p:nvSpPr>
-          <p:cNvPr id="20" name="TextBox 19"/>
-          <p:cNvSpPr txBox="1"/>
-          <p:nvPr/>
-        </p:nvSpPr>
-        <p:spPr>
-          <a:xfrm>
-            <a:off x="640080" y="5257800"/>
-            <a:ext cx="5212080" cy="731520"/>
-          </a:xfrm>
-          <a:prstGeom prst="rect">
-            <a:avLst/>
-          </a:prstGeom>
-          <a:noFill/>
-        </p:spPr>
-        <p:txBody>
-          <a:bodyPr wrap="square">
-            <a:spAutoFit/>
-          </a:bodyPr>
-          <a:lstStyle/>
+              <a:t>راست، همان رابطه فقط با یک میله مانده است.</a:t>
+            </a:r>
+          </a:p>
           <a:p>
             <a:pPr algn="r" rtl="1">
               <a:spcAft>
-                <a:spcPts val="0"/>
+                <a:spcPts val="1200"/>
               </a:spcAft>
+              <a:buFont typeface="Calibri"/>
+              <a:buChar char="•"/>
             </a:pPr>
             <a:r>
-              <a:rPr sz="1600" b="0" rtl="1" lang="fa-IR">
+              <a:rPr sz="1800" b="0" rtl="1" lang="fa-IR">
                 <a:solidFill>
                   <a:srgbClr val="1B1816"/>
                 </a:solidFill>
@@ -8121,7 +8479,7 @@
                 <a:ea typeface="B Nazanin"/>
                 <a:cs typeface="B Nazanin"/>
               </a:rPr>
-              <a:t>رأس‌های زیاد به ۴ رأس کوچک می‌شوند. خوشه‌بندی روی همین گراف چهار رأسی انجام می‌شود.</a:t>
+              <a:t>ضخامت میله یعنی چگالی: سهم یال‌های موجود از همه یال‌های ممکن.</a:t>
             </a:r>
           </a:p>
         </p:txBody>
@@ -8416,7 +8774,7 @@
                 <a:ea typeface="B Nazanin"/>
                 <a:cs typeface="B Nazanin"/>
               </a:rPr>
-              <a:t>برگرداندن خوشه به تک‌تک نمونه‌ها</a:t>
+              <a:t>گراف کوچک: هر گروه یک رأس</a:t>
             </a:r>
           </a:p>
         </p:txBody>
@@ -8647,7 +9005,7 @@
       </p:sp>
       <p:pic>
         <p:nvPicPr>
-          <p:cNvPr id="13" name="Picture 12" descr="concept_lift.png"/>
+          <p:cNvPr id="13" name="Picture 12" descr="concept_reduced.png"/>
           <p:cNvPicPr>
             <a:picLocks noChangeAspect="1"/>
           </p:cNvPicPr>
@@ -8802,7 +9160,7 @@
                 <a:ea typeface="B Nazanin"/>
                 <a:cs typeface="B Nazanin"/>
               </a:rPr>
-              <a:t>خوشه‌بندی فقط به رأس‌های گراف کوچک رنگ داده است.</a:t>
+              <a:t>هر گروه با فلش به یک رأس هم‌رنگ تبدیل می‌شود.</a:t>
             </a:r>
           </a:p>
           <a:p>
@@ -8822,7 +9180,7 @@
                 <a:ea typeface="B Nazanin"/>
                 <a:cs typeface="B Nazanin"/>
               </a:rPr>
-              <a:t>هر نمونه، رنگ رأس گروهی را می‌گیرد که عضو آن است.</a:t>
+              <a:t>آن رأس نماینده همه نمونه‌های گروه است.</a:t>
             </a:r>
           </a:p>
           <a:p>
@@ -8842,7 +9200,27 @@
                 <a:ea typeface="B Nazanin"/>
                 <a:cs typeface="B Nazanin"/>
               </a:rPr>
-              <a:t>پس خروجی باز هم یک برچسب برای هر نمونه اصلی است.</a:t>
+              <a:t>ضخامت یال بین دو رأس، همان چگالی دو گروه است.</a:t>
+            </a:r>
+          </a:p>
+          <a:p>
+            <a:pPr algn="r" rtl="1">
+              <a:spcAft>
+                <a:spcPts val="1200"/>
+              </a:spcAft>
+              <a:buFont typeface="Calibri"/>
+              <a:buChar char="•"/>
+            </a:pPr>
+            <a:r>
+              <a:rPr sz="1800" b="0" rtl="1" lang="fa-IR">
+                <a:solidFill>
+                  <a:srgbClr val="1B1816"/>
+                </a:solidFill>
+                <a:latin typeface="Calibri"/>
+                <a:ea typeface="B Nazanin"/>
+                <a:cs typeface="B Nazanin"/>
+              </a:rPr>
+              <a:t>خوشه‌بندی از اینجا به بعد روی همین گراف کوچک انجام می‌شود.</a:t>
             </a:r>
           </a:p>
         </p:txBody>
@@ -9137,18 +9515,7 @@
                 <a:ea typeface="B Nazanin"/>
                 <a:cs typeface="B Nazanin"/>
               </a:rPr>
-              <a:t>کل مسیر آزمایش، از داده تا </a:t>
-            </a:r>
-            <a:r>
-              <a:rPr sz="2600" b="1" rtl="0" lang="en-US">
-                <a:solidFill>
-                  <a:srgbClr val="1A334A"/>
-                </a:solidFill>
-                <a:latin typeface="Calibri"/>
-                <a:ea typeface="Calibri"/>
-                <a:cs typeface="Calibri"/>
-              </a:rPr>
-              <a:t>NMI</a:t>
+              <a:t>همان گراف، یک بار مستقیم و یک بار با لم</a:t>
             </a:r>
           </a:p>
         </p:txBody>
@@ -9288,8 +9655,8 @@
         </p:nvSpPr>
         <p:spPr>
           <a:xfrm>
-            <a:off x="329184" y="1170432"/>
-            <a:ext cx="7360920" cy="5212080"/>
+            <a:off x="6309360" y="1353312"/>
+            <a:ext cx="5669280" cy="4754880"/>
           </a:xfrm>
           <a:prstGeom prst="roundRect">
             <a:avLst>
@@ -9297,15 +9664,15 @@
             </a:avLst>
           </a:prstGeom>
           <a:solidFill>
-            <a:srgbClr val="DED5C4"/>
+            <a:srgbClr val="FFFCF8"/>
           </a:solidFill>
           <a:ln>
             <a:noFill/>
           </a:ln>
           <a:effectLst>
-            <a:outerShdw blurRad="201168" dist="54864" dir="7200000" algn="ctr" rotWithShape="0">
+            <a:outerShdw blurRad="256032" dist="73152" dir="7200000" algn="ctr" rotWithShape="0">
               <a:srgbClr val="1A334A">
-                <a:alpha val="16000"/>
+                <a:alpha val="18000"/>
               </a:srgbClr>
             </a:outerShdw>
           </a:effectLst>
@@ -9334,52 +9701,91 @@
       </p:sp>
       <p:sp>
         <p:nvSpPr>
-          <p:cNvPr id="12" name="Rounded Rectangle 11"/>
-          <p:cNvSpPr/>
-          <p:nvPr/>
-        </p:nvSpPr>
-        <p:spPr>
-          <a:xfrm>
-            <a:off x="420624" y="1261872"/>
-            <a:ext cx="7178040" cy="5029200"/>
-          </a:xfrm>
-          <a:prstGeom prst="roundRect">
-            <a:avLst>
-              <a:gd name="adj" fmla="val 10000"/>
-            </a:avLst>
-          </a:prstGeom>
-          <a:solidFill>
-            <a:srgbClr val="FFFCF8"/>
-          </a:solidFill>
-          <a:ln>
-            <a:noFill/>
-          </a:ln>
-        </p:spPr>
-        <p:style>
-          <a:lnRef idx="1">
-            <a:schemeClr val="accent1"/>
-          </a:lnRef>
-          <a:fillRef idx="3">
-            <a:schemeClr val="accent1"/>
-          </a:fillRef>
-          <a:effectRef idx="2">
-            <a:schemeClr val="accent1"/>
-          </a:effectRef>
-          <a:fontRef idx="minor">
-            <a:schemeClr val="lt1"/>
-          </a:fontRef>
-        </p:style>
-        <p:txBody>
-          <a:bodyPr rtlCol="0" anchor="ctr"/>
-          <a:lstStyle/>
-          <a:p>
-            <a:pPr algn="ctr"/>
+          <p:cNvPr id="12" name="Rectangle 11"/>
+          <p:cNvSpPr/>
+          <p:nvPr/>
+        </p:nvSpPr>
+        <p:spPr>
+          <a:xfrm>
+            <a:off x="6309360" y="1353312"/>
+            <a:ext cx="5669280" cy="91440"/>
+          </a:xfrm>
+          <a:prstGeom prst="rect">
+            <a:avLst/>
+          </a:prstGeom>
+          <a:solidFill>
+            <a:srgbClr val="A33B24"/>
+          </a:solidFill>
+          <a:ln>
+            <a:noFill/>
+          </a:ln>
+        </p:spPr>
+        <p:style>
+          <a:lnRef idx="1">
+            <a:schemeClr val="accent1"/>
+          </a:lnRef>
+          <a:fillRef idx="3">
+            <a:schemeClr val="accent1"/>
+          </a:fillRef>
+          <a:effectRef idx="2">
+            <a:schemeClr val="accent1"/>
+          </a:effectRef>
+          <a:fontRef idx="minor">
+            <a:schemeClr val="lt1"/>
+          </a:fontRef>
+        </p:style>
+        <p:txBody>
+          <a:bodyPr rtlCol="0" anchor="ctr"/>
+          <a:lstStyle/>
+          <a:p>
+            <a:pPr algn="ctr"/>
+          </a:p>
+        </p:txBody>
+      </p:sp>
+      <p:sp>
+        <p:nvSpPr>
+          <p:cNvPr id="13" name="TextBox 12"/>
+          <p:cNvSpPr txBox="1"/>
+          <p:nvPr/>
+        </p:nvSpPr>
+        <p:spPr>
+          <a:xfrm>
+            <a:off x="6537960" y="1536192"/>
+            <a:ext cx="5212080" cy="411480"/>
+          </a:xfrm>
+          <a:prstGeom prst="rect">
+            <a:avLst/>
+          </a:prstGeom>
+          <a:noFill/>
+        </p:spPr>
+        <p:txBody>
+          <a:bodyPr wrap="square">
+            <a:spAutoFit/>
+          </a:bodyPr>
+          <a:lstStyle/>
+          <a:p>
+            <a:pPr algn="r" rtl="1">
+              <a:spcAft>
+                <a:spcPts val="0"/>
+              </a:spcAft>
+            </a:pPr>
+            <a:r>
+              <a:rPr sz="2200" b="1" rtl="1" lang="fa-IR">
+                <a:solidFill>
+                  <a:srgbClr val="1A334A"/>
+                </a:solidFill>
+                <a:latin typeface="Calibri"/>
+                <a:ea typeface="B Nazanin"/>
+                <a:cs typeface="B Nazanin"/>
+              </a:rPr>
+              <a:t>راه پایه</a:t>
+            </a:r>
           </a:p>
         </p:txBody>
       </p:sp>
       <p:pic>
         <p:nvPicPr>
-          <p:cNvPr id="13" name="Picture 12" descr="fig_pipeline.png"/>
+          <p:cNvPr id="14" name="Picture 13" descr="concept_path_direct.png"/>
           <p:cNvPicPr>
             <a:picLocks noChangeAspect="1"/>
           </p:cNvPicPr>
@@ -9393,8 +9799,8 @@
         </p:blipFill>
         <p:spPr>
           <a:xfrm>
-            <a:off x="530352" y="2300409"/>
-            <a:ext cx="6958584" cy="2952126"/>
+            <a:off x="7399210" y="1965960"/>
+            <a:ext cx="3489579" cy="3246120"/>
           </a:xfrm>
           <a:prstGeom prst="rect">
             <a:avLst/>
@@ -9403,14 +9809,55 @@
       </p:pic>
       <p:sp>
         <p:nvSpPr>
-          <p:cNvPr id="14" name="Rounded Rectangle 13"/>
-          <p:cNvSpPr/>
-          <p:nvPr/>
-        </p:nvSpPr>
-        <p:spPr>
-          <a:xfrm>
-            <a:off x="7836408" y="1170432"/>
-            <a:ext cx="4050791" cy="5212080"/>
+          <p:cNvPr id="15" name="TextBox 14"/>
+          <p:cNvSpPr txBox="1"/>
+          <p:nvPr/>
+        </p:nvSpPr>
+        <p:spPr>
+          <a:xfrm>
+            <a:off x="6537960" y="5257800"/>
+            <a:ext cx="5212080" cy="731520"/>
+          </a:xfrm>
+          <a:prstGeom prst="rect">
+            <a:avLst/>
+          </a:prstGeom>
+          <a:noFill/>
+        </p:spPr>
+        <p:txBody>
+          <a:bodyPr wrap="square">
+            <a:spAutoFit/>
+          </a:bodyPr>
+          <a:lstStyle/>
+          <a:p>
+            <a:pPr algn="r" rtl="1">
+              <a:spcAft>
+                <a:spcPts val="0"/>
+              </a:spcAft>
+            </a:pPr>
+            <a:r>
+              <a:rPr sz="1600" b="0" rtl="1" lang="fa-IR">
+                <a:solidFill>
+                  <a:srgbClr val="1B1816"/>
+                </a:solidFill>
+                <a:latin typeface="Calibri"/>
+                <a:ea typeface="B Nazanin"/>
+                <a:cs typeface="B Nazanin"/>
+              </a:rPr>
+              <a:t>خوشه‌بندی مستقیم روی گراف اصلی. رنگ هر رأس همان خوشه اوست.</a:t>
+            </a:r>
+          </a:p>
+        </p:txBody>
+      </p:sp>
+      <p:sp>
+        <p:nvSpPr>
+          <p:cNvPr id="16" name="Rounded Rectangle 15"/>
+          <p:cNvSpPr/>
+          <p:nvPr/>
+        </p:nvSpPr>
+        <p:spPr>
+          <a:xfrm>
+            <a:off x="411480" y="1353312"/>
+            <a:ext cx="5669280" cy="4754880"/>
           </a:xfrm>
           <a:prstGeom prst="roundRect">
             <a:avLst>
@@ -9424,9 +9871,9 @@
             <a:noFill/>
           </a:ln>
           <a:effectLst>
-            <a:outerShdw blurRad="201168" dist="54864" dir="7200000" algn="ctr" rotWithShape="0">
+            <a:outerShdw blurRad="256032" dist="73152" dir="7200000" algn="ctr" rotWithShape="0">
               <a:srgbClr val="1A334A">
-                <a:alpha val="16000"/>
+                <a:alpha val="18000"/>
               </a:srgbClr>
             </a:outerShdw>
           </a:effectLst>
@@ -9455,57 +9902,57 @@
       </p:sp>
       <p:sp>
         <p:nvSpPr>
-          <p:cNvPr id="15" name="Rectangle 14"/>
-          <p:cNvSpPr/>
-          <p:nvPr/>
-        </p:nvSpPr>
-        <p:spPr>
-          <a:xfrm>
-            <a:off x="11649456" y="1170432"/>
-            <a:ext cx="91440" cy="5212080"/>
-          </a:xfrm>
-          <a:prstGeom prst="rect">
-            <a:avLst/>
-          </a:prstGeom>
-          <a:solidFill>
-            <a:srgbClr val="A33B24"/>
-          </a:solidFill>
-          <a:ln>
-            <a:noFill/>
-          </a:ln>
-        </p:spPr>
-        <p:style>
-          <a:lnRef idx="1">
-            <a:schemeClr val="accent1"/>
-          </a:lnRef>
-          <a:fillRef idx="3">
-            <a:schemeClr val="accent1"/>
-          </a:fillRef>
-          <a:effectRef idx="2">
-            <a:schemeClr val="accent1"/>
-          </a:effectRef>
-          <a:fontRef idx="minor">
-            <a:schemeClr val="lt1"/>
-          </a:fontRef>
-        </p:style>
-        <p:txBody>
-          <a:bodyPr rtlCol="0" anchor="ctr"/>
-          <a:lstStyle/>
-          <a:p>
-            <a:pPr algn="ctr"/>
-          </a:p>
-        </p:txBody>
-      </p:sp>
-      <p:sp>
-        <p:nvSpPr>
-          <p:cNvPr id="16" name="TextBox 15"/>
+          <p:cNvPr id="17" name="Rectangle 16"/>
+          <p:cNvSpPr/>
+          <p:nvPr/>
+        </p:nvSpPr>
+        <p:spPr>
+          <a:xfrm>
+            <a:off x="411480" y="1353312"/>
+            <a:ext cx="5669280" cy="91440"/>
+          </a:xfrm>
+          <a:prstGeom prst="rect">
+            <a:avLst/>
+          </a:prstGeom>
+          <a:solidFill>
+            <a:srgbClr val="1A334A"/>
+          </a:solidFill>
+          <a:ln>
+            <a:noFill/>
+          </a:ln>
+        </p:spPr>
+        <p:style>
+          <a:lnRef idx="1">
+            <a:schemeClr val="accent1"/>
+          </a:lnRef>
+          <a:fillRef idx="3">
+            <a:schemeClr val="accent1"/>
+          </a:fillRef>
+          <a:effectRef idx="2">
+            <a:schemeClr val="accent1"/>
+          </a:effectRef>
+          <a:fontRef idx="minor">
+            <a:schemeClr val="lt1"/>
+          </a:fontRef>
+        </p:style>
+        <p:txBody>
+          <a:bodyPr rtlCol="0" anchor="ctr"/>
+          <a:lstStyle/>
+          <a:p>
+            <a:pPr algn="ctr"/>
+          </a:p>
+        </p:txBody>
+      </p:sp>
+      <p:sp>
+        <p:nvSpPr>
+          <p:cNvPr id="18" name="TextBox 17"/>
           <p:cNvSpPr txBox="1"/>
           <p:nvPr/>
         </p:nvSpPr>
         <p:spPr>
           <a:xfrm>
-            <a:off x="8001000" y="1353312"/>
-            <a:ext cx="3666744" cy="4846320"/>
+            <a:off x="640080" y="1536192"/>
+            <a:ext cx="5212080" cy="411480"/>
           </a:xfrm>
           <a:prstGeom prst="rect">
             <a:avLst/>
@@ -9513,40 +9960,83 @@
           <a:noFill/>
         </p:spPr>
         <p:txBody>
-          <a:bodyPr wrap="square" anchor="ctr">
+          <a:bodyPr wrap="square">
             <a:spAutoFit/>
           </a:bodyPr>
           <a:lstStyle/>
           <a:p>
             <a:pPr algn="r" rtl="1">
               <a:spcAft>
-                <a:spcPts val="1200"/>
+                <a:spcPts val="0"/>
               </a:spcAft>
-              <a:buFont typeface="Calibri"/>
-              <a:buChar char="•"/>
             </a:pPr>
             <a:r>
-              <a:rPr sz="1800" b="0" rtl="1" lang="fa-IR">
-                <a:solidFill>
-                  <a:srgbClr val="1B1816"/>
+              <a:rPr sz="2200" b="1" rtl="1" lang="fa-IR">
+                <a:solidFill>
+                  <a:srgbClr val="1A334A"/>
                 </a:solidFill>
                 <a:latin typeface="Calibri"/>
                 <a:ea typeface="B Nazanin"/>
                 <a:cs typeface="B Nazanin"/>
               </a:rPr>
-              <a:t>داده خوانده می‌شود، در صورت نیاز کوچک می‌شود، و گراف شباهت یک بار ساخته می‌شود.</a:t>
-            </a:r>
-          </a:p>
+              <a:t>راه لم</a:t>
+            </a:r>
+          </a:p>
+        </p:txBody>
+      </p:sp>
+      <p:pic>
+        <p:nvPicPr>
+          <p:cNvPr id="19" name="Picture 18" descr="concept_path_lemma.png"/>
+          <p:cNvPicPr>
+            <a:picLocks noChangeAspect="1"/>
+          </p:cNvPicPr>
+          <p:nvPr/>
+        </p:nvPicPr>
+        <p:blipFill>
+          <a:blip r:embed="rId3"/>
+          <a:stretch>
+            <a:fillRect/>
+          </a:stretch>
+        </p:blipFill>
+        <p:spPr>
+          <a:xfrm>
+            <a:off x="2176810" y="1965960"/>
+            <a:ext cx="2138620" cy="3246120"/>
+          </a:xfrm>
+          <a:prstGeom prst="rect">
+            <a:avLst/>
+          </a:prstGeom>
+        </p:spPr>
+      </p:pic>
+      <p:sp>
+        <p:nvSpPr>
+          <p:cNvPr id="20" name="TextBox 19"/>
+          <p:cNvSpPr txBox="1"/>
+          <p:nvPr/>
+        </p:nvSpPr>
+        <p:spPr>
+          <a:xfrm>
+            <a:off x="640080" y="5257800"/>
+            <a:ext cx="5212080" cy="731520"/>
+          </a:xfrm>
+          <a:prstGeom prst="rect">
+            <a:avLst/>
+          </a:prstGeom>
+          <a:noFill/>
+        </p:spPr>
+        <p:txBody>
+          <a:bodyPr wrap="square">
+            <a:spAutoFit/>
+          </a:bodyPr>
+          <a:lstStyle/>
           <a:p>
             <a:pPr algn="r" rtl="1">
               <a:spcAft>
-                <a:spcPts val="1200"/>
+                <a:spcPts val="0"/>
               </a:spcAft>
-              <a:buFont typeface="Calibri"/>
-              <a:buChar char="•"/>
             </a:pPr>
             <a:r>
-              <a:rPr sz="1800" b="0" rtl="1" lang="fa-IR">
+              <a:rPr sz="1600" b="0" rtl="1" lang="fa-IR">
                 <a:solidFill>
                   <a:srgbClr val="1B1816"/>
                 </a:solidFill>
@@ -9554,69 +10044,7 @@
                 <a:ea typeface="B Nazanin"/>
                 <a:cs typeface="B Nazanin"/>
               </a:rPr>
-              <a:t>شاخه پایه همان جا روی گراف اصلی خوشه می‌زند.</a:t>
-            </a:r>
-          </a:p>
-          <a:p>
-            <a:pPr algn="r" rtl="1">
-              <a:spcAft>
-                <a:spcPts val="1200"/>
-              </a:spcAft>
-              <a:buFont typeface="Calibri"/>
-              <a:buChar char="•"/>
-            </a:pPr>
-            <a:r>
-              <a:rPr sz="1800" b="0" rtl="1" lang="fa-IR">
-                <a:solidFill>
-                  <a:srgbClr val="1B1816"/>
-                </a:solidFill>
-                <a:latin typeface="Calibri"/>
-                <a:ea typeface="B Nazanin"/>
-                <a:cs typeface="B Nazanin"/>
-              </a:rPr>
-              <a:t>شاخه لم از افراز و گراف کوچک رد می‌شود و برچسب را به نمونه‌ها برمی‌گرداند.</a:t>
-            </a:r>
-          </a:p>
-          <a:p>
-            <a:pPr algn="r" rtl="1">
-              <a:spcAft>
-                <a:spcPts val="1200"/>
-              </a:spcAft>
-              <a:buFont typeface="Calibri"/>
-              <a:buChar char="•"/>
-            </a:pPr>
-            <a:r>
-              <a:rPr sz="1800" b="0" rtl="1" lang="fa-IR">
-                <a:solidFill>
-                  <a:srgbClr val="1B1816"/>
-                </a:solidFill>
-                <a:latin typeface="Calibri"/>
-                <a:ea typeface="B Nazanin"/>
-                <a:cs typeface="B Nazanin"/>
-              </a:rPr>
-              <a:t>هر دو شاخه با برچسب واقعی و </a:t>
-            </a:r>
-            <a:r>
-              <a:rPr sz="1800" b="0" rtl="0" lang="en-US">
-                <a:solidFill>
-                  <a:srgbClr val="1B1816"/>
-                </a:solidFill>
-                <a:latin typeface="Calibri"/>
-                <a:ea typeface="Calibri"/>
-                <a:cs typeface="Calibri"/>
-              </a:rPr>
-              <a:t>NMI</a:t>
-            </a:r>
-            <a:r>
-              <a:rPr sz="1800" b="0" rtl="1" lang="fa-IR">
-                <a:solidFill>
-                  <a:srgbClr val="1B1816"/>
-                </a:solidFill>
-                <a:latin typeface="Calibri"/>
-                <a:ea typeface="B Nazanin"/>
-                <a:cs typeface="B Nazanin"/>
-              </a:rPr>
-              <a:t> مقایسه می‌شوند.</a:t>
+              <a:t>رأس‌های زیاد به ۴ رأس کوچک می‌شوند. خوشه‌بندی روی همین گراف چهار رأسی انجام می‌شود.</a:t>
             </a:r>
           </a:p>
         </p:txBody>
@@ -9911,7 +10339,7 @@
                 <a:ea typeface="B Nazanin"/>
                 <a:cs typeface="B Nazanin"/>
               </a:rPr>
-              <a:t>چهار الگوریتم، روی هر دو راه</a:t>
+              <a:t>برگرداندن خوشه به تک‌تک نمونه‌ها</a:t>
             </a:r>
           </a:p>
         </p:txBody>
@@ -10051,8 +10479,8 @@
         </p:nvSpPr>
         <p:spPr>
           <a:xfrm>
-            <a:off x="9043416" y="1417320"/>
-            <a:ext cx="2660904" cy="4297680"/>
+            <a:off x="329184" y="1170432"/>
+            <a:ext cx="7360920" cy="5212080"/>
           </a:xfrm>
           <a:prstGeom prst="roundRect">
             <a:avLst>
@@ -10060,15 +10488,15 @@
             </a:avLst>
           </a:prstGeom>
           <a:solidFill>
-            <a:srgbClr val="FFFCF8"/>
+            <a:srgbClr val="DED5C4"/>
           </a:solidFill>
           <a:ln>
             <a:noFill/>
           </a:ln>
           <a:effectLst>
-            <a:outerShdw blurRad="256032" dist="73152" dir="7200000" algn="ctr" rotWithShape="0">
+            <a:outerShdw blurRad="201168" dist="54864" dir="7200000" algn="ctr" rotWithShape="0">
               <a:srgbClr val="1A334A">
-                <a:alpha val="18000"/>
+                <a:alpha val="16000"/>
               </a:srgbClr>
             </a:outerShdw>
           </a:effectLst>
@@ -10097,14 +10525,135 @@
       </p:sp>
       <p:sp>
         <p:nvSpPr>
-          <p:cNvPr id="12" name="Rectangle 11"/>
-          <p:cNvSpPr/>
-          <p:nvPr/>
-        </p:nvSpPr>
-        <p:spPr>
-          <a:xfrm>
-            <a:off x="9043416" y="1417320"/>
-            <a:ext cx="2660904" cy="109728"/>
+          <p:cNvPr id="12" name="Rounded Rectangle 11"/>
+          <p:cNvSpPr/>
+          <p:nvPr/>
+        </p:nvSpPr>
+        <p:spPr>
+          <a:xfrm>
+            <a:off x="420624" y="1261872"/>
+            <a:ext cx="7178040" cy="5029200"/>
+          </a:xfrm>
+          <a:prstGeom prst="roundRect">
+            <a:avLst>
+              <a:gd name="adj" fmla="val 10000"/>
+            </a:avLst>
+          </a:prstGeom>
+          <a:solidFill>
+            <a:srgbClr val="FFFCF8"/>
+          </a:solidFill>
+          <a:ln>
+            <a:noFill/>
+          </a:ln>
+        </p:spPr>
+        <p:style>
+          <a:lnRef idx="1">
+            <a:schemeClr val="accent1"/>
+          </a:lnRef>
+          <a:fillRef idx="3">
+            <a:schemeClr val="accent1"/>
+          </a:fillRef>
+          <a:effectRef idx="2">
+            <a:schemeClr val="accent1"/>
+          </a:effectRef>
+          <a:fontRef idx="minor">
+            <a:schemeClr val="lt1"/>
+          </a:fontRef>
+        </p:style>
+        <p:txBody>
+          <a:bodyPr rtlCol="0" anchor="ctr"/>
+          <a:lstStyle/>
+          <a:p>
+            <a:pPr algn="ctr"/>
+          </a:p>
+        </p:txBody>
+      </p:sp>
+      <p:pic>
+        <p:nvPicPr>
+          <p:cNvPr id="13" name="Picture 12" descr="concept_lift.png"/>
+          <p:cNvPicPr>
+            <a:picLocks noChangeAspect="1"/>
+          </p:cNvPicPr>
+          <p:nvPr/>
+        </p:nvPicPr>
+        <p:blipFill>
+          <a:blip r:embed="rId2"/>
+          <a:stretch>
+            <a:fillRect/>
+          </a:stretch>
+        </p:blipFill>
+        <p:spPr>
+          <a:xfrm>
+            <a:off x="530352" y="1878676"/>
+            <a:ext cx="6958584" cy="3795591"/>
+          </a:xfrm>
+          <a:prstGeom prst="rect">
+            <a:avLst/>
+          </a:prstGeom>
+        </p:spPr>
+      </p:pic>
+      <p:sp>
+        <p:nvSpPr>
+          <p:cNvPr id="14" name="Rounded Rectangle 13"/>
+          <p:cNvSpPr/>
+          <p:nvPr/>
+        </p:nvSpPr>
+        <p:spPr>
+          <a:xfrm>
+            <a:off x="7836408" y="1170432"/>
+            <a:ext cx="4050791" cy="5212080"/>
+          </a:xfrm>
+          <a:prstGeom prst="roundRect">
+            <a:avLst>
+              <a:gd name="adj" fmla="val 10000"/>
+            </a:avLst>
+          </a:prstGeom>
+          <a:solidFill>
+            <a:srgbClr val="FFFCF8"/>
+          </a:solidFill>
+          <a:ln>
+            <a:noFill/>
+          </a:ln>
+          <a:effectLst>
+            <a:outerShdw blurRad="201168" dist="54864" dir="7200000" algn="ctr" rotWithShape="0">
+              <a:srgbClr val="1A334A">
+                <a:alpha val="16000"/>
+              </a:srgbClr>
+            </a:outerShdw>
+          </a:effectLst>
+        </p:spPr>
+        <p:style>
+          <a:lnRef idx="1">
+            <a:schemeClr val="accent1"/>
+          </a:lnRef>
+          <a:fillRef idx="3">
+            <a:schemeClr val="accent1"/>
+          </a:fillRef>
+          <a:effectRef idx="2">
+            <a:schemeClr val="accent1"/>
+          </a:effectRef>
+          <a:fontRef idx="minor">
+            <a:schemeClr val="lt1"/>
+          </a:fontRef>
+        </p:style>
+        <p:txBody>
+          <a:bodyPr rtlCol="0" anchor="ctr"/>
+          <a:lstStyle/>
+          <a:p>
+            <a:pPr algn="ctr"/>
+          </a:p>
+        </p:txBody>
+      </p:sp>
+      <p:sp>
+        <p:nvSpPr>
+          <p:cNvPr id="15" name="Rectangle 14"/>
+          <p:cNvSpPr/>
+          <p:nvPr/>
+        </p:nvSpPr>
+        <p:spPr>
+          <a:xfrm>
+            <a:off x="11649456" y="1170432"/>
+            <a:ext cx="91440" cy="5212080"/>
           </a:xfrm>
           <a:prstGeom prst="rect">
             <a:avLst/>
@@ -10140,14 +10689,14 @@
       </p:sp>
       <p:sp>
         <p:nvSpPr>
-          <p:cNvPr id="13" name="TextBox 12"/>
+          <p:cNvPr id="16" name="TextBox 15"/>
           <p:cNvSpPr txBox="1"/>
           <p:nvPr/>
         </p:nvSpPr>
         <p:spPr>
           <a:xfrm>
-            <a:off x="9272016" y="1737360"/>
-            <a:ext cx="2203704" cy="365760"/>
+            <a:off x="8001000" y="1353312"/>
+            <a:ext cx="3666744" cy="4846320"/>
           </a:xfrm>
           <a:prstGeom prst="rect">
             <a:avLst/>
@@ -10155,97 +10704,37 @@
           <a:noFill/>
         </p:spPr>
         <p:txBody>
-          <a:bodyPr wrap="square">
+          <a:bodyPr wrap="square" anchor="ctr">
             <a:spAutoFit/>
           </a:bodyPr>
           <a:lstStyle/>
           <a:p>
             <a:pPr algn="r" rtl="1">
               <a:spcAft>
-                <a:spcPts val="0"/>
+                <a:spcPts val="1200"/>
               </a:spcAft>
+              <a:buFont typeface="Calibri"/>
+              <a:buChar char="•"/>
             </a:pPr>
             <a:r>
-              <a:rPr sz="1400" b="0" rtl="1" lang="fa-IR">
-                <a:solidFill>
-                  <a:srgbClr val="A33B24"/>
+              <a:rPr sz="1800" b="0" rtl="1" lang="fa-IR">
+                <a:solidFill>
+                  <a:srgbClr val="1B1816"/>
                 </a:solidFill>
                 <a:latin typeface="Calibri"/>
                 <a:ea typeface="B Nazanin"/>
                 <a:cs typeface="B Nazanin"/>
               </a:rPr>
-              <a:t>۱</a:t>
-            </a:r>
-          </a:p>
-        </p:txBody>
-      </p:sp>
-      <p:sp>
-        <p:nvSpPr>
-          <p:cNvPr id="14" name="TextBox 13"/>
-          <p:cNvSpPr txBox="1"/>
-          <p:nvPr/>
-        </p:nvSpPr>
-        <p:spPr>
-          <a:xfrm>
-            <a:off x="9272016" y="2240280"/>
-            <a:ext cx="2203704" cy="1188720"/>
-          </a:xfrm>
-          <a:prstGeom prst="rect">
-            <a:avLst/>
-          </a:prstGeom>
-          <a:noFill/>
-        </p:spPr>
-        <p:txBody>
-          <a:bodyPr wrap="square">
-            <a:spAutoFit/>
-          </a:bodyPr>
-          <a:lstStyle/>
-          <a:p>
-            <a:pPr algn="r" rtl="0">
-              <a:spcAft>
-                <a:spcPts val="0"/>
-              </a:spcAft>
-            </a:pPr>
-            <a:r>
-              <a:rPr sz="2200" b="1" rtl="0" lang="en-US">
-                <a:solidFill>
-                  <a:srgbClr val="1A334A"/>
-                </a:solidFill>
-                <a:latin typeface="Calibri"/>
-                <a:ea typeface="Calibri"/>
-                <a:cs typeface="Calibri"/>
-              </a:rPr>
-              <a:t>SPC</a:t>
-            </a:r>
-          </a:p>
-        </p:txBody>
-      </p:sp>
-      <p:sp>
-        <p:nvSpPr>
-          <p:cNvPr id="15" name="TextBox 14"/>
-          <p:cNvSpPr txBox="1"/>
-          <p:nvPr/>
-        </p:nvSpPr>
-        <p:spPr>
-          <a:xfrm>
-            <a:off x="9272016" y="3520439"/>
-            <a:ext cx="2203704" cy="1828800"/>
-          </a:xfrm>
-          <a:prstGeom prst="rect">
-            <a:avLst/>
-          </a:prstGeom>
-          <a:noFill/>
-        </p:spPr>
-        <p:txBody>
-          <a:bodyPr wrap="square">
-            <a:spAutoFit/>
-          </a:bodyPr>
-          <a:lstStyle/>
+              <a:t>خوشه‌بندی فقط به رأس‌های گراف کوچک رنگ داده است.</a:t>
+            </a:r>
+          </a:p>
           <a:p>
             <a:pPr algn="r" rtl="1">
               <a:spcAft>
-                <a:spcPts val="0"/>
+                <a:spcPts val="1200"/>
               </a:spcAft>
+              <a:buFont typeface="Calibri"/>
+              <a:buChar char="•"/>
             </a:pPr>
             <a:r>
               <a:rPr sz="1800" b="0" rtl="1" lang="fa-IR">
@@ -10256,661 +10745,27 @@
                 <a:ea typeface="B Nazanin"/>
                 <a:cs typeface="B Nazanin"/>
               </a:rPr>
-              <a:t>خوشه‌بندی طیفی. گراف را با بردارهای ویژه می‌بُرد.</a:t>
-            </a:r>
-          </a:p>
-        </p:txBody>
-      </p:sp>
-      <p:sp>
-        <p:nvSpPr>
-          <p:cNvPr id="16" name="Rounded Rectangle 15"/>
-          <p:cNvSpPr/>
-          <p:nvPr/>
-        </p:nvSpPr>
-        <p:spPr>
-          <a:xfrm>
-            <a:off x="6181344" y="1417320"/>
-            <a:ext cx="2660904" cy="4297680"/>
-          </a:xfrm>
-          <a:prstGeom prst="roundRect">
-            <a:avLst>
-              <a:gd name="adj" fmla="val 10000"/>
-            </a:avLst>
-          </a:prstGeom>
-          <a:solidFill>
-            <a:srgbClr val="FFFCF8"/>
-          </a:solidFill>
-          <a:ln>
-            <a:noFill/>
-          </a:ln>
-          <a:effectLst>
-            <a:outerShdw blurRad="256032" dist="73152" dir="7200000" algn="ctr" rotWithShape="0">
-              <a:srgbClr val="1A334A">
-                <a:alpha val="18000"/>
-              </a:srgbClr>
-            </a:outerShdw>
-          </a:effectLst>
-        </p:spPr>
-        <p:style>
-          <a:lnRef idx="1">
-            <a:schemeClr val="accent1"/>
-          </a:lnRef>
-          <a:fillRef idx="3">
-            <a:schemeClr val="accent1"/>
-          </a:fillRef>
-          <a:effectRef idx="2">
-            <a:schemeClr val="accent1"/>
-          </a:effectRef>
-          <a:fontRef idx="minor">
-            <a:schemeClr val="lt1"/>
-          </a:fontRef>
-        </p:style>
-        <p:txBody>
-          <a:bodyPr rtlCol="0" anchor="ctr"/>
-          <a:lstStyle/>
-          <a:p>
-            <a:pPr algn="ctr"/>
-          </a:p>
-        </p:txBody>
-      </p:sp>
-      <p:sp>
-        <p:nvSpPr>
-          <p:cNvPr id="17" name="Rectangle 16"/>
-          <p:cNvSpPr/>
-          <p:nvPr/>
-        </p:nvSpPr>
-        <p:spPr>
-          <a:xfrm>
-            <a:off x="6181344" y="1417320"/>
-            <a:ext cx="2660904" cy="109728"/>
-          </a:xfrm>
-          <a:prstGeom prst="rect">
-            <a:avLst/>
-          </a:prstGeom>
-          <a:solidFill>
-            <a:srgbClr val="1A334A"/>
-          </a:solidFill>
-          <a:ln>
-            <a:noFill/>
-          </a:ln>
-        </p:spPr>
-        <p:style>
-          <a:lnRef idx="1">
-            <a:schemeClr val="accent1"/>
-          </a:lnRef>
-          <a:fillRef idx="3">
-            <a:schemeClr val="accent1"/>
-          </a:fillRef>
-          <a:effectRef idx="2">
-            <a:schemeClr val="accent1"/>
-          </a:effectRef>
-          <a:fontRef idx="minor">
-            <a:schemeClr val="lt1"/>
-          </a:fontRef>
-        </p:style>
-        <p:txBody>
-          <a:bodyPr rtlCol="0" anchor="ctr"/>
-          <a:lstStyle/>
-          <a:p>
-            <a:pPr algn="ctr"/>
-          </a:p>
-        </p:txBody>
-      </p:sp>
-      <p:sp>
-        <p:nvSpPr>
-          <p:cNvPr id="18" name="TextBox 17"/>
-          <p:cNvSpPr txBox="1"/>
-          <p:nvPr/>
-        </p:nvSpPr>
-        <p:spPr>
-          <a:xfrm>
-            <a:off x="6409944" y="1737360"/>
-            <a:ext cx="2203704" cy="365760"/>
-          </a:xfrm>
-          <a:prstGeom prst="rect">
-            <a:avLst/>
-          </a:prstGeom>
-          <a:noFill/>
-        </p:spPr>
-        <p:txBody>
-          <a:bodyPr wrap="square">
-            <a:spAutoFit/>
-          </a:bodyPr>
-          <a:lstStyle/>
+              <a:t>هر نمونه، رنگ رأس گروهی را می‌گیرد که عضو آن است.</a:t>
+            </a:r>
+          </a:p>
           <a:p>
             <a:pPr algn="r" rtl="1">
               <a:spcAft>
-                <a:spcPts val="0"/>
+                <a:spcPts val="1200"/>
               </a:spcAft>
+              <a:buFont typeface="Calibri"/>
+              <a:buChar char="•"/>
             </a:pPr>
             <a:r>
-              <a:rPr sz="1400" b="0" rtl="1" lang="fa-IR">
-                <a:solidFill>
-                  <a:srgbClr val="A33B24"/>
+              <a:rPr sz="1800" b="0" rtl="1" lang="fa-IR">
+                <a:solidFill>
+                  <a:srgbClr val="1B1816"/>
                 </a:solidFill>
                 <a:latin typeface="Calibri"/>
                 <a:ea typeface="B Nazanin"/>
                 <a:cs typeface="B Nazanin"/>
               </a:rPr>
-              <a:t>۲</a:t>
-            </a:r>
-          </a:p>
-        </p:txBody>
-      </p:sp>
-      <p:sp>
-        <p:nvSpPr>
-          <p:cNvPr id="19" name="TextBox 18"/>
-          <p:cNvSpPr txBox="1"/>
-          <p:nvPr/>
-        </p:nvSpPr>
-        <p:spPr>
-          <a:xfrm>
-            <a:off x="6409944" y="2240280"/>
-            <a:ext cx="2203704" cy="1188720"/>
-          </a:xfrm>
-          <a:prstGeom prst="rect">
-            <a:avLst/>
-          </a:prstGeom>
-          <a:noFill/>
-        </p:spPr>
-        <p:txBody>
-          <a:bodyPr wrap="square">
-            <a:spAutoFit/>
-          </a:bodyPr>
-          <a:lstStyle/>
-          <a:p>
-            <a:pPr algn="r" rtl="0">
-              <a:spcAft>
-                <a:spcPts val="0"/>
-              </a:spcAft>
-            </a:pPr>
-            <a:r>
-              <a:rPr sz="2200" b="1" rtl="0" lang="en-US">
-                <a:solidFill>
-                  <a:srgbClr val="1A334A"/>
-                </a:solidFill>
-                <a:latin typeface="Calibri"/>
-                <a:ea typeface="Calibri"/>
-                <a:cs typeface="Calibri"/>
-              </a:rPr>
-              <a:t>APC</a:t>
-            </a:r>
-          </a:p>
-        </p:txBody>
-      </p:sp>
-      <p:sp>
-        <p:nvSpPr>
-          <p:cNvPr id="20" name="TextBox 19"/>
-          <p:cNvSpPr txBox="1"/>
-          <p:nvPr/>
-        </p:nvSpPr>
-        <p:spPr>
-          <a:xfrm>
-            <a:off x="6409944" y="3520439"/>
-            <a:ext cx="2203704" cy="1828800"/>
-          </a:xfrm>
-          <a:prstGeom prst="rect">
-            <a:avLst/>
-          </a:prstGeom>
-          <a:noFill/>
-        </p:spPr>
-        <p:txBody>
-          <a:bodyPr wrap="square">
-            <a:spAutoFit/>
-          </a:bodyPr>
-          <a:lstStyle/>
-          <a:p>
-            <a:pPr algn="r" rtl="1">
-              <a:spcAft>
-                <a:spcPts val="0"/>
-              </a:spcAft>
-            </a:pPr>
-            <a:r>
-              <a:rPr sz="1800" b="0" rtl="1" lang="fa-IR">
-                <a:solidFill>
-                  <a:srgbClr val="1B1816"/>
-                </a:solidFill>
-                <a:latin typeface="Calibri"/>
-                <a:ea typeface="B Nazanin"/>
-                <a:cs typeface="B Nazanin"/>
-              </a:rPr>
-              <a:t>انتشار وابستگی. نمونه‌ها خودشان نماینده خوشه را انتخاب می‌کنند.</a:t>
-            </a:r>
-          </a:p>
-        </p:txBody>
-      </p:sp>
-      <p:sp>
-        <p:nvSpPr>
-          <p:cNvPr id="21" name="Rounded Rectangle 20"/>
-          <p:cNvSpPr/>
-          <p:nvPr/>
-        </p:nvSpPr>
-        <p:spPr>
-          <a:xfrm>
-            <a:off x="3319272" y="1417320"/>
-            <a:ext cx="2660904" cy="4297680"/>
-          </a:xfrm>
-          <a:prstGeom prst="roundRect">
-            <a:avLst>
-              <a:gd name="adj" fmla="val 10000"/>
-            </a:avLst>
-          </a:prstGeom>
-          <a:solidFill>
-            <a:srgbClr val="FFFCF8"/>
-          </a:solidFill>
-          <a:ln>
-            <a:noFill/>
-          </a:ln>
-          <a:effectLst>
-            <a:outerShdw blurRad="256032" dist="73152" dir="7200000" algn="ctr" rotWithShape="0">
-              <a:srgbClr val="1A334A">
-                <a:alpha val="18000"/>
-              </a:srgbClr>
-            </a:outerShdw>
-          </a:effectLst>
-        </p:spPr>
-        <p:style>
-          <a:lnRef idx="1">
-            <a:schemeClr val="accent1"/>
-          </a:lnRef>
-          <a:fillRef idx="3">
-            <a:schemeClr val="accent1"/>
-          </a:fillRef>
-          <a:effectRef idx="2">
-            <a:schemeClr val="accent1"/>
-          </a:effectRef>
-          <a:fontRef idx="minor">
-            <a:schemeClr val="lt1"/>
-          </a:fontRef>
-        </p:style>
-        <p:txBody>
-          <a:bodyPr rtlCol="0" anchor="ctr"/>
-          <a:lstStyle/>
-          <a:p>
-            <a:pPr algn="ctr"/>
-          </a:p>
-        </p:txBody>
-      </p:sp>
-      <p:sp>
-        <p:nvSpPr>
-          <p:cNvPr id="22" name="Rectangle 21"/>
-          <p:cNvSpPr/>
-          <p:nvPr/>
-        </p:nvSpPr>
-        <p:spPr>
-          <a:xfrm>
-            <a:off x="3319272" y="1417320"/>
-            <a:ext cx="2660904" cy="109728"/>
-          </a:xfrm>
-          <a:prstGeom prst="rect">
-            <a:avLst/>
-          </a:prstGeom>
-          <a:solidFill>
-            <a:srgbClr val="1A334A"/>
-          </a:solidFill>
-          <a:ln>
-            <a:noFill/>
-          </a:ln>
-        </p:spPr>
-        <p:style>
-          <a:lnRef idx="1">
-            <a:schemeClr val="accent1"/>
-          </a:lnRef>
-          <a:fillRef idx="3">
-            <a:schemeClr val="accent1"/>
-          </a:fillRef>
-          <a:effectRef idx="2">
-            <a:schemeClr val="accent1"/>
-          </a:effectRef>
-          <a:fontRef idx="minor">
-            <a:schemeClr val="lt1"/>
-          </a:fontRef>
-        </p:style>
-        <p:txBody>
-          <a:bodyPr rtlCol="0" anchor="ctr"/>
-          <a:lstStyle/>
-          <a:p>
-            <a:pPr algn="ctr"/>
-          </a:p>
-        </p:txBody>
-      </p:sp>
-      <p:sp>
-        <p:nvSpPr>
-          <p:cNvPr id="23" name="TextBox 22"/>
-          <p:cNvSpPr txBox="1"/>
-          <p:nvPr/>
-        </p:nvSpPr>
-        <p:spPr>
-          <a:xfrm>
-            <a:off x="3547872" y="1737360"/>
-            <a:ext cx="2203704" cy="365760"/>
-          </a:xfrm>
-          <a:prstGeom prst="rect">
-            <a:avLst/>
-          </a:prstGeom>
-          <a:noFill/>
-        </p:spPr>
-        <p:txBody>
-          <a:bodyPr wrap="square">
-            <a:spAutoFit/>
-          </a:bodyPr>
-          <a:lstStyle/>
-          <a:p>
-            <a:pPr algn="r" rtl="1">
-              <a:spcAft>
-                <a:spcPts val="0"/>
-              </a:spcAft>
-            </a:pPr>
-            <a:r>
-              <a:rPr sz="1400" b="0" rtl="1" lang="fa-IR">
-                <a:solidFill>
-                  <a:srgbClr val="A33B24"/>
-                </a:solidFill>
-                <a:latin typeface="Calibri"/>
-                <a:ea typeface="B Nazanin"/>
-                <a:cs typeface="B Nazanin"/>
-              </a:rPr>
-              <a:t>۳</a:t>
-            </a:r>
-          </a:p>
-        </p:txBody>
-      </p:sp>
-      <p:sp>
-        <p:nvSpPr>
-          <p:cNvPr id="24" name="TextBox 23"/>
-          <p:cNvSpPr txBox="1"/>
-          <p:nvPr/>
-        </p:nvSpPr>
-        <p:spPr>
-          <a:xfrm>
-            <a:off x="3547872" y="2240280"/>
-            <a:ext cx="2203704" cy="1188720"/>
-          </a:xfrm>
-          <a:prstGeom prst="rect">
-            <a:avLst/>
-          </a:prstGeom>
-          <a:noFill/>
-        </p:spPr>
-        <p:txBody>
-          <a:bodyPr wrap="square">
-            <a:spAutoFit/>
-          </a:bodyPr>
-          <a:lstStyle/>
-          <a:p>
-            <a:pPr algn="r" rtl="0">
-              <a:spcAft>
-                <a:spcPts val="0"/>
-              </a:spcAft>
-            </a:pPr>
-            <a:r>
-              <a:rPr sz="2200" b="1" rtl="0" lang="en-US">
-                <a:solidFill>
-                  <a:srgbClr val="1A334A"/>
-                </a:solidFill>
-                <a:latin typeface="Calibri"/>
-                <a:ea typeface="Calibri"/>
-                <a:cs typeface="Calibri"/>
-              </a:rPr>
-              <a:t>DSet</a:t>
-            </a:r>
-          </a:p>
-        </p:txBody>
-      </p:sp>
-      <p:sp>
-        <p:nvSpPr>
-          <p:cNvPr id="25" name="TextBox 24"/>
-          <p:cNvSpPr txBox="1"/>
-          <p:nvPr/>
-        </p:nvSpPr>
-        <p:spPr>
-          <a:xfrm>
-            <a:off x="3547872" y="3520439"/>
-            <a:ext cx="2203704" cy="1828800"/>
-          </a:xfrm>
-          <a:prstGeom prst="rect">
-            <a:avLst/>
-          </a:prstGeom>
-          <a:noFill/>
-        </p:spPr>
-        <p:txBody>
-          <a:bodyPr wrap="square">
-            <a:spAutoFit/>
-          </a:bodyPr>
-          <a:lstStyle/>
-          <a:p>
-            <a:pPr algn="r" rtl="1">
-              <a:spcAft>
-                <a:spcPts val="0"/>
-              </a:spcAft>
-            </a:pPr>
-            <a:r>
-              <a:rPr sz="1800" b="0" rtl="1" lang="fa-IR">
-                <a:solidFill>
-                  <a:srgbClr val="1B1816"/>
-                </a:solidFill>
-                <a:latin typeface="Calibri"/>
-                <a:ea typeface="B Nazanin"/>
-                <a:cs typeface="B Nazanin"/>
-              </a:rPr>
-              <a:t>مجموعه غالب. یک تکه خیلی متراکم را به‌عنوان خوشه برمی‌دارد.</a:t>
-            </a:r>
-          </a:p>
-        </p:txBody>
-      </p:sp>
-      <p:sp>
-        <p:nvSpPr>
-          <p:cNvPr id="26" name="Rounded Rectangle 25"/>
-          <p:cNvSpPr/>
-          <p:nvPr/>
-        </p:nvSpPr>
-        <p:spPr>
-          <a:xfrm>
-            <a:off x="457200" y="1417320"/>
-            <a:ext cx="2660904" cy="4297680"/>
-          </a:xfrm>
-          <a:prstGeom prst="roundRect">
-            <a:avLst>
-              <a:gd name="adj" fmla="val 10000"/>
-            </a:avLst>
-          </a:prstGeom>
-          <a:solidFill>
-            <a:srgbClr val="FFFCF8"/>
-          </a:solidFill>
-          <a:ln>
-            <a:noFill/>
-          </a:ln>
-          <a:effectLst>
-            <a:outerShdw blurRad="256032" dist="73152" dir="7200000" algn="ctr" rotWithShape="0">
-              <a:srgbClr val="1A334A">
-                <a:alpha val="18000"/>
-              </a:srgbClr>
-            </a:outerShdw>
-          </a:effectLst>
-        </p:spPr>
-        <p:style>
-          <a:lnRef idx="1">
-            <a:schemeClr val="accent1"/>
-          </a:lnRef>
-          <a:fillRef idx="3">
-            <a:schemeClr val="accent1"/>
-          </a:fillRef>
-          <a:effectRef idx="2">
-            <a:schemeClr val="accent1"/>
-          </a:effectRef>
-          <a:fontRef idx="minor">
-            <a:schemeClr val="lt1"/>
-          </a:fontRef>
-        </p:style>
-        <p:txBody>
-          <a:bodyPr rtlCol="0" anchor="ctr"/>
-          <a:lstStyle/>
-          <a:p>
-            <a:pPr algn="ctr"/>
-          </a:p>
-        </p:txBody>
-      </p:sp>
-      <p:sp>
-        <p:nvSpPr>
-          <p:cNvPr id="27" name="Rectangle 26"/>
-          <p:cNvSpPr/>
-          <p:nvPr/>
-        </p:nvSpPr>
-        <p:spPr>
-          <a:xfrm>
-            <a:off x="457200" y="1417320"/>
-            <a:ext cx="2660904" cy="109728"/>
-          </a:xfrm>
-          <a:prstGeom prst="rect">
-            <a:avLst/>
-          </a:prstGeom>
-          <a:solidFill>
-            <a:srgbClr val="1A334A"/>
-          </a:solidFill>
-          <a:ln>
-            <a:noFill/>
-          </a:ln>
-        </p:spPr>
-        <p:style>
-          <a:lnRef idx="1">
-            <a:schemeClr val="accent1"/>
-          </a:lnRef>
-          <a:fillRef idx="3">
-            <a:schemeClr val="accent1"/>
-          </a:fillRef>
-          <a:effectRef idx="2">
-            <a:schemeClr val="accent1"/>
-          </a:effectRef>
-          <a:fontRef idx="minor">
-            <a:schemeClr val="lt1"/>
-          </a:fontRef>
-        </p:style>
-        <p:txBody>
-          <a:bodyPr rtlCol="0" anchor="ctr"/>
-          <a:lstStyle/>
-          <a:p>
-            <a:pPr algn="ctr"/>
-          </a:p>
-        </p:txBody>
-      </p:sp>
-      <p:sp>
-        <p:nvSpPr>
-          <p:cNvPr id="28" name="TextBox 27"/>
-          <p:cNvSpPr txBox="1"/>
-          <p:nvPr/>
-        </p:nvSpPr>
-        <p:spPr>
-          <a:xfrm>
-            <a:off x="685800" y="1737360"/>
-            <a:ext cx="2203704" cy="365760"/>
-          </a:xfrm>
-          <a:prstGeom prst="rect">
-            <a:avLst/>
-          </a:prstGeom>
-          <a:noFill/>
-        </p:spPr>
-        <p:txBody>
-          <a:bodyPr wrap="square">
-            <a:spAutoFit/>
-          </a:bodyPr>
-          <a:lstStyle/>
-          <a:p>
-            <a:pPr algn="r" rtl="1">
-              <a:spcAft>
-                <a:spcPts val="0"/>
-              </a:spcAft>
-            </a:pPr>
-            <a:r>
-              <a:rPr sz="1400" b="0" rtl="1" lang="fa-IR">
-                <a:solidFill>
-                  <a:srgbClr val="A33B24"/>
-                </a:solidFill>
-                <a:latin typeface="Calibri"/>
-                <a:ea typeface="B Nazanin"/>
-                <a:cs typeface="B Nazanin"/>
-              </a:rPr>
-              <a:t>۴</a:t>
-            </a:r>
-          </a:p>
-        </p:txBody>
-      </p:sp>
-      <p:sp>
-        <p:nvSpPr>
-          <p:cNvPr id="29" name="TextBox 28"/>
-          <p:cNvSpPr txBox="1"/>
-          <p:nvPr/>
-        </p:nvSpPr>
-        <p:spPr>
-          <a:xfrm>
-            <a:off x="685800" y="2240280"/>
-            <a:ext cx="2203704" cy="1188720"/>
-          </a:xfrm>
-          <a:prstGeom prst="rect">
-            <a:avLst/>
-          </a:prstGeom>
-          <a:noFill/>
-        </p:spPr>
-        <p:txBody>
-          <a:bodyPr wrap="square">
-            <a:spAutoFit/>
-          </a:bodyPr>
-          <a:lstStyle/>
-          <a:p>
-            <a:pPr algn="r" rtl="0">
-              <a:spcAft>
-                <a:spcPts val="0"/>
-              </a:spcAft>
-            </a:pPr>
-            <a:r>
-              <a:rPr sz="2200" b="1" rtl="0" lang="en-US">
-                <a:solidFill>
-                  <a:srgbClr val="1A334A"/>
-                </a:solidFill>
-                <a:latin typeface="Calibri"/>
-                <a:ea typeface="Calibri"/>
-                <a:cs typeface="Calibri"/>
-              </a:rPr>
-              <a:t>SPRG</a:t>
-            </a:r>
-          </a:p>
-        </p:txBody>
-      </p:sp>
-      <p:sp>
-        <p:nvSpPr>
-          <p:cNvPr id="30" name="TextBox 29"/>
-          <p:cNvSpPr txBox="1"/>
-          <p:nvPr/>
-        </p:nvSpPr>
-        <p:spPr>
-          <a:xfrm>
-            <a:off x="685800" y="3520439"/>
-            <a:ext cx="2203704" cy="1828800"/>
-          </a:xfrm>
-          <a:prstGeom prst="rect">
-            <a:avLst/>
-          </a:prstGeom>
-          <a:noFill/>
-        </p:spPr>
-        <p:txBody>
-          <a:bodyPr wrap="square">
-            <a:spAutoFit/>
-          </a:bodyPr>
-          <a:lstStyle/>
-          <a:p>
-            <a:pPr algn="r" rtl="1">
-              <a:spcAft>
-                <a:spcPts val="0"/>
-              </a:spcAft>
-            </a:pPr>
-            <a:r>
-              <a:rPr sz="1800" b="0" rtl="1" lang="fa-IR">
-                <a:solidFill>
-                  <a:srgbClr val="1B1816"/>
-                </a:solidFill>
-                <a:latin typeface="Calibri"/>
-                <a:ea typeface="B Nazanin"/>
-                <a:cs typeface="B Nazanin"/>
-              </a:rPr>
-              <a:t>خوشه‌بندی طیفی با شباهت جنگل تصادفی. شباهت از جنگل می‌آید، بعد برش طیفی.</a:t>
+              <a:t>پس خروجی باز هم یک برچسب برای هر نمونه اصلی است.</a:t>
             </a:r>
           </a:p>
         </p:txBody>
@@ -11205,7 +11060,18 @@
                 <a:ea typeface="B Nazanin"/>
                 <a:cs typeface="B Nazanin"/>
               </a:rPr>
-              <a:t>اصلاح آخر برچسب، بعد از برگشت به نمونه‌ها</a:t>
+              <a:t>کل مسیر آزمایش، از داده تا </a:t>
+            </a:r>
+            <a:r>
+              <a:rPr sz="2600" b="1" rtl="0" lang="en-US">
+                <a:solidFill>
+                  <a:srgbClr val="1A334A"/>
+                </a:solidFill>
+                <a:latin typeface="Calibri"/>
+                <a:ea typeface="Calibri"/>
+                <a:cs typeface="Calibri"/>
+              </a:rPr>
+              <a:t>NMI</a:t>
             </a:r>
           </a:p>
         </p:txBody>
@@ -11436,7 +11302,7 @@
       </p:sp>
       <p:pic>
         <p:nvPicPr>
-          <p:cNvPr id="13" name="Picture 12" descr="concept_polish.png"/>
+          <p:cNvPr id="13" name="Picture 12" descr="fig_pipeline.png"/>
           <p:cNvPicPr>
             <a:picLocks noChangeAspect="1"/>
           </p:cNvPicPr>
@@ -11450,8 +11316,8 @@
         </p:blipFill>
         <p:spPr>
           <a:xfrm>
-            <a:off x="530352" y="2616708"/>
-            <a:ext cx="6958584" cy="2319528"/>
+            <a:off x="530352" y="2300409"/>
+            <a:ext cx="6958584" cy="2952126"/>
           </a:xfrm>
           <a:prstGeom prst="rect">
             <a:avLst/>
@@ -11591,7 +11457,7 @@
                 <a:ea typeface="B Nazanin"/>
                 <a:cs typeface="B Nazanin"/>
               </a:rPr>
-              <a:t>دایره گروه لم است، نه مرز خوشه.</a:t>
+              <a:t>داده خوانده می‌شود، در صورت نیاز کوچک می‌شود، و گراف شباهت یک بار ساخته می‌شود.</a:t>
             </a:r>
           </a:p>
           <a:p>
@@ -11611,7 +11477,7 @@
                 <a:ea typeface="B Nazanin"/>
                 <a:cs typeface="B Nazanin"/>
               </a:rPr>
-              <a:t>اول همه اعضای یک گروه یک رنگ می‌گیرند، حتی اگر یکی‌شان میان همسایه‌های رنگ دیگر باشد.</a:t>
+              <a:t>شاخه پایه همان جا روی گراف اصلی خوشه می‌زند.</a:t>
             </a:r>
           </a:p>
           <a:p>
@@ -11631,7 +11497,7 @@
                 <a:ea typeface="B Nazanin"/>
                 <a:cs typeface="B Nazanin"/>
               </a:rPr>
-              <a:t>این مرحله فقط رنگ خوشه همان نقطه را عوض می‌کند.</a:t>
+              <a:t>شاخه لم از افراز و گراف کوچک رد می‌شود و برچسب را به نمونه‌ها برمی‌گرداند.</a:t>
             </a:r>
           </a:p>
           <a:p>
@@ -11651,7 +11517,29 @@
                 <a:ea typeface="B Nazanin"/>
                 <a:cs typeface="B Nazanin"/>
               </a:rPr>
-              <a:t>عضویت او در گروه لم دست نمی‌خورد. این مرحله جزو خود لم نیست.</a:t>
+              <a:t>هر دو شاخه با برچسب واقعی و </a:t>
+            </a:r>
+            <a:r>
+              <a:rPr sz="1800" b="0" rtl="0" lang="en-US">
+                <a:solidFill>
+                  <a:srgbClr val="1B1816"/>
+                </a:solidFill>
+                <a:latin typeface="Calibri"/>
+                <a:ea typeface="Calibri"/>
+                <a:cs typeface="Calibri"/>
+              </a:rPr>
+              <a:t>NMI</a:t>
+            </a:r>
+            <a:r>
+              <a:rPr sz="1800" b="0" rtl="1" lang="fa-IR">
+                <a:solidFill>
+                  <a:srgbClr val="1B1816"/>
+                </a:solidFill>
+                <a:latin typeface="Calibri"/>
+                <a:ea typeface="B Nazanin"/>
+                <a:cs typeface="B Nazanin"/>
+              </a:rPr>
+              <a:t> مقایسه می‌شوند.</a:t>
             </a:r>
           </a:p>
         </p:txBody>
@@ -11946,7 +11834,7 @@
                 <a:ea typeface="B Nazanin"/>
                 <a:cs typeface="B Nazanin"/>
               </a:rPr>
-              <a:t>تنظیم آزمایش و معیار مقایسه</a:t>
+              <a:t>چهار الگوریتم، روی هر دو راه</a:t>
             </a:r>
           </a:p>
         </p:txBody>
@@ -12086,8 +11974,8 @@
         </p:nvSpPr>
         <p:spPr>
           <a:xfrm>
-            <a:off x="457200" y="1261872"/>
-            <a:ext cx="11292840" cy="841248"/>
+            <a:off x="9043416" y="1417320"/>
+            <a:ext cx="2660904" cy="4297680"/>
           </a:xfrm>
           <a:prstGeom prst="roundRect">
             <a:avLst>
@@ -12101,9 +11989,9 @@
             <a:noFill/>
           </a:ln>
           <a:effectLst>
-            <a:outerShdw blurRad="182880" dist="45720" dir="7200000" algn="ctr" rotWithShape="0">
+            <a:outerShdw blurRad="256032" dist="73152" dir="7200000" algn="ctr" rotWithShape="0">
               <a:srgbClr val="1A334A">
-                <a:alpha val="14000"/>
+                <a:alpha val="18000"/>
               </a:srgbClr>
             </a:outerShdw>
           </a:effectLst>
@@ -12138,8 +12026,8 @@
         </p:nvSpPr>
         <p:spPr>
           <a:xfrm>
-            <a:off x="11594592" y="1371600"/>
-            <a:ext cx="91440" cy="621792"/>
+            <a:off x="9043416" y="1417320"/>
+            <a:ext cx="2660904" cy="109728"/>
           </a:xfrm>
           <a:prstGeom prst="rect">
             <a:avLst/>
@@ -12181,8 +12069,8 @@
         </p:nvSpPr>
         <p:spPr>
           <a:xfrm>
-            <a:off x="10561320" y="1389888"/>
-            <a:ext cx="914400" cy="640080"/>
+            <a:off x="9272016" y="1737360"/>
+            <a:ext cx="2203704" cy="365760"/>
           </a:xfrm>
           <a:prstGeom prst="rect">
             <a:avLst/>
@@ -12201,7 +12089,7 @@
               </a:spcAft>
             </a:pPr>
             <a:r>
-              <a:rPr sz="1600" b="1" rtl="1" lang="fa-IR">
+              <a:rPr sz="1400" b="0" rtl="1" lang="fa-IR">
                 <a:solidFill>
                   <a:srgbClr val="A33B24"/>
                 </a:solidFill>
@@ -12209,7 +12097,7 @@
                 <a:ea typeface="B Nazanin"/>
                 <a:cs typeface="B Nazanin"/>
               </a:rPr>
-              <a:t>۰۱</a:t>
+              <a:t>۱</a:t>
             </a:r>
           </a:p>
         </p:txBody>
@@ -12222,8 +12110,49 @@
         </p:nvSpPr>
         <p:spPr>
           <a:xfrm>
-            <a:off x="685800" y="1389888"/>
-            <a:ext cx="9738360" cy="640080"/>
+            <a:off x="9272016" y="2240280"/>
+            <a:ext cx="2203704" cy="1188720"/>
+          </a:xfrm>
+          <a:prstGeom prst="rect">
+            <a:avLst/>
+          </a:prstGeom>
+          <a:noFill/>
+        </p:spPr>
+        <p:txBody>
+          <a:bodyPr wrap="square">
+            <a:spAutoFit/>
+          </a:bodyPr>
+          <a:lstStyle/>
+          <a:p>
+            <a:pPr algn="r" rtl="0">
+              <a:spcAft>
+                <a:spcPts val="0"/>
+              </a:spcAft>
+            </a:pPr>
+            <a:r>
+              <a:rPr sz="2200" b="1" rtl="0" lang="en-US">
+                <a:solidFill>
+                  <a:srgbClr val="1A334A"/>
+                </a:solidFill>
+                <a:latin typeface="Calibri"/>
+                <a:ea typeface="Calibri"/>
+                <a:cs typeface="Calibri"/>
+              </a:rPr>
+              <a:t>SPC</a:t>
+            </a:r>
+          </a:p>
+        </p:txBody>
+      </p:sp>
+      <p:sp>
+        <p:nvSpPr>
+          <p:cNvPr id="15" name="TextBox 14"/>
+          <p:cNvSpPr txBox="1"/>
+          <p:nvPr/>
+        </p:nvSpPr>
+        <p:spPr>
+          <a:xfrm>
+            <a:off x="9272016" y="3520439"/>
+            <a:ext cx="2203704" cy="1828800"/>
           </a:xfrm>
           <a:prstGeom prst="rect">
             <a:avLst/>
@@ -12250,21 +12179,21 @@
                 <a:ea typeface="B Nazanin"/>
                 <a:cs typeface="B Nazanin"/>
               </a:rPr>
-              <a:t>بیست مجموعه داده و چهار الگوریتم: هشتاد خانه، که هفتاد و هشت تایش معتبر ماند.</a:t>
-            </a:r>
-          </a:p>
-        </p:txBody>
-      </p:sp>
-      <p:sp>
-        <p:nvSpPr>
-          <p:cNvPr id="15" name="Rounded Rectangle 14"/>
-          <p:cNvSpPr/>
-          <p:nvPr/>
-        </p:nvSpPr>
-        <p:spPr>
-          <a:xfrm>
-            <a:off x="457200" y="2194560"/>
-            <a:ext cx="11292840" cy="841248"/>
+              <a:t>خوشه‌بندی طیفی. گراف را با بردارهای ویژه می‌بُرد.</a:t>
+            </a:r>
+          </a:p>
+        </p:txBody>
+      </p:sp>
+      <p:sp>
+        <p:nvSpPr>
+          <p:cNvPr id="16" name="Rounded Rectangle 15"/>
+          <p:cNvSpPr/>
+          <p:nvPr/>
+        </p:nvSpPr>
+        <p:spPr>
+          <a:xfrm>
+            <a:off x="6181344" y="1417320"/>
+            <a:ext cx="2660904" cy="4297680"/>
           </a:xfrm>
           <a:prstGeom prst="roundRect">
             <a:avLst>
@@ -12278,9 +12207,9 @@
             <a:noFill/>
           </a:ln>
           <a:effectLst>
-            <a:outerShdw blurRad="182880" dist="45720" dir="7200000" algn="ctr" rotWithShape="0">
+            <a:outerShdw blurRad="256032" dist="73152" dir="7200000" algn="ctr" rotWithShape="0">
               <a:srgbClr val="1A334A">
-                <a:alpha val="14000"/>
+                <a:alpha val="18000"/>
               </a:srgbClr>
             </a:outerShdw>
           </a:effectLst>
@@ -12309,14 +12238,14 @@
       </p:sp>
       <p:sp>
         <p:nvSpPr>
-          <p:cNvPr id="16" name="Rectangle 15"/>
-          <p:cNvSpPr/>
-          <p:nvPr/>
-        </p:nvSpPr>
-        <p:spPr>
-          <a:xfrm>
-            <a:off x="11594592" y="2304288"/>
-            <a:ext cx="91440" cy="621792"/>
+          <p:cNvPr id="17" name="Rectangle 16"/>
+          <p:cNvSpPr/>
+          <p:nvPr/>
+        </p:nvSpPr>
+        <p:spPr>
+          <a:xfrm>
+            <a:off x="6181344" y="1417320"/>
+            <a:ext cx="2660904" cy="109728"/>
           </a:xfrm>
           <a:prstGeom prst="rect">
             <a:avLst/>
@@ -12352,14 +12281,14 @@
       </p:sp>
       <p:sp>
         <p:nvSpPr>
-          <p:cNvPr id="17" name="TextBox 16"/>
+          <p:cNvPr id="18" name="TextBox 17"/>
           <p:cNvSpPr txBox="1"/>
           <p:nvPr/>
         </p:nvSpPr>
         <p:spPr>
           <a:xfrm>
-            <a:off x="10561320" y="2322576"/>
-            <a:ext cx="914400" cy="640080"/>
+            <a:off x="6409944" y="1737360"/>
+            <a:ext cx="2203704" cy="365760"/>
           </a:xfrm>
           <a:prstGeom prst="rect">
             <a:avLst/>
@@ -12378,7 +12307,7 @@
               </a:spcAft>
             </a:pPr>
             <a:r>
-              <a:rPr sz="1600" b="1" rtl="1" lang="fa-IR">
+              <a:rPr sz="1400" b="0" rtl="1" lang="fa-IR">
                 <a:solidFill>
                   <a:srgbClr val="A33B24"/>
                 </a:solidFill>
@@ -12386,21 +12315,62 @@
                 <a:ea typeface="B Nazanin"/>
                 <a:cs typeface="B Nazanin"/>
               </a:rPr>
-              <a:t>۰۲</a:t>
-            </a:r>
-          </a:p>
-        </p:txBody>
-      </p:sp>
-      <p:sp>
-        <p:nvSpPr>
-          <p:cNvPr id="18" name="TextBox 17"/>
+              <a:t>۲</a:t>
+            </a:r>
+          </a:p>
+        </p:txBody>
+      </p:sp>
+      <p:sp>
+        <p:nvSpPr>
+          <p:cNvPr id="19" name="TextBox 18"/>
           <p:cNvSpPr txBox="1"/>
           <p:nvPr/>
         </p:nvSpPr>
         <p:spPr>
           <a:xfrm>
-            <a:off x="685800" y="2322576"/>
-            <a:ext cx="9738360" cy="640080"/>
+            <a:off x="6409944" y="2240280"/>
+            <a:ext cx="2203704" cy="1188720"/>
+          </a:xfrm>
+          <a:prstGeom prst="rect">
+            <a:avLst/>
+          </a:prstGeom>
+          <a:noFill/>
+        </p:spPr>
+        <p:txBody>
+          <a:bodyPr wrap="square">
+            <a:spAutoFit/>
+          </a:bodyPr>
+          <a:lstStyle/>
+          <a:p>
+            <a:pPr algn="r" rtl="0">
+              <a:spcAft>
+                <a:spcPts val="0"/>
+              </a:spcAft>
+            </a:pPr>
+            <a:r>
+              <a:rPr sz="2200" b="1" rtl="0" lang="en-US">
+                <a:solidFill>
+                  <a:srgbClr val="1A334A"/>
+                </a:solidFill>
+                <a:latin typeface="Calibri"/>
+                <a:ea typeface="Calibri"/>
+                <a:cs typeface="Calibri"/>
+              </a:rPr>
+              <a:t>APC</a:t>
+            </a:r>
+          </a:p>
+        </p:txBody>
+      </p:sp>
+      <p:sp>
+        <p:nvSpPr>
+          <p:cNvPr id="20" name="TextBox 19"/>
+          <p:cNvSpPr txBox="1"/>
+          <p:nvPr/>
+        </p:nvSpPr>
+        <p:spPr>
+          <a:xfrm>
+            <a:off x="6409944" y="3520439"/>
+            <a:ext cx="2203704" cy="1828800"/>
           </a:xfrm>
           <a:prstGeom prst="rect">
             <a:avLst/>
@@ -12427,21 +12397,21 @@
                 <a:ea typeface="B Nazanin"/>
                 <a:cs typeface="B Nazanin"/>
               </a:rPr>
-              <a:t>ده مجموعه با همه نمونه‌ها اجرا شد و ده مجموعه با حدود چهارصد نمونه طبقه‌ای.</a:t>
-            </a:r>
-          </a:p>
-        </p:txBody>
-      </p:sp>
-      <p:sp>
-        <p:nvSpPr>
-          <p:cNvPr id="19" name="Rounded Rectangle 18"/>
-          <p:cNvSpPr/>
-          <p:nvPr/>
-        </p:nvSpPr>
-        <p:spPr>
-          <a:xfrm>
-            <a:off x="457200" y="3127248"/>
-            <a:ext cx="11292840" cy="841248"/>
+              <a:t>انتشار وابستگی. نمونه‌ها خودشان نماینده خوشه را انتخاب می‌کنند.</a:t>
+            </a:r>
+          </a:p>
+        </p:txBody>
+      </p:sp>
+      <p:sp>
+        <p:nvSpPr>
+          <p:cNvPr id="21" name="Rounded Rectangle 20"/>
+          <p:cNvSpPr/>
+          <p:nvPr/>
+        </p:nvSpPr>
+        <p:spPr>
+          <a:xfrm>
+            <a:off x="3319272" y="1417320"/>
+            <a:ext cx="2660904" cy="4297680"/>
           </a:xfrm>
           <a:prstGeom prst="roundRect">
             <a:avLst>
@@ -12455,9 +12425,9 @@
             <a:noFill/>
           </a:ln>
           <a:effectLst>
-            <a:outerShdw blurRad="182880" dist="45720" dir="7200000" algn="ctr" rotWithShape="0">
+            <a:outerShdw blurRad="256032" dist="73152" dir="7200000" algn="ctr" rotWithShape="0">
               <a:srgbClr val="1A334A">
-                <a:alpha val="14000"/>
+                <a:alpha val="18000"/>
               </a:srgbClr>
             </a:outerShdw>
           </a:effectLst>
@@ -12486,14 +12456,14 @@
       </p:sp>
       <p:sp>
         <p:nvSpPr>
-          <p:cNvPr id="20" name="Rectangle 19"/>
-          <p:cNvSpPr/>
-          <p:nvPr/>
-        </p:nvSpPr>
-        <p:spPr>
-          <a:xfrm>
-            <a:off x="11594592" y="3236976"/>
-            <a:ext cx="91440" cy="621792"/>
+          <p:cNvPr id="22" name="Rectangle 21"/>
+          <p:cNvSpPr/>
+          <p:nvPr/>
+        </p:nvSpPr>
+        <p:spPr>
+          <a:xfrm>
+            <a:off x="3319272" y="1417320"/>
+            <a:ext cx="2660904" cy="109728"/>
           </a:xfrm>
           <a:prstGeom prst="rect">
             <a:avLst/>
@@ -12529,14 +12499,14 @@
       </p:sp>
       <p:sp>
         <p:nvSpPr>
-          <p:cNvPr id="21" name="TextBox 20"/>
+          <p:cNvPr id="23" name="TextBox 22"/>
           <p:cNvSpPr txBox="1"/>
           <p:nvPr/>
         </p:nvSpPr>
         <p:spPr>
           <a:xfrm>
-            <a:off x="10561320" y="3255264"/>
-            <a:ext cx="914400" cy="640080"/>
+            <a:off x="3547872" y="1737360"/>
+            <a:ext cx="2203704" cy="365760"/>
           </a:xfrm>
           <a:prstGeom prst="rect">
             <a:avLst/>
@@ -12555,7 +12525,7 @@
               </a:spcAft>
             </a:pPr>
             <a:r>
-              <a:rPr sz="1600" b="1" rtl="1" lang="fa-IR">
+              <a:rPr sz="1400" b="0" rtl="1" lang="fa-IR">
                 <a:solidFill>
                   <a:srgbClr val="A33B24"/>
                 </a:solidFill>
@@ -12563,21 +12533,62 @@
                 <a:ea typeface="B Nazanin"/>
                 <a:cs typeface="B Nazanin"/>
               </a:rPr>
-              <a:t>۰۳</a:t>
-            </a:r>
-          </a:p>
-        </p:txBody>
-      </p:sp>
-      <p:sp>
-        <p:nvSpPr>
-          <p:cNvPr id="22" name="TextBox 21"/>
+              <a:t>۳</a:t>
+            </a:r>
+          </a:p>
+        </p:txBody>
+      </p:sp>
+      <p:sp>
+        <p:nvSpPr>
+          <p:cNvPr id="24" name="TextBox 23"/>
           <p:cNvSpPr txBox="1"/>
           <p:nvPr/>
         </p:nvSpPr>
         <p:spPr>
           <a:xfrm>
-            <a:off x="685800" y="3255264"/>
-            <a:ext cx="9738360" cy="640080"/>
+            <a:off x="3547872" y="2240280"/>
+            <a:ext cx="2203704" cy="1188720"/>
+          </a:xfrm>
+          <a:prstGeom prst="rect">
+            <a:avLst/>
+          </a:prstGeom>
+          <a:noFill/>
+        </p:spPr>
+        <p:txBody>
+          <a:bodyPr wrap="square">
+            <a:spAutoFit/>
+          </a:bodyPr>
+          <a:lstStyle/>
+          <a:p>
+            <a:pPr algn="r" rtl="0">
+              <a:spcAft>
+                <a:spcPts val="0"/>
+              </a:spcAft>
+            </a:pPr>
+            <a:r>
+              <a:rPr sz="2200" b="1" rtl="0" lang="en-US">
+                <a:solidFill>
+                  <a:srgbClr val="1A334A"/>
+                </a:solidFill>
+                <a:latin typeface="Calibri"/>
+                <a:ea typeface="Calibri"/>
+                <a:cs typeface="Calibri"/>
+              </a:rPr>
+              <a:t>DSet</a:t>
+            </a:r>
+          </a:p>
+        </p:txBody>
+      </p:sp>
+      <p:sp>
+        <p:nvSpPr>
+          <p:cNvPr id="25" name="TextBox 24"/>
+          <p:cNvSpPr txBox="1"/>
+          <p:nvPr/>
+        </p:nvSpPr>
+        <p:spPr>
+          <a:xfrm>
+            <a:off x="3547872" y="3520439"/>
+            <a:ext cx="2203704" cy="1828800"/>
           </a:xfrm>
           <a:prstGeom prst="rect">
             <a:avLst/>
@@ -12604,21 +12615,21 @@
                 <a:ea typeface="B Nazanin"/>
                 <a:cs typeface="B Nazanin"/>
               </a:rPr>
-              <a:t>برای هر خانه، شبکه تنظیمات مثل آزمایش مقاله انتخاب شد و بهترین مقدار گزارش شد.</a:t>
-            </a:r>
-          </a:p>
-        </p:txBody>
-      </p:sp>
-      <p:sp>
-        <p:nvSpPr>
-          <p:cNvPr id="23" name="Rounded Rectangle 22"/>
-          <p:cNvSpPr/>
-          <p:nvPr/>
-        </p:nvSpPr>
-        <p:spPr>
-          <a:xfrm>
-            <a:off x="457200" y="4059936"/>
-            <a:ext cx="11292840" cy="841248"/>
+              <a:t>مجموعه غالب. یک تکه خیلی متراکم را به‌عنوان خوشه برمی‌دارد.</a:t>
+            </a:r>
+          </a:p>
+        </p:txBody>
+      </p:sp>
+      <p:sp>
+        <p:nvSpPr>
+          <p:cNvPr id="26" name="Rounded Rectangle 25"/>
+          <p:cNvSpPr/>
+          <p:nvPr/>
+        </p:nvSpPr>
+        <p:spPr>
+          <a:xfrm>
+            <a:off x="457200" y="1417320"/>
+            <a:ext cx="2660904" cy="4297680"/>
           </a:xfrm>
           <a:prstGeom prst="roundRect">
             <a:avLst>
@@ -12632,9 +12643,9 @@
             <a:noFill/>
           </a:ln>
           <a:effectLst>
-            <a:outerShdw blurRad="182880" dist="45720" dir="7200000" algn="ctr" rotWithShape="0">
+            <a:outerShdw blurRad="256032" dist="73152" dir="7200000" algn="ctr" rotWithShape="0">
               <a:srgbClr val="1A334A">
-                <a:alpha val="14000"/>
+                <a:alpha val="18000"/>
               </a:srgbClr>
             </a:outerShdw>
           </a:effectLst>
@@ -12663,14 +12674,14 @@
       </p:sp>
       <p:sp>
         <p:nvSpPr>
-          <p:cNvPr id="24" name="Rectangle 23"/>
-          <p:cNvSpPr/>
-          <p:nvPr/>
-        </p:nvSpPr>
-        <p:spPr>
-          <a:xfrm>
-            <a:off x="11594592" y="4169664"/>
-            <a:ext cx="91440" cy="621792"/>
+          <p:cNvPr id="27" name="Rectangle 26"/>
+          <p:cNvSpPr/>
+          <p:nvPr/>
+        </p:nvSpPr>
+        <p:spPr>
+          <a:xfrm>
+            <a:off x="457200" y="1417320"/>
+            <a:ext cx="2660904" cy="109728"/>
           </a:xfrm>
           <a:prstGeom prst="rect">
             <a:avLst/>
@@ -12706,14 +12717,14 @@
       </p:sp>
       <p:sp>
         <p:nvSpPr>
-          <p:cNvPr id="25" name="TextBox 24"/>
+          <p:cNvPr id="28" name="TextBox 27"/>
           <p:cNvSpPr txBox="1"/>
           <p:nvPr/>
         </p:nvSpPr>
         <p:spPr>
           <a:xfrm>
-            <a:off x="10561320" y="4187952"/>
-            <a:ext cx="914400" cy="640080"/>
+            <a:off x="685800" y="1737360"/>
+            <a:ext cx="2203704" cy="365760"/>
           </a:xfrm>
           <a:prstGeom prst="rect">
             <a:avLst/>
@@ -12732,7 +12743,7 @@
               </a:spcAft>
             </a:pPr>
             <a:r>
-              <a:rPr sz="1600" b="1" rtl="1" lang="fa-IR">
+              <a:rPr sz="1400" b="0" rtl="1" lang="fa-IR">
                 <a:solidFill>
                   <a:srgbClr val="A33B24"/>
                 </a:solidFill>
@@ -12740,21 +12751,62 @@
                 <a:ea typeface="B Nazanin"/>
                 <a:cs typeface="B Nazanin"/>
               </a:rPr>
-              <a:t>۰۴</a:t>
-            </a:r>
-          </a:p>
-        </p:txBody>
-      </p:sp>
-      <p:sp>
-        <p:nvSpPr>
-          <p:cNvPr id="26" name="TextBox 25"/>
+              <a:t>۴</a:t>
+            </a:r>
+          </a:p>
+        </p:txBody>
+      </p:sp>
+      <p:sp>
+        <p:nvSpPr>
+          <p:cNvPr id="29" name="TextBox 28"/>
           <p:cNvSpPr txBox="1"/>
           <p:nvPr/>
         </p:nvSpPr>
         <p:spPr>
           <a:xfrm>
-            <a:off x="685800" y="4187952"/>
-            <a:ext cx="9738360" cy="640080"/>
+            <a:off x="685800" y="2240280"/>
+            <a:ext cx="2203704" cy="1188720"/>
+          </a:xfrm>
+          <a:prstGeom prst="rect">
+            <a:avLst/>
+          </a:prstGeom>
+          <a:noFill/>
+        </p:spPr>
+        <p:txBody>
+          <a:bodyPr wrap="square">
+            <a:spAutoFit/>
+          </a:bodyPr>
+          <a:lstStyle/>
+          <a:p>
+            <a:pPr algn="r" rtl="0">
+              <a:spcAft>
+                <a:spcPts val="0"/>
+              </a:spcAft>
+            </a:pPr>
+            <a:r>
+              <a:rPr sz="2200" b="1" rtl="0" lang="en-US">
+                <a:solidFill>
+                  <a:srgbClr val="1A334A"/>
+                </a:solidFill>
+                <a:latin typeface="Calibri"/>
+                <a:ea typeface="Calibri"/>
+                <a:cs typeface="Calibri"/>
+              </a:rPr>
+              <a:t>SPRG</a:t>
+            </a:r>
+          </a:p>
+        </p:txBody>
+      </p:sp>
+      <p:sp>
+        <p:nvSpPr>
+          <p:cNvPr id="30" name="TextBox 29"/>
+          <p:cNvSpPr txBox="1"/>
+          <p:nvPr/>
+        </p:nvSpPr>
+        <p:spPr>
+          <a:xfrm>
+            <a:off x="685800" y="3520439"/>
+            <a:ext cx="2203704" cy="1828800"/>
           </a:xfrm>
           <a:prstGeom prst="rect">
             <a:avLst/>
@@ -12781,7 +12833,7 @@
                 <a:ea typeface="B Nazanin"/>
                 <a:cs typeface="B Nazanin"/>
               </a:rPr>
-              <a:t>ادعای اصلی این ارائه، مقایسه با راه پایه خودمان است، نه رونویسی جدول چاپ‌شده مقاله.</a:t>
+              <a:t>خوشه‌بندی طیفی با شباهت جنگل تصادفی. شباهت از جنگل می‌آید، بعد برش طیفی.</a:t>
             </a:r>
           </a:p>
         </p:txBody>
@@ -13791,7 +13843,7 @@
                 <a:ea typeface="B Nazanin"/>
                 <a:cs typeface="B Nazanin"/>
               </a:rPr>
-              <a:t>۶۰ بهتر، ۳ برابر، ۱۵ بدتر</a:t>
+              <a:t>اصلاح آخر برچسب، بعد از برگشت به نمونه‌ها</a:t>
             </a:r>
           </a:p>
         </p:txBody>
@@ -13925,14 +13977,230 @@
       </p:sp>
       <p:sp>
         <p:nvSpPr>
-          <p:cNvPr id="11" name="TextBox 10"/>
+          <p:cNvPr id="11" name="Rounded Rectangle 10"/>
+          <p:cNvSpPr/>
+          <p:nvPr/>
+        </p:nvSpPr>
+        <p:spPr>
+          <a:xfrm>
+            <a:off x="329184" y="1170432"/>
+            <a:ext cx="7360920" cy="5212080"/>
+          </a:xfrm>
+          <a:prstGeom prst="roundRect">
+            <a:avLst>
+              <a:gd name="adj" fmla="val 10000"/>
+            </a:avLst>
+          </a:prstGeom>
+          <a:solidFill>
+            <a:srgbClr val="DED5C4"/>
+          </a:solidFill>
+          <a:ln>
+            <a:noFill/>
+          </a:ln>
+          <a:effectLst>
+            <a:outerShdw blurRad="201168" dist="54864" dir="7200000" algn="ctr" rotWithShape="0">
+              <a:srgbClr val="1A334A">
+                <a:alpha val="16000"/>
+              </a:srgbClr>
+            </a:outerShdw>
+          </a:effectLst>
+        </p:spPr>
+        <p:style>
+          <a:lnRef idx="1">
+            <a:schemeClr val="accent1"/>
+          </a:lnRef>
+          <a:fillRef idx="3">
+            <a:schemeClr val="accent1"/>
+          </a:fillRef>
+          <a:effectRef idx="2">
+            <a:schemeClr val="accent1"/>
+          </a:effectRef>
+          <a:fontRef idx="minor">
+            <a:schemeClr val="lt1"/>
+          </a:fontRef>
+        </p:style>
+        <p:txBody>
+          <a:bodyPr rtlCol="0" anchor="ctr"/>
+          <a:lstStyle/>
+          <a:p>
+            <a:pPr algn="ctr"/>
+          </a:p>
+        </p:txBody>
+      </p:sp>
+      <p:sp>
+        <p:nvSpPr>
+          <p:cNvPr id="12" name="Rounded Rectangle 11"/>
+          <p:cNvSpPr/>
+          <p:nvPr/>
+        </p:nvSpPr>
+        <p:spPr>
+          <a:xfrm>
+            <a:off x="420624" y="1261872"/>
+            <a:ext cx="7178040" cy="5029200"/>
+          </a:xfrm>
+          <a:prstGeom prst="roundRect">
+            <a:avLst>
+              <a:gd name="adj" fmla="val 10000"/>
+            </a:avLst>
+          </a:prstGeom>
+          <a:solidFill>
+            <a:srgbClr val="FFFCF8"/>
+          </a:solidFill>
+          <a:ln>
+            <a:noFill/>
+          </a:ln>
+        </p:spPr>
+        <p:style>
+          <a:lnRef idx="1">
+            <a:schemeClr val="accent1"/>
+          </a:lnRef>
+          <a:fillRef idx="3">
+            <a:schemeClr val="accent1"/>
+          </a:fillRef>
+          <a:effectRef idx="2">
+            <a:schemeClr val="accent1"/>
+          </a:effectRef>
+          <a:fontRef idx="minor">
+            <a:schemeClr val="lt1"/>
+          </a:fontRef>
+        </p:style>
+        <p:txBody>
+          <a:bodyPr rtlCol="0" anchor="ctr"/>
+          <a:lstStyle/>
+          <a:p>
+            <a:pPr algn="ctr"/>
+          </a:p>
+        </p:txBody>
+      </p:sp>
+      <p:pic>
+        <p:nvPicPr>
+          <p:cNvPr id="13" name="Picture 12" descr="concept_polish.png"/>
+          <p:cNvPicPr>
+            <a:picLocks noChangeAspect="1"/>
+          </p:cNvPicPr>
+          <p:nvPr/>
+        </p:nvPicPr>
+        <p:blipFill>
+          <a:blip r:embed="rId2"/>
+          <a:stretch>
+            <a:fillRect/>
+          </a:stretch>
+        </p:blipFill>
+        <p:spPr>
+          <a:xfrm>
+            <a:off x="530352" y="2616708"/>
+            <a:ext cx="6958584" cy="2319528"/>
+          </a:xfrm>
+          <a:prstGeom prst="rect">
+            <a:avLst/>
+          </a:prstGeom>
+        </p:spPr>
+      </p:pic>
+      <p:sp>
+        <p:nvSpPr>
+          <p:cNvPr id="14" name="Rounded Rectangle 13"/>
+          <p:cNvSpPr/>
+          <p:nvPr/>
+        </p:nvSpPr>
+        <p:spPr>
+          <a:xfrm>
+            <a:off x="7836408" y="1170432"/>
+            <a:ext cx="4050791" cy="5212080"/>
+          </a:xfrm>
+          <a:prstGeom prst="roundRect">
+            <a:avLst>
+              <a:gd name="adj" fmla="val 10000"/>
+            </a:avLst>
+          </a:prstGeom>
+          <a:solidFill>
+            <a:srgbClr val="FFFCF8"/>
+          </a:solidFill>
+          <a:ln>
+            <a:noFill/>
+          </a:ln>
+          <a:effectLst>
+            <a:outerShdw blurRad="201168" dist="54864" dir="7200000" algn="ctr" rotWithShape="0">
+              <a:srgbClr val="1A334A">
+                <a:alpha val="16000"/>
+              </a:srgbClr>
+            </a:outerShdw>
+          </a:effectLst>
+        </p:spPr>
+        <p:style>
+          <a:lnRef idx="1">
+            <a:schemeClr val="accent1"/>
+          </a:lnRef>
+          <a:fillRef idx="3">
+            <a:schemeClr val="accent1"/>
+          </a:fillRef>
+          <a:effectRef idx="2">
+            <a:schemeClr val="accent1"/>
+          </a:effectRef>
+          <a:fontRef idx="minor">
+            <a:schemeClr val="lt1"/>
+          </a:fontRef>
+        </p:style>
+        <p:txBody>
+          <a:bodyPr rtlCol="0" anchor="ctr"/>
+          <a:lstStyle/>
+          <a:p>
+            <a:pPr algn="ctr"/>
+          </a:p>
+        </p:txBody>
+      </p:sp>
+      <p:sp>
+        <p:nvSpPr>
+          <p:cNvPr id="15" name="Rectangle 14"/>
+          <p:cNvSpPr/>
+          <p:nvPr/>
+        </p:nvSpPr>
+        <p:spPr>
+          <a:xfrm>
+            <a:off x="11649456" y="1170432"/>
+            <a:ext cx="91440" cy="5212080"/>
+          </a:xfrm>
+          <a:prstGeom prst="rect">
+            <a:avLst/>
+          </a:prstGeom>
+          <a:solidFill>
+            <a:srgbClr val="A33B24"/>
+          </a:solidFill>
+          <a:ln>
+            <a:noFill/>
+          </a:ln>
+        </p:spPr>
+        <p:style>
+          <a:lnRef idx="1">
+            <a:schemeClr val="accent1"/>
+          </a:lnRef>
+          <a:fillRef idx="3">
+            <a:schemeClr val="accent1"/>
+          </a:fillRef>
+          <a:effectRef idx="2">
+            <a:schemeClr val="accent1"/>
+          </a:effectRef>
+          <a:fontRef idx="minor">
+            <a:schemeClr val="lt1"/>
+          </a:fontRef>
+        </p:style>
+        <p:txBody>
+          <a:bodyPr rtlCol="0" anchor="ctr"/>
+          <a:lstStyle/>
+          <a:p>
+            <a:pPr algn="ctr"/>
+          </a:p>
+        </p:txBody>
+      </p:sp>
+      <p:sp>
+        <p:nvSpPr>
+          <p:cNvPr id="16" name="TextBox 15"/>
           <p:cNvSpPr txBox="1"/>
           <p:nvPr/>
         </p:nvSpPr>
         <p:spPr>
           <a:xfrm>
-            <a:off x="502920" y="1325880"/>
-            <a:ext cx="11155680" cy="640080"/>
+            <a:off x="8001000" y="1353312"/>
+            <a:ext cx="3666744" cy="4846320"/>
           </a:xfrm>
           <a:prstGeom prst="rect">
             <a:avLst/>
@@ -13940,195 +14208,60 @@
           <a:noFill/>
         </p:spPr>
         <p:txBody>
-          <a:bodyPr wrap="square">
+          <a:bodyPr wrap="square" anchor="ctr">
             <a:spAutoFit/>
           </a:bodyPr>
           <a:lstStyle/>
           <a:p>
             <a:pPr algn="r" rtl="1">
               <a:spcAft>
-                <a:spcPts val="0"/>
+                <a:spcPts val="1200"/>
               </a:spcAft>
+              <a:buFont typeface="Calibri"/>
+              <a:buChar char="•"/>
             </a:pPr>
             <a:r>
               <a:rPr sz="1800" b="0" rtl="1" lang="fa-IR">
                 <a:solidFill>
-                  <a:srgbClr val="6B645C"/>
+                  <a:srgbClr val="1B1816"/>
                 </a:solidFill>
                 <a:latin typeface="Calibri"/>
                 <a:ea typeface="B Nazanin"/>
                 <a:cs typeface="B Nazanin"/>
               </a:rPr>
-              <a:t>هفتاد و هشت مقایسه. هر بار همان الگوریتم، یک بار روی گراف اصلی و یک بار روی گراف کوچک.</a:t>
-            </a:r>
-          </a:p>
-        </p:txBody>
-      </p:sp>
-      <p:sp>
-        <p:nvSpPr>
-          <p:cNvPr id="12" name="Rounded Rectangle 11"/>
-          <p:cNvSpPr/>
-          <p:nvPr/>
-        </p:nvSpPr>
-        <p:spPr>
-          <a:xfrm>
-            <a:off x="8138160" y="2103120"/>
-            <a:ext cx="3611880" cy="2880360"/>
-          </a:xfrm>
-          <a:prstGeom prst="roundRect">
-            <a:avLst>
-              <a:gd name="adj" fmla="val 10000"/>
-            </a:avLst>
-          </a:prstGeom>
-          <a:solidFill>
-            <a:srgbClr val="FFFCF8"/>
-          </a:solidFill>
-          <a:ln>
-            <a:noFill/>
-          </a:ln>
-          <a:effectLst>
-            <a:outerShdw blurRad="292608" dist="91440" dir="7200000" algn="ctr" rotWithShape="0">
-              <a:srgbClr val="1A334A">
-                <a:alpha val="20000"/>
-              </a:srgbClr>
-            </a:outerShdw>
-          </a:effectLst>
-        </p:spPr>
-        <p:style>
-          <a:lnRef idx="1">
-            <a:schemeClr val="accent1"/>
-          </a:lnRef>
-          <a:fillRef idx="3">
-            <a:schemeClr val="accent1"/>
-          </a:fillRef>
-          <a:effectRef idx="2">
-            <a:schemeClr val="accent1"/>
-          </a:effectRef>
-          <a:fontRef idx="minor">
-            <a:schemeClr val="lt1"/>
-          </a:fontRef>
-        </p:style>
-        <p:txBody>
-          <a:bodyPr rtlCol="0" anchor="ctr"/>
-          <a:lstStyle/>
-          <a:p>
-            <a:pPr algn="ctr"/>
-          </a:p>
-        </p:txBody>
-      </p:sp>
-      <p:sp>
-        <p:nvSpPr>
-          <p:cNvPr id="13" name="Rectangle 12"/>
-          <p:cNvSpPr/>
-          <p:nvPr/>
-        </p:nvSpPr>
-        <p:spPr>
-          <a:xfrm>
-            <a:off x="8138160" y="2103120"/>
-            <a:ext cx="3611880" cy="109728"/>
-          </a:xfrm>
-          <a:prstGeom prst="rect">
-            <a:avLst/>
-          </a:prstGeom>
-          <a:solidFill>
-            <a:srgbClr val="2C5E52"/>
-          </a:solidFill>
-          <a:ln>
-            <a:noFill/>
-          </a:ln>
-        </p:spPr>
-        <p:style>
-          <a:lnRef idx="1">
-            <a:schemeClr val="accent1"/>
-          </a:lnRef>
-          <a:fillRef idx="3">
-            <a:schemeClr val="accent1"/>
-          </a:fillRef>
-          <a:effectRef idx="2">
-            <a:schemeClr val="accent1"/>
-          </a:effectRef>
-          <a:fontRef idx="minor">
-            <a:schemeClr val="lt1"/>
-          </a:fontRef>
-        </p:style>
-        <p:txBody>
-          <a:bodyPr rtlCol="0" anchor="ctr"/>
-          <a:lstStyle/>
-          <a:p>
-            <a:pPr algn="ctr"/>
-          </a:p>
-        </p:txBody>
-      </p:sp>
-      <p:sp>
-        <p:nvSpPr>
-          <p:cNvPr id="14" name="TextBox 13"/>
-          <p:cNvSpPr txBox="1"/>
-          <p:nvPr/>
-        </p:nvSpPr>
-        <p:spPr>
-          <a:xfrm>
-            <a:off x="8138160" y="2377440"/>
-            <a:ext cx="3611880" cy="1371600"/>
-          </a:xfrm>
-          <a:prstGeom prst="rect">
-            <a:avLst/>
-          </a:prstGeom>
-          <a:noFill/>
-        </p:spPr>
-        <p:txBody>
-          <a:bodyPr wrap="square">
-            <a:spAutoFit/>
-          </a:bodyPr>
-          <a:lstStyle/>
-          <a:p>
-            <a:pPr algn="ctr" rtl="0">
+              <a:t>دایره گروه لم است، نه مرز خوشه.</a:t>
+            </a:r>
+          </a:p>
+          <a:p>
+            <a:pPr algn="r" rtl="1">
               <a:spcAft>
-                <a:spcPts val="0"/>
+                <a:spcPts val="1200"/>
               </a:spcAft>
+              <a:buFont typeface="Calibri"/>
+              <a:buChar char="•"/>
             </a:pPr>
             <a:r>
-              <a:rPr sz="6000" b="1" rtl="1" lang="fa-IR">
-                <a:solidFill>
-                  <a:srgbClr val="2C5E52"/>
+              <a:rPr sz="1800" b="0" rtl="1" lang="fa-IR">
+                <a:solidFill>
+                  <a:srgbClr val="1B1816"/>
                 </a:solidFill>
                 <a:latin typeface="Calibri"/>
                 <a:ea typeface="B Nazanin"/>
                 <a:cs typeface="B Nazanin"/>
               </a:rPr>
-              <a:t>۶۰</a:t>
-            </a:r>
-          </a:p>
-        </p:txBody>
-      </p:sp>
-      <p:sp>
-        <p:nvSpPr>
-          <p:cNvPr id="15" name="TextBox 14"/>
-          <p:cNvSpPr txBox="1"/>
-          <p:nvPr/>
-        </p:nvSpPr>
-        <p:spPr>
-          <a:xfrm>
-            <a:off x="8138160" y="3931920"/>
-            <a:ext cx="3611880" cy="640080"/>
-          </a:xfrm>
-          <a:prstGeom prst="rect">
-            <a:avLst/>
-          </a:prstGeom>
-          <a:noFill/>
-        </p:spPr>
-        <p:txBody>
-          <a:bodyPr wrap="square">
-            <a:spAutoFit/>
-          </a:bodyPr>
-          <a:lstStyle/>
-          <a:p>
-            <a:pPr algn="ctr" rtl="0">
+              <a:t>اول همه اعضای یک گروه یک رنگ می‌گیرند، حتی اگر یکی‌شان میان همسایه‌های رنگ دیگر باشد.</a:t>
+            </a:r>
+          </a:p>
+          <a:p>
+            <a:pPr algn="r" rtl="1">
               <a:spcAft>
-                <a:spcPts val="0"/>
+                <a:spcPts val="1200"/>
               </a:spcAft>
+              <a:buFont typeface="Calibri"/>
+              <a:buChar char="•"/>
             </a:pPr>
             <a:r>
-              <a:rPr sz="2000" b="0" rtl="1" lang="fa-IR">
+              <a:rPr sz="1800" b="0" rtl="1" lang="fa-IR">
                 <a:solidFill>
                   <a:srgbClr val="1B1816"/>
                 </a:solidFill>
@@ -14136,361 +14269,27 @@
                 <a:ea typeface="B Nazanin"/>
                 <a:cs typeface="B Nazanin"/>
               </a:rPr>
-              <a:t>گراف کوچک بهتر</a:t>
-            </a:r>
-          </a:p>
-        </p:txBody>
-      </p:sp>
-      <p:sp>
-        <p:nvSpPr>
-          <p:cNvPr id="16" name="Rounded Rectangle 15"/>
-          <p:cNvSpPr/>
-          <p:nvPr/>
-        </p:nvSpPr>
-        <p:spPr>
-          <a:xfrm>
-            <a:off x="4297680" y="2103120"/>
-            <a:ext cx="3611880" cy="2880360"/>
-          </a:xfrm>
-          <a:prstGeom prst="roundRect">
-            <a:avLst>
-              <a:gd name="adj" fmla="val 10000"/>
-            </a:avLst>
-          </a:prstGeom>
-          <a:solidFill>
-            <a:srgbClr val="FFFCF8"/>
-          </a:solidFill>
-          <a:ln>
-            <a:noFill/>
-          </a:ln>
-          <a:effectLst>
-            <a:outerShdw blurRad="292608" dist="91440" dir="7200000" algn="ctr" rotWithShape="0">
-              <a:srgbClr val="1A334A">
-                <a:alpha val="20000"/>
-              </a:srgbClr>
-            </a:outerShdw>
-          </a:effectLst>
-        </p:spPr>
-        <p:style>
-          <a:lnRef idx="1">
-            <a:schemeClr val="accent1"/>
-          </a:lnRef>
-          <a:fillRef idx="3">
-            <a:schemeClr val="accent1"/>
-          </a:fillRef>
-          <a:effectRef idx="2">
-            <a:schemeClr val="accent1"/>
-          </a:effectRef>
-          <a:fontRef idx="minor">
-            <a:schemeClr val="lt1"/>
-          </a:fontRef>
-        </p:style>
-        <p:txBody>
-          <a:bodyPr rtlCol="0" anchor="ctr"/>
-          <a:lstStyle/>
-          <a:p>
-            <a:pPr algn="ctr"/>
-          </a:p>
-        </p:txBody>
-      </p:sp>
-      <p:sp>
-        <p:nvSpPr>
-          <p:cNvPr id="17" name="Rectangle 16"/>
-          <p:cNvSpPr/>
-          <p:nvPr/>
-        </p:nvSpPr>
-        <p:spPr>
-          <a:xfrm>
-            <a:off x="4297680" y="2103120"/>
-            <a:ext cx="3611880" cy="109728"/>
-          </a:xfrm>
-          <a:prstGeom prst="rect">
-            <a:avLst/>
-          </a:prstGeom>
-          <a:solidFill>
-            <a:srgbClr val="1A334A"/>
-          </a:solidFill>
-          <a:ln>
-            <a:noFill/>
-          </a:ln>
-        </p:spPr>
-        <p:style>
-          <a:lnRef idx="1">
-            <a:schemeClr val="accent1"/>
-          </a:lnRef>
-          <a:fillRef idx="3">
-            <a:schemeClr val="accent1"/>
-          </a:fillRef>
-          <a:effectRef idx="2">
-            <a:schemeClr val="accent1"/>
-          </a:effectRef>
-          <a:fontRef idx="minor">
-            <a:schemeClr val="lt1"/>
-          </a:fontRef>
-        </p:style>
-        <p:txBody>
-          <a:bodyPr rtlCol="0" anchor="ctr"/>
-          <a:lstStyle/>
-          <a:p>
-            <a:pPr algn="ctr"/>
-          </a:p>
-        </p:txBody>
-      </p:sp>
-      <p:sp>
-        <p:nvSpPr>
-          <p:cNvPr id="18" name="TextBox 17"/>
-          <p:cNvSpPr txBox="1"/>
-          <p:nvPr/>
-        </p:nvSpPr>
-        <p:spPr>
-          <a:xfrm>
-            <a:off x="4297680" y="2377440"/>
-            <a:ext cx="3611880" cy="1371600"/>
-          </a:xfrm>
-          <a:prstGeom prst="rect">
-            <a:avLst/>
-          </a:prstGeom>
-          <a:noFill/>
-        </p:spPr>
-        <p:txBody>
-          <a:bodyPr wrap="square">
-            <a:spAutoFit/>
-          </a:bodyPr>
-          <a:lstStyle/>
-          <a:p>
-            <a:pPr algn="ctr" rtl="0">
+              <a:t>این مرحله فقط رنگ خوشه همان نقطه را عوض می‌کند.</a:t>
+            </a:r>
+          </a:p>
+          <a:p>
+            <a:pPr algn="r" rtl="1">
               <a:spcAft>
-                <a:spcPts val="0"/>
+                <a:spcPts val="1200"/>
               </a:spcAft>
+              <a:buFont typeface="Calibri"/>
+              <a:buChar char="•"/>
             </a:pPr>
             <a:r>
-              <a:rPr sz="6000" b="1" rtl="1" lang="fa-IR">
-                <a:solidFill>
-                  <a:srgbClr val="1A334A"/>
+              <a:rPr sz="1800" b="0" rtl="1" lang="fa-IR">
+                <a:solidFill>
+                  <a:srgbClr val="1B1816"/>
                 </a:solidFill>
                 <a:latin typeface="Calibri"/>
                 <a:ea typeface="B Nazanin"/>
                 <a:cs typeface="B Nazanin"/>
               </a:rPr>
-              <a:t>۳</a:t>
-            </a:r>
-          </a:p>
-        </p:txBody>
-      </p:sp>
-      <p:sp>
-        <p:nvSpPr>
-          <p:cNvPr id="19" name="TextBox 18"/>
-          <p:cNvSpPr txBox="1"/>
-          <p:nvPr/>
-        </p:nvSpPr>
-        <p:spPr>
-          <a:xfrm>
-            <a:off x="4297680" y="3931920"/>
-            <a:ext cx="3611880" cy="640080"/>
-          </a:xfrm>
-          <a:prstGeom prst="rect">
-            <a:avLst/>
-          </a:prstGeom>
-          <a:noFill/>
-        </p:spPr>
-        <p:txBody>
-          <a:bodyPr wrap="square">
-            <a:spAutoFit/>
-          </a:bodyPr>
-          <a:lstStyle/>
-          <a:p>
-            <a:pPr algn="ctr" rtl="0">
-              <a:spcAft>
-                <a:spcPts val="0"/>
-              </a:spcAft>
-            </a:pPr>
-            <a:r>
-              <a:rPr sz="2000" b="0" rtl="1" lang="fa-IR">
-                <a:solidFill>
-                  <a:srgbClr val="1B1816"/>
-                </a:solidFill>
-                <a:latin typeface="Calibri"/>
-                <a:ea typeface="B Nazanin"/>
-                <a:cs typeface="B Nazanin"/>
-              </a:rPr>
-              <a:t>برابر</a:t>
-            </a:r>
-          </a:p>
-        </p:txBody>
-      </p:sp>
-      <p:sp>
-        <p:nvSpPr>
-          <p:cNvPr id="20" name="Rounded Rectangle 19"/>
-          <p:cNvSpPr/>
-          <p:nvPr/>
-        </p:nvSpPr>
-        <p:spPr>
-          <a:xfrm>
-            <a:off x="457200" y="2103120"/>
-            <a:ext cx="3611880" cy="2880360"/>
-          </a:xfrm>
-          <a:prstGeom prst="roundRect">
-            <a:avLst>
-              <a:gd name="adj" fmla="val 10000"/>
-            </a:avLst>
-          </a:prstGeom>
-          <a:solidFill>
-            <a:srgbClr val="FFFCF8"/>
-          </a:solidFill>
-          <a:ln>
-            <a:noFill/>
-          </a:ln>
-          <a:effectLst>
-            <a:outerShdw blurRad="292608" dist="91440" dir="7200000" algn="ctr" rotWithShape="0">
-              <a:srgbClr val="1A334A">
-                <a:alpha val="20000"/>
-              </a:srgbClr>
-            </a:outerShdw>
-          </a:effectLst>
-        </p:spPr>
-        <p:style>
-          <a:lnRef idx="1">
-            <a:schemeClr val="accent1"/>
-          </a:lnRef>
-          <a:fillRef idx="3">
-            <a:schemeClr val="accent1"/>
-          </a:fillRef>
-          <a:effectRef idx="2">
-            <a:schemeClr val="accent1"/>
-          </a:effectRef>
-          <a:fontRef idx="minor">
-            <a:schemeClr val="lt1"/>
-          </a:fontRef>
-        </p:style>
-        <p:txBody>
-          <a:bodyPr rtlCol="0" anchor="ctr"/>
-          <a:lstStyle/>
-          <a:p>
-            <a:pPr algn="ctr"/>
-          </a:p>
-        </p:txBody>
-      </p:sp>
-      <p:sp>
-        <p:nvSpPr>
-          <p:cNvPr id="21" name="Rectangle 20"/>
-          <p:cNvSpPr/>
-          <p:nvPr/>
-        </p:nvSpPr>
-        <p:spPr>
-          <a:xfrm>
-            <a:off x="457200" y="2103120"/>
-            <a:ext cx="3611880" cy="109728"/>
-          </a:xfrm>
-          <a:prstGeom prst="rect">
-            <a:avLst/>
-          </a:prstGeom>
-          <a:solidFill>
-            <a:srgbClr val="A33B24"/>
-          </a:solidFill>
-          <a:ln>
-            <a:noFill/>
-          </a:ln>
-        </p:spPr>
-        <p:style>
-          <a:lnRef idx="1">
-            <a:schemeClr val="accent1"/>
-          </a:lnRef>
-          <a:fillRef idx="3">
-            <a:schemeClr val="accent1"/>
-          </a:fillRef>
-          <a:effectRef idx="2">
-            <a:schemeClr val="accent1"/>
-          </a:effectRef>
-          <a:fontRef idx="minor">
-            <a:schemeClr val="lt1"/>
-          </a:fontRef>
-        </p:style>
-        <p:txBody>
-          <a:bodyPr rtlCol="0" anchor="ctr"/>
-          <a:lstStyle/>
-          <a:p>
-            <a:pPr algn="ctr"/>
-          </a:p>
-        </p:txBody>
-      </p:sp>
-      <p:sp>
-        <p:nvSpPr>
-          <p:cNvPr id="22" name="TextBox 21"/>
-          <p:cNvSpPr txBox="1"/>
-          <p:nvPr/>
-        </p:nvSpPr>
-        <p:spPr>
-          <a:xfrm>
-            <a:off x="457200" y="2377440"/>
-            <a:ext cx="3611880" cy="1371600"/>
-          </a:xfrm>
-          <a:prstGeom prst="rect">
-            <a:avLst/>
-          </a:prstGeom>
-          <a:noFill/>
-        </p:spPr>
-        <p:txBody>
-          <a:bodyPr wrap="square">
-            <a:spAutoFit/>
-          </a:bodyPr>
-          <a:lstStyle/>
-          <a:p>
-            <a:pPr algn="ctr" rtl="0">
-              <a:spcAft>
-                <a:spcPts val="0"/>
-              </a:spcAft>
-            </a:pPr>
-            <a:r>
-              <a:rPr sz="6000" b="1" rtl="1" lang="fa-IR">
-                <a:solidFill>
-                  <a:srgbClr val="A33B24"/>
-                </a:solidFill>
-                <a:latin typeface="Calibri"/>
-                <a:ea typeface="B Nazanin"/>
-                <a:cs typeface="B Nazanin"/>
-              </a:rPr>
-              <a:t>۱۵</a:t>
-            </a:r>
-          </a:p>
-        </p:txBody>
-      </p:sp>
-      <p:sp>
-        <p:nvSpPr>
-          <p:cNvPr id="23" name="TextBox 22"/>
-          <p:cNvSpPr txBox="1"/>
-          <p:nvPr/>
-        </p:nvSpPr>
-        <p:spPr>
-          <a:xfrm>
-            <a:off x="457200" y="3931920"/>
-            <a:ext cx="3611880" cy="640080"/>
-          </a:xfrm>
-          <a:prstGeom prst="rect">
-            <a:avLst/>
-          </a:prstGeom>
-          <a:noFill/>
-        </p:spPr>
-        <p:txBody>
-          <a:bodyPr wrap="square">
-            <a:spAutoFit/>
-          </a:bodyPr>
-          <a:lstStyle/>
-          <a:p>
-            <a:pPr algn="ctr" rtl="0">
-              <a:spcAft>
-                <a:spcPts val="0"/>
-              </a:spcAft>
-            </a:pPr>
-            <a:r>
-              <a:rPr sz="2000" b="0" rtl="1" lang="fa-IR">
-                <a:solidFill>
-                  <a:srgbClr val="1B1816"/>
-                </a:solidFill>
-                <a:latin typeface="Calibri"/>
-                <a:ea typeface="B Nazanin"/>
-                <a:cs typeface="B Nazanin"/>
-              </a:rPr>
-              <a:t>گراف اصلی بهتر</a:t>
+              <a:t>عضویت او در گروه لم دست نمی‌خورد. این مرحله جزو خود لم نیست.</a:t>
             </a:r>
           </a:p>
         </p:txBody>
@@ -14785,7 +14584,7 @@
                 <a:ea typeface="B Nazanin"/>
                 <a:cs typeface="B Nazanin"/>
               </a:rPr>
-              <a:t>نمودار اختلاف: بالای صفر یعنی لم بهتر است</a:t>
+              <a:t>بیست مجموعه واقعی</a:t>
             </a:r>
           </a:p>
         </p:txBody>
@@ -14919,14 +14718,77 @@
       </p:sp>
       <p:sp>
         <p:nvSpPr>
-          <p:cNvPr id="11" name="Rounded Rectangle 10"/>
-          <p:cNvSpPr/>
-          <p:nvPr/>
-        </p:nvSpPr>
-        <p:spPr>
-          <a:xfrm>
-            <a:off x="329184" y="1170432"/>
-            <a:ext cx="7360920" cy="5212080"/>
+          <p:cNvPr id="11" name="TextBox 10"/>
+          <p:cNvSpPr txBox="1"/>
+          <p:nvPr/>
+        </p:nvSpPr>
+        <p:spPr>
+          <a:xfrm>
+            <a:off x="502920" y="1280160"/>
+            <a:ext cx="11155680" cy="777240"/>
+          </a:xfrm>
+          <a:prstGeom prst="rect">
+            <a:avLst/>
+          </a:prstGeom>
+          <a:noFill/>
+        </p:spPr>
+        <p:txBody>
+          <a:bodyPr wrap="square">
+            <a:spAutoFit/>
+          </a:bodyPr>
+          <a:lstStyle/>
+          <a:p>
+            <a:pPr algn="r" rtl="1">
+              <a:spcAft>
+                <a:spcPts val="0"/>
+              </a:spcAft>
+            </a:pPr>
+            <a:r>
+              <a:rPr sz="1600" b="0" rtl="1" lang="fa-IR">
+                <a:solidFill>
+                  <a:srgbClr val="1B1816"/>
+                </a:solidFill>
+                <a:latin typeface="Calibri"/>
+                <a:ea typeface="B Nazanin"/>
+                <a:cs typeface="B Nazanin"/>
+              </a:rPr>
+              <a:t>جدول ویژگی. سطر، نمونه. ستون، ویژگی عددی. برچسب واقعی فقط برای </a:t>
+            </a:r>
+            <a:r>
+              <a:rPr sz="1600" b="0" rtl="0" lang="en-US">
+                <a:solidFill>
+                  <a:srgbClr val="1B1816"/>
+                </a:solidFill>
+                <a:latin typeface="Calibri"/>
+                <a:ea typeface="Calibri"/>
+                <a:cs typeface="Calibri"/>
+              </a:rPr>
+              <a:t>NMI.</a:t>
+            </a:r>
+            <a:r>
+              <a:rPr sz="1600" b="0" rtl="1" lang="fa-IR">
+                <a:solidFill>
+                  <a:srgbClr val="1B1816"/>
+                </a:solidFill>
+                <a:latin typeface="Calibri"/>
+                <a:ea typeface="B Nazanin"/>
+                <a:cs typeface="B Nazanin"/>
+              </a:rPr>
+              <a:t> از ۱۰۶ نمونه تا حدود ۱۱ هزار. از ۲ کلاس تا ۱۰۰ کلاس.</a:t>
+            </a:r>
+          </a:p>
+        </p:txBody>
+      </p:sp>
+      <p:sp>
+        <p:nvSpPr>
+          <p:cNvPr id="12" name="Rounded Rectangle 11"/>
+          <p:cNvSpPr/>
+          <p:nvPr/>
+        </p:nvSpPr>
+        <p:spPr>
+          <a:xfrm>
+            <a:off x="8089392" y="2148840"/>
+            <a:ext cx="3614928" cy="3977639"/>
           </a:xfrm>
           <a:prstGeom prst="roundRect">
             <a:avLst>
@@ -14934,15 +14796,15 @@
             </a:avLst>
           </a:prstGeom>
           <a:solidFill>
-            <a:srgbClr val="DED5C4"/>
+            <a:srgbClr val="FFFCF8"/>
           </a:solidFill>
           <a:ln>
             <a:noFill/>
           </a:ln>
           <a:effectLst>
-            <a:outerShdw blurRad="201168" dist="54864" dir="7200000" algn="ctr" rotWithShape="0">
+            <a:outerShdw blurRad="256032" dist="73152" dir="7200000" algn="ctr" rotWithShape="0">
               <a:srgbClr val="1A334A">
-                <a:alpha val="16000"/>
+                <a:alpha val="18000"/>
               </a:srgbClr>
             </a:outerShdw>
           </a:effectLst>
@@ -14971,14 +14833,191 @@
       </p:sp>
       <p:sp>
         <p:nvSpPr>
-          <p:cNvPr id="12" name="Rounded Rectangle 11"/>
-          <p:cNvSpPr/>
-          <p:nvPr/>
-        </p:nvSpPr>
-        <p:spPr>
-          <a:xfrm>
-            <a:off x="420624" y="1261872"/>
-            <a:ext cx="7178040" cy="5029200"/>
+          <p:cNvPr id="13" name="Rectangle 12"/>
+          <p:cNvSpPr/>
+          <p:nvPr/>
+        </p:nvSpPr>
+        <p:spPr>
+          <a:xfrm>
+            <a:off x="8089392" y="2148840"/>
+            <a:ext cx="3614928" cy="109728"/>
+          </a:xfrm>
+          <a:prstGeom prst="rect">
+            <a:avLst/>
+          </a:prstGeom>
+          <a:solidFill>
+            <a:srgbClr val="A33B24"/>
+          </a:solidFill>
+          <a:ln>
+            <a:noFill/>
+          </a:ln>
+        </p:spPr>
+        <p:style>
+          <a:lnRef idx="1">
+            <a:schemeClr val="accent1"/>
+          </a:lnRef>
+          <a:fillRef idx="3">
+            <a:schemeClr val="accent1"/>
+          </a:fillRef>
+          <a:effectRef idx="2">
+            <a:schemeClr val="accent1"/>
+          </a:effectRef>
+          <a:fontRef idx="minor">
+            <a:schemeClr val="lt1"/>
+          </a:fontRef>
+        </p:style>
+        <p:txBody>
+          <a:bodyPr rtlCol="0" anchor="ctr"/>
+          <a:lstStyle/>
+          <a:p>
+            <a:pPr algn="ctr"/>
+          </a:p>
+        </p:txBody>
+      </p:sp>
+      <p:sp>
+        <p:nvSpPr>
+          <p:cNvPr id="14" name="TextBox 13"/>
+          <p:cNvSpPr txBox="1"/>
+          <p:nvPr/>
+        </p:nvSpPr>
+        <p:spPr>
+          <a:xfrm>
+            <a:off x="8317992" y="2468880"/>
+            <a:ext cx="3157728" cy="365760"/>
+          </a:xfrm>
+          <a:prstGeom prst="rect">
+            <a:avLst/>
+          </a:prstGeom>
+          <a:noFill/>
+        </p:spPr>
+        <p:txBody>
+          <a:bodyPr wrap="square">
+            <a:spAutoFit/>
+          </a:bodyPr>
+          <a:lstStyle/>
+          <a:p>
+            <a:pPr algn="r" rtl="1">
+              <a:spcAft>
+                <a:spcPts val="0"/>
+              </a:spcAft>
+            </a:pPr>
+            <a:r>
+              <a:rPr sz="1400" b="0" rtl="1" lang="fa-IR">
+                <a:solidFill>
+                  <a:srgbClr val="A33B24"/>
+                </a:solidFill>
+                <a:latin typeface="Calibri"/>
+                <a:ea typeface="B Nazanin"/>
+                <a:cs typeface="B Nazanin"/>
+              </a:rPr>
+              <a:t>کامل</a:t>
+            </a:r>
+          </a:p>
+        </p:txBody>
+      </p:sp>
+      <p:sp>
+        <p:nvSpPr>
+          <p:cNvPr id="15" name="TextBox 14"/>
+          <p:cNvSpPr txBox="1"/>
+          <p:nvPr/>
+        </p:nvSpPr>
+        <p:spPr>
+          <a:xfrm>
+            <a:off x="8317992" y="2971800"/>
+            <a:ext cx="3157728" cy="1188720"/>
+          </a:xfrm>
+          <a:prstGeom prst="rect">
+            <a:avLst/>
+          </a:prstGeom>
+          <a:noFill/>
+        </p:spPr>
+        <p:txBody>
+          <a:bodyPr wrap="square">
+            <a:spAutoFit/>
+          </a:bodyPr>
+          <a:lstStyle/>
+          <a:p>
+            <a:pPr algn="r" rtl="1">
+              <a:spcAft>
+                <a:spcPts val="0"/>
+              </a:spcAft>
+            </a:pPr>
+            <a:r>
+              <a:rPr sz="2600" b="1" rtl="1" lang="fa-IR">
+                <a:solidFill>
+                  <a:srgbClr val="1A334A"/>
+                </a:solidFill>
+                <a:latin typeface="Calibri"/>
+                <a:ea typeface="B Nazanin"/>
+                <a:cs typeface="B Nazanin"/>
+              </a:rPr>
+              <a:t>ده مجموعه، همه سطرها</a:t>
+            </a:r>
+          </a:p>
+        </p:txBody>
+      </p:sp>
+      <p:sp>
+        <p:nvSpPr>
+          <p:cNvPr id="16" name="TextBox 15"/>
+          <p:cNvSpPr txBox="1"/>
+          <p:nvPr/>
+        </p:nvSpPr>
+        <p:spPr>
+          <a:xfrm>
+            <a:off x="8317992" y="4251960"/>
+            <a:ext cx="3157728" cy="1828800"/>
+          </a:xfrm>
+          <a:prstGeom prst="rect">
+            <a:avLst/>
+          </a:prstGeom>
+          <a:noFill/>
+        </p:spPr>
+        <p:txBody>
+          <a:bodyPr wrap="square">
+            <a:spAutoFit/>
+          </a:bodyPr>
+          <a:lstStyle/>
+          <a:p>
+            <a:pPr algn="r" rtl="1">
+              <a:spcAft>
+                <a:spcPts val="0"/>
+              </a:spcAft>
+            </a:pPr>
+            <a:r>
+              <a:rPr sz="1500" b="0" rtl="1" lang="fa-IR">
+                <a:solidFill>
+                  <a:srgbClr val="1B1816"/>
+                </a:solidFill>
+                <a:latin typeface="Calibri"/>
+                <a:ea typeface="B Nazanin"/>
+                <a:cs typeface="B Nazanin"/>
+              </a:rPr>
+              <a:t>زیر ۵۰۰ نمونه. Wine، Glass، Seeds، Thyroid، Sonar، Appendicitis، Spectf، Ecoli، Landmine، </a:t>
+            </a:r>
+            <a:r>
+              <a:rPr sz="1500" b="0" rtl="0" lang="en-US">
+                <a:solidFill>
+                  <a:srgbClr val="1B1816"/>
+                </a:solidFill>
+                <a:latin typeface="Calibri"/>
+                <a:ea typeface="Calibri"/>
+                <a:cs typeface="Calibri"/>
+              </a:rPr>
+              <a:t>Libras.</a:t>
+            </a:r>
+          </a:p>
+        </p:txBody>
+      </p:sp>
+      <p:sp>
+        <p:nvSpPr>
+          <p:cNvPr id="17" name="Rounded Rectangle 16"/>
+          <p:cNvSpPr/>
+          <p:nvPr/>
+        </p:nvSpPr>
+        <p:spPr>
+          <a:xfrm>
+            <a:off x="4273296" y="2148840"/>
+            <a:ext cx="3614928" cy="3977639"/>
           </a:xfrm>
           <a:prstGeom prst="roundRect">
             <a:avLst>
@@ -14991,63 +15030,223 @@
           <a:ln>
             <a:noFill/>
           </a:ln>
-        </p:spPr>
-        <p:style>
-          <a:lnRef idx="1">
-            <a:schemeClr val="accent1"/>
-          </a:lnRef>
-          <a:fillRef idx="3">
-            <a:schemeClr val="accent1"/>
-          </a:fillRef>
-          <a:effectRef idx="2">
-            <a:schemeClr val="accent1"/>
-          </a:effectRef>
-          <a:fontRef idx="minor">
-            <a:schemeClr val="lt1"/>
-          </a:fontRef>
-        </p:style>
-        <p:txBody>
-          <a:bodyPr rtlCol="0" anchor="ctr"/>
-          <a:lstStyle/>
-          <a:p>
-            <a:pPr algn="ctr"/>
-          </a:p>
-        </p:txBody>
-      </p:sp>
-      <p:pic>
-        <p:nvPicPr>
-          <p:cNvPr id="13" name="Picture 12" descr="fig_delta_nmi_full.png"/>
-          <p:cNvPicPr>
-            <a:picLocks noChangeAspect="1"/>
-          </p:cNvPicPr>
-          <p:nvPr/>
-        </p:nvPicPr>
-        <p:blipFill>
-          <a:blip r:embed="rId2"/>
-          <a:stretch>
-            <a:fillRect/>
-          </a:stretch>
-        </p:blipFill>
-        <p:spPr>
-          <a:xfrm>
-            <a:off x="530352" y="2207380"/>
-            <a:ext cx="6958584" cy="3138184"/>
-          </a:xfrm>
-          <a:prstGeom prst="rect">
-            <a:avLst/>
-          </a:prstGeom>
-        </p:spPr>
-      </p:pic>
-      <p:sp>
-        <p:nvSpPr>
-          <p:cNvPr id="14" name="Rounded Rectangle 13"/>
-          <p:cNvSpPr/>
-          <p:nvPr/>
-        </p:nvSpPr>
-        <p:spPr>
-          <a:xfrm>
-            <a:off x="7836408" y="1170432"/>
-            <a:ext cx="4050791" cy="5212080"/>
+          <a:effectLst>
+            <a:outerShdw blurRad="256032" dist="73152" dir="7200000" algn="ctr" rotWithShape="0">
+              <a:srgbClr val="1A334A">
+                <a:alpha val="18000"/>
+              </a:srgbClr>
+            </a:outerShdw>
+          </a:effectLst>
+        </p:spPr>
+        <p:style>
+          <a:lnRef idx="1">
+            <a:schemeClr val="accent1"/>
+          </a:lnRef>
+          <a:fillRef idx="3">
+            <a:schemeClr val="accent1"/>
+          </a:fillRef>
+          <a:effectRef idx="2">
+            <a:schemeClr val="accent1"/>
+          </a:effectRef>
+          <a:fontRef idx="minor">
+            <a:schemeClr val="lt1"/>
+          </a:fontRef>
+        </p:style>
+        <p:txBody>
+          <a:bodyPr rtlCol="0" anchor="ctr"/>
+          <a:lstStyle/>
+          <a:p>
+            <a:pPr algn="ctr"/>
+          </a:p>
+        </p:txBody>
+      </p:sp>
+      <p:sp>
+        <p:nvSpPr>
+          <p:cNvPr id="18" name="Rectangle 17"/>
+          <p:cNvSpPr/>
+          <p:nvPr/>
+        </p:nvSpPr>
+        <p:spPr>
+          <a:xfrm>
+            <a:off x="4273296" y="2148840"/>
+            <a:ext cx="3614928" cy="109728"/>
+          </a:xfrm>
+          <a:prstGeom prst="rect">
+            <a:avLst/>
+          </a:prstGeom>
+          <a:solidFill>
+            <a:srgbClr val="1A334A"/>
+          </a:solidFill>
+          <a:ln>
+            <a:noFill/>
+          </a:ln>
+        </p:spPr>
+        <p:style>
+          <a:lnRef idx="1">
+            <a:schemeClr val="accent1"/>
+          </a:lnRef>
+          <a:fillRef idx="3">
+            <a:schemeClr val="accent1"/>
+          </a:fillRef>
+          <a:effectRef idx="2">
+            <a:schemeClr val="accent1"/>
+          </a:effectRef>
+          <a:fontRef idx="minor">
+            <a:schemeClr val="lt1"/>
+          </a:fontRef>
+        </p:style>
+        <p:txBody>
+          <a:bodyPr rtlCol="0" anchor="ctr"/>
+          <a:lstStyle/>
+          <a:p>
+            <a:pPr algn="ctr"/>
+          </a:p>
+        </p:txBody>
+      </p:sp>
+      <p:sp>
+        <p:nvSpPr>
+          <p:cNvPr id="19" name="TextBox 18"/>
+          <p:cNvSpPr txBox="1"/>
+          <p:nvPr/>
+        </p:nvSpPr>
+        <p:spPr>
+          <a:xfrm>
+            <a:off x="4501896" y="2468880"/>
+            <a:ext cx="3157728" cy="365760"/>
+          </a:xfrm>
+          <a:prstGeom prst="rect">
+            <a:avLst/>
+          </a:prstGeom>
+          <a:noFill/>
+        </p:spPr>
+        <p:txBody>
+          <a:bodyPr wrap="square">
+            <a:spAutoFit/>
+          </a:bodyPr>
+          <a:lstStyle/>
+          <a:p>
+            <a:pPr algn="r" rtl="1">
+              <a:spcAft>
+                <a:spcPts val="0"/>
+              </a:spcAft>
+            </a:pPr>
+            <a:r>
+              <a:rPr sz="1400" b="0" rtl="1" lang="fa-IR">
+                <a:solidFill>
+                  <a:srgbClr val="A33B24"/>
+                </a:solidFill>
+                <a:latin typeface="Calibri"/>
+                <a:ea typeface="B Nazanin"/>
+                <a:cs typeface="B Nazanin"/>
+              </a:rPr>
+              <a:t>نمونه‌گیری</a:t>
+            </a:r>
+          </a:p>
+        </p:txBody>
+      </p:sp>
+      <p:sp>
+        <p:nvSpPr>
+          <p:cNvPr id="20" name="TextBox 19"/>
+          <p:cNvSpPr txBox="1"/>
+          <p:nvPr/>
+        </p:nvSpPr>
+        <p:spPr>
+          <a:xfrm>
+            <a:off x="4501896" y="2971800"/>
+            <a:ext cx="3157728" cy="1188720"/>
+          </a:xfrm>
+          <a:prstGeom prst="rect">
+            <a:avLst/>
+          </a:prstGeom>
+          <a:noFill/>
+        </p:spPr>
+        <p:txBody>
+          <a:bodyPr wrap="square">
+            <a:spAutoFit/>
+          </a:bodyPr>
+          <a:lstStyle/>
+          <a:p>
+            <a:pPr algn="r" rtl="1">
+              <a:spcAft>
+                <a:spcPts val="0"/>
+              </a:spcAft>
+            </a:pPr>
+            <a:r>
+              <a:rPr sz="2600" b="1" rtl="1" lang="fa-IR">
+                <a:solidFill>
+                  <a:srgbClr val="1A334A"/>
+                </a:solidFill>
+                <a:latin typeface="Calibri"/>
+                <a:ea typeface="B Nazanin"/>
+                <a:cs typeface="B Nazanin"/>
+              </a:rPr>
+              <a:t>ده مجموعه، حدود ۴۰۰ سطر</a:t>
+            </a:r>
+          </a:p>
+        </p:txBody>
+      </p:sp>
+      <p:sp>
+        <p:nvSpPr>
+          <p:cNvPr id="21" name="TextBox 20"/>
+          <p:cNvSpPr txBox="1"/>
+          <p:nvPr/>
+        </p:nvSpPr>
+        <p:spPr>
+          <a:xfrm>
+            <a:off x="4501896" y="4251960"/>
+            <a:ext cx="3157728" cy="1828800"/>
+          </a:xfrm>
+          <a:prstGeom prst="rect">
+            <a:avLst/>
+          </a:prstGeom>
+          <a:noFill/>
+        </p:spPr>
+        <p:txBody>
+          <a:bodyPr wrap="square">
+            <a:spAutoFit/>
+          </a:bodyPr>
+          <a:lstStyle/>
+          <a:p>
+            <a:pPr algn="r" rtl="1">
+              <a:spcAft>
+                <a:spcPts val="0"/>
+              </a:spcAft>
+            </a:pPr>
+            <a:r>
+              <a:rPr sz="1500" b="0" rtl="1" lang="fa-IR">
+                <a:solidFill>
+                  <a:srgbClr val="1B1816"/>
+                </a:solidFill>
+                <a:latin typeface="Calibri"/>
+                <a:ea typeface="B Nazanin"/>
+                <a:cs typeface="B Nazanin"/>
+              </a:rPr>
+              <a:t>حفظ نسبت کلاس‌ها. USPS، Landsat، Rice، Raisin، Spambase، Banknote، Leaves، Segment، Dutchnumeral، </a:t>
+            </a:r>
+            <a:r>
+              <a:rPr sz="1500" b="0" rtl="0" lang="en-US">
+                <a:solidFill>
+                  <a:srgbClr val="1B1816"/>
+                </a:solidFill>
+                <a:latin typeface="Calibri"/>
+                <a:ea typeface="Calibri"/>
+                <a:cs typeface="Calibri"/>
+              </a:rPr>
+              <a:t>SCC.</a:t>
+            </a:r>
+          </a:p>
+        </p:txBody>
+      </p:sp>
+      <p:sp>
+        <p:nvSpPr>
+          <p:cNvPr id="22" name="Rounded Rectangle 21"/>
+          <p:cNvSpPr/>
+          <p:nvPr/>
+        </p:nvSpPr>
+        <p:spPr>
+          <a:xfrm>
+            <a:off x="457200" y="2148840"/>
+            <a:ext cx="3614928" cy="3977639"/>
           </a:xfrm>
           <a:prstGeom prst="roundRect">
             <a:avLst>
@@ -15061,9 +15260,9 @@
             <a:noFill/>
           </a:ln>
           <a:effectLst>
-            <a:outerShdw blurRad="201168" dist="54864" dir="7200000" algn="ctr" rotWithShape="0">
+            <a:outerShdw blurRad="256032" dist="73152" dir="7200000" algn="ctr" rotWithShape="0">
               <a:srgbClr val="1A334A">
-                <a:alpha val="16000"/>
+                <a:alpha val="18000"/>
               </a:srgbClr>
             </a:outerShdw>
           </a:effectLst>
@@ -15092,57 +15291,57 @@
       </p:sp>
       <p:sp>
         <p:nvSpPr>
-          <p:cNvPr id="15" name="Rectangle 14"/>
-          <p:cNvSpPr/>
-          <p:nvPr/>
-        </p:nvSpPr>
-        <p:spPr>
-          <a:xfrm>
-            <a:off x="11649456" y="1170432"/>
-            <a:ext cx="91440" cy="5212080"/>
-          </a:xfrm>
-          <a:prstGeom prst="rect">
-            <a:avLst/>
-          </a:prstGeom>
-          <a:solidFill>
-            <a:srgbClr val="A33B24"/>
-          </a:solidFill>
-          <a:ln>
-            <a:noFill/>
-          </a:ln>
-        </p:spPr>
-        <p:style>
-          <a:lnRef idx="1">
-            <a:schemeClr val="accent1"/>
-          </a:lnRef>
-          <a:fillRef idx="3">
-            <a:schemeClr val="accent1"/>
-          </a:fillRef>
-          <a:effectRef idx="2">
-            <a:schemeClr val="accent1"/>
-          </a:effectRef>
-          <a:fontRef idx="minor">
-            <a:schemeClr val="lt1"/>
-          </a:fontRef>
-        </p:style>
-        <p:txBody>
-          <a:bodyPr rtlCol="0" anchor="ctr"/>
-          <a:lstStyle/>
-          <a:p>
-            <a:pPr algn="ctr"/>
-          </a:p>
-        </p:txBody>
-      </p:sp>
-      <p:sp>
-        <p:nvSpPr>
-          <p:cNvPr id="16" name="TextBox 15"/>
+          <p:cNvPr id="23" name="Rectangle 22"/>
+          <p:cNvSpPr/>
+          <p:nvPr/>
+        </p:nvSpPr>
+        <p:spPr>
+          <a:xfrm>
+            <a:off x="457200" y="2148840"/>
+            <a:ext cx="3614928" cy="109728"/>
+          </a:xfrm>
+          <a:prstGeom prst="rect">
+            <a:avLst/>
+          </a:prstGeom>
+          <a:solidFill>
+            <a:srgbClr val="1A334A"/>
+          </a:solidFill>
+          <a:ln>
+            <a:noFill/>
+          </a:ln>
+        </p:spPr>
+        <p:style>
+          <a:lnRef idx="1">
+            <a:schemeClr val="accent1"/>
+          </a:lnRef>
+          <a:fillRef idx="3">
+            <a:schemeClr val="accent1"/>
+          </a:fillRef>
+          <a:effectRef idx="2">
+            <a:schemeClr val="accent1"/>
+          </a:effectRef>
+          <a:fontRef idx="minor">
+            <a:schemeClr val="lt1"/>
+          </a:fontRef>
+        </p:style>
+        <p:txBody>
+          <a:bodyPr rtlCol="0" anchor="ctr"/>
+          <a:lstStyle/>
+          <a:p>
+            <a:pPr algn="ctr"/>
+          </a:p>
+        </p:txBody>
+      </p:sp>
+      <p:sp>
+        <p:nvSpPr>
+          <p:cNvPr id="24" name="TextBox 23"/>
           <p:cNvSpPr txBox="1"/>
           <p:nvPr/>
         </p:nvSpPr>
         <p:spPr>
           <a:xfrm>
-            <a:off x="8001000" y="1353312"/>
-            <a:ext cx="3666744" cy="4846320"/>
+            <a:off x="685800" y="2468880"/>
+            <a:ext cx="3157728" cy="365760"/>
           </a:xfrm>
           <a:prstGeom prst="rect">
             <a:avLst/>
@@ -15150,31 +15349,111 @@
           <a:noFill/>
         </p:spPr>
         <p:txBody>
-          <a:bodyPr wrap="square" anchor="ctr">
+          <a:bodyPr wrap="square">
             <a:spAutoFit/>
           </a:bodyPr>
           <a:lstStyle/>
           <a:p>
             <a:pPr algn="r" rtl="1">
               <a:spcAft>
-                <a:spcPts val="1200"/>
+                <a:spcPts val="0"/>
               </a:spcAft>
-              <a:buFont typeface="Calibri"/>
-              <a:buChar char="•"/>
             </a:pPr>
             <a:r>
-              <a:rPr sz="1800" b="0" rtl="1" lang="fa-IR">
-                <a:solidFill>
-                  <a:srgbClr val="1B1816"/>
+              <a:rPr sz="1400" b="0" rtl="1" lang="fa-IR">
+                <a:solidFill>
+                  <a:srgbClr val="A33B24"/>
                 </a:solidFill>
                 <a:latin typeface="Calibri"/>
                 <a:ea typeface="B Nazanin"/>
                 <a:cs typeface="B Nazanin"/>
               </a:rPr>
-              <a:t>هر میله اختلاف </a:t>
-            </a:r>
-            <a:r>
-              <a:rPr sz="1800" b="0" rtl="0" lang="en-US">
+              <a:t>سنجش</a:t>
+            </a:r>
+          </a:p>
+        </p:txBody>
+      </p:sp>
+      <p:sp>
+        <p:nvSpPr>
+          <p:cNvPr id="25" name="TextBox 24"/>
+          <p:cNvSpPr txBox="1"/>
+          <p:nvPr/>
+        </p:nvSpPr>
+        <p:spPr>
+          <a:xfrm>
+            <a:off x="685800" y="2971800"/>
+            <a:ext cx="3157728" cy="1188720"/>
+          </a:xfrm>
+          <a:prstGeom prst="rect">
+            <a:avLst/>
+          </a:prstGeom>
+          <a:noFill/>
+        </p:spPr>
+        <p:txBody>
+          <a:bodyPr wrap="square">
+            <a:spAutoFit/>
+          </a:bodyPr>
+          <a:lstStyle/>
+          <a:p>
+            <a:pPr algn="r" rtl="1">
+              <a:spcAft>
+                <a:spcPts val="0"/>
+              </a:spcAft>
+            </a:pPr>
+            <a:r>
+              <a:rPr sz="2600" b="1" rtl="1" lang="fa-IR">
+                <a:solidFill>
+                  <a:srgbClr val="1A334A"/>
+                </a:solidFill>
+                <a:latin typeface="Calibri"/>
+                <a:ea typeface="B Nazanin"/>
+                <a:cs typeface="B Nazanin"/>
+              </a:rPr>
+              <a:t>همان الگوریتم، دو راه</a:t>
+            </a:r>
+          </a:p>
+        </p:txBody>
+      </p:sp>
+      <p:sp>
+        <p:nvSpPr>
+          <p:cNvPr id="26" name="TextBox 25"/>
+          <p:cNvSpPr txBox="1"/>
+          <p:nvPr/>
+        </p:nvSpPr>
+        <p:spPr>
+          <a:xfrm>
+            <a:off x="685800" y="4251960"/>
+            <a:ext cx="3157728" cy="1828800"/>
+          </a:xfrm>
+          <a:prstGeom prst="rect">
+            <a:avLst/>
+          </a:prstGeom>
+          <a:noFill/>
+        </p:spPr>
+        <p:txBody>
+          <a:bodyPr wrap="square">
+            <a:spAutoFit/>
+          </a:bodyPr>
+          <a:lstStyle/>
+          <a:p>
+            <a:pPr algn="r" rtl="1">
+              <a:spcAft>
+                <a:spcPts val="0"/>
+              </a:spcAft>
+            </a:pPr>
+            <a:r>
+              <a:rPr sz="1500" b="0" rtl="1" lang="fa-IR">
+                <a:solidFill>
+                  <a:srgbClr val="1B1816"/>
+                </a:solidFill>
+                <a:latin typeface="Calibri"/>
+                <a:ea typeface="B Nazanin"/>
+                <a:cs typeface="B Nazanin"/>
+              </a:rPr>
+              <a:t>گراف اصلی و گراف کوچک. بهترین تنظیم هر خانه. دو خانه خالی </a:t>
+            </a:r>
+            <a:r>
+              <a:rPr sz="1500" b="0" rtl="0" lang="en-US">
                 <a:solidFill>
                   <a:srgbClr val="1B1816"/>
                 </a:solidFill>
@@ -15182,10 +15461,10 @@
                 <a:ea typeface="Calibri"/>
                 <a:cs typeface="Calibri"/>
               </a:rPr>
-              <a:t>NMI</a:t>
-            </a:r>
-            <a:r>
-              <a:rPr sz="1800" b="0" rtl="1" lang="fa-IR">
+              <a:t>Leaves.</a:t>
+            </a:r>
+            <a:r>
+              <a:rPr sz="1500" b="0" rtl="1" lang="fa-IR">
                 <a:solidFill>
                   <a:srgbClr val="1B1816"/>
                 </a:solidFill>
@@ -15193,78 +15472,7 @@
                 <a:ea typeface="B Nazanin"/>
                 <a:cs typeface="B Nazanin"/>
               </a:rPr>
-              <a:t> راه لم با راه پایه است.</a:t>
-            </a:r>
-          </a:p>
-          <a:p>
-            <a:pPr algn="r" rtl="1">
-              <a:spcAft>
-                <a:spcPts val="1200"/>
-              </a:spcAft>
-              <a:buFont typeface="Calibri"/>
-              <a:buChar char="•"/>
-            </a:pPr>
-            <a:r>
-              <a:rPr sz="1800" b="0" rtl="1" lang="fa-IR">
-                <a:solidFill>
-                  <a:srgbClr val="1B1816"/>
-                </a:solidFill>
-                <a:latin typeface="Calibri"/>
-                <a:ea typeface="B Nazanin"/>
-                <a:cs typeface="B Nazanin"/>
-              </a:rPr>
-              <a:t>بالای صفر: لم بهتر بوده است.</a:t>
-            </a:r>
-          </a:p>
-          <a:p>
-            <a:pPr algn="r" rtl="1">
-              <a:spcAft>
-                <a:spcPts val="1200"/>
-              </a:spcAft>
-              <a:buFont typeface="Calibri"/>
-              <a:buChar char="•"/>
-            </a:pPr>
-            <a:r>
-              <a:rPr sz="1800" b="0" rtl="1" lang="fa-IR">
-                <a:solidFill>
-                  <a:srgbClr val="1B1816"/>
-                </a:solidFill>
-                <a:latin typeface="Calibri"/>
-                <a:ea typeface="B Nazanin"/>
-                <a:cs typeface="B Nazanin"/>
-              </a:rPr>
-              <a:t>پایین صفر: راه پایه بهتر بوده است.</a:t>
-            </a:r>
-          </a:p>
-          <a:p>
-            <a:pPr algn="r" rtl="1">
-              <a:spcAft>
-                <a:spcPts val="1200"/>
-              </a:spcAft>
-              <a:buFont typeface="Calibri"/>
-              <a:buChar char="•"/>
-            </a:pPr>
-            <a:r>
-              <a:rPr sz="1800" b="0" rtl="0" lang="en-US">
-                <a:solidFill>
-                  <a:srgbClr val="1B1816"/>
-                </a:solidFill>
-                <a:latin typeface="Calibri"/>
-                <a:ea typeface="Calibri"/>
-                <a:cs typeface="Calibri"/>
-              </a:rPr>
-              <a:t>NMI</a:t>
-            </a:r>
-            <a:r>
-              <a:rPr sz="1800" b="0" rtl="1" lang="fa-IR">
-                <a:solidFill>
-                  <a:srgbClr val="1B1816"/>
-                </a:solidFill>
-                <a:latin typeface="Calibri"/>
-                <a:ea typeface="B Nazanin"/>
-                <a:cs typeface="B Nazanin"/>
-              </a:rPr>
-              <a:t> نزدیکی خوشه پیش‌بینی‌شده به برچسب واقعی را می‌سنجد.</a:t>
+              <a:t> ۷۸ مقایسه.</a:t>
             </a:r>
           </a:p>
         </p:txBody>
@@ -15559,7 +15767,7 @@
                 <a:ea typeface="B Nazanin"/>
                 <a:cs typeface="B Nazanin"/>
               </a:rPr>
-              <a:t>سه مجموعه با بیشترین بهبود</a:t>
+              <a:t>نمودار اختلاف: بالای صفر یعنی لم بهتر است</a:t>
             </a:r>
           </a:p>
         </p:txBody>
@@ -15699,8 +15907,8 @@
         </p:nvSpPr>
         <p:spPr>
           <a:xfrm>
-            <a:off x="8089392" y="1554480"/>
-            <a:ext cx="3614928" cy="4114800"/>
+            <a:off x="329184" y="1170432"/>
+            <a:ext cx="7360920" cy="5212080"/>
           </a:xfrm>
           <a:prstGeom prst="roundRect">
             <a:avLst>
@@ -15708,15 +15916,15 @@
             </a:avLst>
           </a:prstGeom>
           <a:solidFill>
-            <a:srgbClr val="FFFCF8"/>
+            <a:srgbClr val="DED5C4"/>
           </a:solidFill>
           <a:ln>
             <a:noFill/>
           </a:ln>
           <a:effectLst>
-            <a:outerShdw blurRad="256032" dist="73152" dir="7200000" algn="ctr" rotWithShape="0">
+            <a:outerShdw blurRad="201168" dist="54864" dir="7200000" algn="ctr" rotWithShape="0">
               <a:srgbClr val="1A334A">
-                <a:alpha val="18000"/>
+                <a:alpha val="16000"/>
               </a:srgbClr>
             </a:outerShdw>
           </a:effectLst>
@@ -15745,14 +15953,135 @@
       </p:sp>
       <p:sp>
         <p:nvSpPr>
-          <p:cNvPr id="12" name="Rectangle 11"/>
-          <p:cNvSpPr/>
-          <p:nvPr/>
-        </p:nvSpPr>
-        <p:spPr>
-          <a:xfrm>
-            <a:off x="8089392" y="1554480"/>
-            <a:ext cx="3614928" cy="109728"/>
+          <p:cNvPr id="12" name="Rounded Rectangle 11"/>
+          <p:cNvSpPr/>
+          <p:nvPr/>
+        </p:nvSpPr>
+        <p:spPr>
+          <a:xfrm>
+            <a:off x="420624" y="1261872"/>
+            <a:ext cx="7178040" cy="5029200"/>
+          </a:xfrm>
+          <a:prstGeom prst="roundRect">
+            <a:avLst>
+              <a:gd name="adj" fmla="val 10000"/>
+            </a:avLst>
+          </a:prstGeom>
+          <a:solidFill>
+            <a:srgbClr val="FFFCF8"/>
+          </a:solidFill>
+          <a:ln>
+            <a:noFill/>
+          </a:ln>
+        </p:spPr>
+        <p:style>
+          <a:lnRef idx="1">
+            <a:schemeClr val="accent1"/>
+          </a:lnRef>
+          <a:fillRef idx="3">
+            <a:schemeClr val="accent1"/>
+          </a:fillRef>
+          <a:effectRef idx="2">
+            <a:schemeClr val="accent1"/>
+          </a:effectRef>
+          <a:fontRef idx="minor">
+            <a:schemeClr val="lt1"/>
+          </a:fontRef>
+        </p:style>
+        <p:txBody>
+          <a:bodyPr rtlCol="0" anchor="ctr"/>
+          <a:lstStyle/>
+          <a:p>
+            <a:pPr algn="ctr"/>
+          </a:p>
+        </p:txBody>
+      </p:sp>
+      <p:pic>
+        <p:nvPicPr>
+          <p:cNvPr id="13" name="Picture 12" descr="fig_delta_nmi_full.png"/>
+          <p:cNvPicPr>
+            <a:picLocks noChangeAspect="1"/>
+          </p:cNvPicPr>
+          <p:nvPr/>
+        </p:nvPicPr>
+        <p:blipFill>
+          <a:blip r:embed="rId2"/>
+          <a:stretch>
+            <a:fillRect/>
+          </a:stretch>
+        </p:blipFill>
+        <p:spPr>
+          <a:xfrm>
+            <a:off x="530352" y="2207380"/>
+            <a:ext cx="6958584" cy="3138184"/>
+          </a:xfrm>
+          <a:prstGeom prst="rect">
+            <a:avLst/>
+          </a:prstGeom>
+        </p:spPr>
+      </p:pic>
+      <p:sp>
+        <p:nvSpPr>
+          <p:cNvPr id="14" name="Rounded Rectangle 13"/>
+          <p:cNvSpPr/>
+          <p:nvPr/>
+        </p:nvSpPr>
+        <p:spPr>
+          <a:xfrm>
+            <a:off x="7836408" y="1170432"/>
+            <a:ext cx="4050791" cy="5212080"/>
+          </a:xfrm>
+          <a:prstGeom prst="roundRect">
+            <a:avLst>
+              <a:gd name="adj" fmla="val 10000"/>
+            </a:avLst>
+          </a:prstGeom>
+          <a:solidFill>
+            <a:srgbClr val="FFFCF8"/>
+          </a:solidFill>
+          <a:ln>
+            <a:noFill/>
+          </a:ln>
+          <a:effectLst>
+            <a:outerShdw blurRad="201168" dist="54864" dir="7200000" algn="ctr" rotWithShape="0">
+              <a:srgbClr val="1A334A">
+                <a:alpha val="16000"/>
+              </a:srgbClr>
+            </a:outerShdw>
+          </a:effectLst>
+        </p:spPr>
+        <p:style>
+          <a:lnRef idx="1">
+            <a:schemeClr val="accent1"/>
+          </a:lnRef>
+          <a:fillRef idx="3">
+            <a:schemeClr val="accent1"/>
+          </a:fillRef>
+          <a:effectRef idx="2">
+            <a:schemeClr val="accent1"/>
+          </a:effectRef>
+          <a:fontRef idx="minor">
+            <a:schemeClr val="lt1"/>
+          </a:fontRef>
+        </p:style>
+        <p:txBody>
+          <a:bodyPr rtlCol="0" anchor="ctr"/>
+          <a:lstStyle/>
+          <a:p>
+            <a:pPr algn="ctr"/>
+          </a:p>
+        </p:txBody>
+      </p:sp>
+      <p:sp>
+        <p:nvSpPr>
+          <p:cNvPr id="15" name="Rectangle 14"/>
+          <p:cNvSpPr/>
+          <p:nvPr/>
+        </p:nvSpPr>
+        <p:spPr>
+          <a:xfrm>
+            <a:off x="11649456" y="1170432"/>
+            <a:ext cx="91440" cy="5212080"/>
           </a:xfrm>
           <a:prstGeom prst="rect">
             <a:avLst/>
@@ -15788,14 +16117,14 @@
       </p:sp>
       <p:sp>
         <p:nvSpPr>
-          <p:cNvPr id="13" name="TextBox 12"/>
+          <p:cNvPr id="16" name="TextBox 15"/>
           <p:cNvSpPr txBox="1"/>
           <p:nvPr/>
         </p:nvSpPr>
         <p:spPr>
           <a:xfrm>
-            <a:off x="8317992" y="1874519"/>
-            <a:ext cx="3157728" cy="365760"/>
+            <a:off x="8001000" y="1353312"/>
+            <a:ext cx="3666744" cy="4846320"/>
           </a:xfrm>
           <a:prstGeom prst="rect">
             <a:avLst/>
@@ -15803,97 +16132,59 @@
           <a:noFill/>
         </p:spPr>
         <p:txBody>
-          <a:bodyPr wrap="square">
+          <a:bodyPr wrap="square" anchor="ctr">
             <a:spAutoFit/>
           </a:bodyPr>
           <a:lstStyle/>
           <a:p>
             <a:pPr algn="r" rtl="1">
               <a:spcAft>
-                <a:spcPts val="0"/>
+                <a:spcPts val="1200"/>
               </a:spcAft>
+              <a:buFont typeface="Calibri"/>
+              <a:buChar char="•"/>
             </a:pPr>
             <a:r>
-              <a:rPr sz="1400" b="0" rtl="1" lang="fa-IR">
-                <a:solidFill>
-                  <a:srgbClr val="A33B24"/>
+              <a:rPr sz="1800" b="0" rtl="1" lang="fa-IR">
+                <a:solidFill>
+                  <a:srgbClr val="1B1816"/>
                 </a:solidFill>
                 <a:latin typeface="Calibri"/>
                 <a:ea typeface="B Nazanin"/>
                 <a:cs typeface="B Nazanin"/>
               </a:rPr>
-              <a:t>شراب</a:t>
-            </a:r>
-          </a:p>
-        </p:txBody>
-      </p:sp>
-      <p:sp>
-        <p:nvSpPr>
-          <p:cNvPr id="14" name="TextBox 13"/>
-          <p:cNvSpPr txBox="1"/>
-          <p:nvPr/>
-        </p:nvSpPr>
-        <p:spPr>
-          <a:xfrm>
-            <a:off x="8317992" y="2377440"/>
-            <a:ext cx="3157728" cy="1188720"/>
-          </a:xfrm>
-          <a:prstGeom prst="rect">
-            <a:avLst/>
-          </a:prstGeom>
-          <a:noFill/>
-        </p:spPr>
-        <p:txBody>
-          <a:bodyPr wrap="square">
-            <a:spAutoFit/>
-          </a:bodyPr>
-          <a:lstStyle/>
-          <a:p>
-            <a:pPr algn="r" rtl="1">
-              <a:spcAft>
-                <a:spcPts val="0"/>
-              </a:spcAft>
-            </a:pPr>
-            <a:r>
-              <a:rPr sz="2600" b="1" rtl="1" lang="fa-IR">
-                <a:solidFill>
-                  <a:srgbClr val="1A334A"/>
+              <a:t>هر میله اختلاف </a:t>
+            </a:r>
+            <a:r>
+              <a:rPr sz="1800" b="0" rtl="0" lang="en-US">
+                <a:solidFill>
+                  <a:srgbClr val="1B1816"/>
+                </a:solidFill>
+                <a:latin typeface="Calibri"/>
+                <a:ea typeface="Calibri"/>
+                <a:cs typeface="Calibri"/>
+              </a:rPr>
+              <a:t>NMI</a:t>
+            </a:r>
+            <a:r>
+              <a:rPr sz="1800" b="0" rtl="1" lang="fa-IR">
+                <a:solidFill>
+                  <a:srgbClr val="1B1816"/>
                 </a:solidFill>
                 <a:latin typeface="Calibri"/>
                 <a:ea typeface="B Nazanin"/>
                 <a:cs typeface="B Nazanin"/>
               </a:rPr>
-              <a:t>پایه ضعیف، لم قوی</a:t>
-            </a:r>
-          </a:p>
-        </p:txBody>
-      </p:sp>
-      <p:sp>
-        <p:nvSpPr>
-          <p:cNvPr id="15" name="TextBox 14"/>
-          <p:cNvSpPr txBox="1"/>
-          <p:nvPr/>
-        </p:nvSpPr>
-        <p:spPr>
-          <a:xfrm>
-            <a:off x="8317992" y="3657600"/>
-            <a:ext cx="3157728" cy="1828800"/>
-          </a:xfrm>
-          <a:prstGeom prst="rect">
-            <a:avLst/>
-          </a:prstGeom>
-          <a:noFill/>
-        </p:spPr>
-        <p:txBody>
-          <a:bodyPr wrap="square">
-            <a:spAutoFit/>
-          </a:bodyPr>
-          <a:lstStyle/>
+              <a:t> راه لم با راه پایه است.</a:t>
+            </a:r>
+          </a:p>
           <a:p>
             <a:pPr algn="r" rtl="1">
               <a:spcAft>
-                <a:spcPts val="0"/>
+                <a:spcPts val="1200"/>
               </a:spcAft>
+              <a:buFont typeface="Calibri"/>
+              <a:buChar char="•"/>
             </a:pPr>
             <a:r>
               <a:rPr sz="1800" b="0" rtl="1" lang="fa-IR">
@@ -15904,443 +16195,58 @@
                 <a:ea typeface="B Nazanin"/>
                 <a:cs typeface="B Nazanin"/>
               </a:rPr>
-              <a:t>سه الگوریتم از حدود نیم به نزدیک ۰/۸۹ رسیدند.</a:t>
-            </a:r>
-          </a:p>
-        </p:txBody>
-      </p:sp>
-      <p:sp>
-        <p:nvSpPr>
-          <p:cNvPr id="16" name="Rounded Rectangle 15"/>
-          <p:cNvSpPr/>
-          <p:nvPr/>
-        </p:nvSpPr>
-        <p:spPr>
-          <a:xfrm>
-            <a:off x="4273296" y="1554480"/>
-            <a:ext cx="3614928" cy="4114800"/>
-          </a:xfrm>
-          <a:prstGeom prst="roundRect">
-            <a:avLst>
-              <a:gd name="adj" fmla="val 10000"/>
-            </a:avLst>
-          </a:prstGeom>
-          <a:solidFill>
-            <a:srgbClr val="FFFCF8"/>
-          </a:solidFill>
-          <a:ln>
-            <a:noFill/>
-          </a:ln>
-          <a:effectLst>
-            <a:outerShdw blurRad="256032" dist="73152" dir="7200000" algn="ctr" rotWithShape="0">
-              <a:srgbClr val="1A334A">
-                <a:alpha val="18000"/>
-              </a:srgbClr>
-            </a:outerShdw>
-          </a:effectLst>
-        </p:spPr>
-        <p:style>
-          <a:lnRef idx="1">
-            <a:schemeClr val="accent1"/>
-          </a:lnRef>
-          <a:fillRef idx="3">
-            <a:schemeClr val="accent1"/>
-          </a:fillRef>
-          <a:effectRef idx="2">
-            <a:schemeClr val="accent1"/>
-          </a:effectRef>
-          <a:fontRef idx="minor">
-            <a:schemeClr val="lt1"/>
-          </a:fontRef>
-        </p:style>
-        <p:txBody>
-          <a:bodyPr rtlCol="0" anchor="ctr"/>
-          <a:lstStyle/>
-          <a:p>
-            <a:pPr algn="ctr"/>
-          </a:p>
-        </p:txBody>
-      </p:sp>
-      <p:sp>
-        <p:nvSpPr>
-          <p:cNvPr id="17" name="Rectangle 16"/>
-          <p:cNvSpPr/>
-          <p:nvPr/>
-        </p:nvSpPr>
-        <p:spPr>
-          <a:xfrm>
-            <a:off x="4273296" y="1554480"/>
-            <a:ext cx="3614928" cy="109728"/>
-          </a:xfrm>
-          <a:prstGeom prst="rect">
-            <a:avLst/>
-          </a:prstGeom>
-          <a:solidFill>
-            <a:srgbClr val="1A334A"/>
-          </a:solidFill>
-          <a:ln>
-            <a:noFill/>
-          </a:ln>
-        </p:spPr>
-        <p:style>
-          <a:lnRef idx="1">
-            <a:schemeClr val="accent1"/>
-          </a:lnRef>
-          <a:fillRef idx="3">
-            <a:schemeClr val="accent1"/>
-          </a:fillRef>
-          <a:effectRef idx="2">
-            <a:schemeClr val="accent1"/>
-          </a:effectRef>
-          <a:fontRef idx="minor">
-            <a:schemeClr val="lt1"/>
-          </a:fontRef>
-        </p:style>
-        <p:txBody>
-          <a:bodyPr rtlCol="0" anchor="ctr"/>
-          <a:lstStyle/>
-          <a:p>
-            <a:pPr algn="ctr"/>
-          </a:p>
-        </p:txBody>
-      </p:sp>
-      <p:sp>
-        <p:nvSpPr>
-          <p:cNvPr id="18" name="TextBox 17"/>
-          <p:cNvSpPr txBox="1"/>
-          <p:nvPr/>
-        </p:nvSpPr>
-        <p:spPr>
-          <a:xfrm>
-            <a:off x="4501896" y="1874519"/>
-            <a:ext cx="3157728" cy="365760"/>
-          </a:xfrm>
-          <a:prstGeom prst="rect">
-            <a:avLst/>
-          </a:prstGeom>
-          <a:noFill/>
-        </p:spPr>
-        <p:txBody>
-          <a:bodyPr wrap="square">
-            <a:spAutoFit/>
-          </a:bodyPr>
-          <a:lstStyle/>
+              <a:t>بالای صفر: لم بهتر بوده است.</a:t>
+            </a:r>
+          </a:p>
           <a:p>
             <a:pPr algn="r" rtl="1">
               <a:spcAft>
-                <a:spcPts val="0"/>
+                <a:spcPts val="1200"/>
               </a:spcAft>
+              <a:buFont typeface="Calibri"/>
+              <a:buChar char="•"/>
             </a:pPr>
             <a:r>
-              <a:rPr sz="1400" b="0" rtl="1" lang="fa-IR">
-                <a:solidFill>
-                  <a:srgbClr val="A33B24"/>
+              <a:rPr sz="1800" b="0" rtl="1" lang="fa-IR">
+                <a:solidFill>
+                  <a:srgbClr val="1B1816"/>
                 </a:solidFill>
                 <a:latin typeface="Calibri"/>
                 <a:ea typeface="B Nazanin"/>
                 <a:cs typeface="B Nazanin"/>
               </a:rPr>
-              <a:t>آپاندیسیت</a:t>
-            </a:r>
-          </a:p>
-        </p:txBody>
-      </p:sp>
-      <p:sp>
-        <p:nvSpPr>
-          <p:cNvPr id="19" name="TextBox 18"/>
-          <p:cNvSpPr txBox="1"/>
-          <p:nvPr/>
-        </p:nvSpPr>
-        <p:spPr>
-          <a:xfrm>
-            <a:off x="4501896" y="2377440"/>
-            <a:ext cx="3157728" cy="1188720"/>
-          </a:xfrm>
-          <a:prstGeom prst="rect">
-            <a:avLst/>
-          </a:prstGeom>
-          <a:noFill/>
-        </p:spPr>
-        <p:txBody>
-          <a:bodyPr wrap="square">
-            <a:spAutoFit/>
-          </a:bodyPr>
-          <a:lstStyle/>
+              <a:t>پایین صفر: راه پایه بهتر بوده است.</a:t>
+            </a:r>
+          </a:p>
           <a:p>
             <a:pPr algn="r" rtl="1">
               <a:spcAft>
-                <a:spcPts val="0"/>
+                <a:spcPts val="1200"/>
               </a:spcAft>
+              <a:buFont typeface="Calibri"/>
+              <a:buChar char="•"/>
             </a:pPr>
             <a:r>
-              <a:rPr sz="2600" b="1" rtl="1" lang="fa-IR">
-                <a:solidFill>
-                  <a:srgbClr val="1A334A"/>
+              <a:rPr sz="1800" b="0" rtl="0" lang="en-US">
+                <a:solidFill>
+                  <a:srgbClr val="1B1816"/>
+                </a:solidFill>
+                <a:latin typeface="Calibri"/>
+                <a:ea typeface="Calibri"/>
+                <a:cs typeface="Calibri"/>
+              </a:rPr>
+              <a:t>NMI</a:t>
+            </a:r>
+            <a:r>
+              <a:rPr sz="1800" b="0" rtl="1" lang="fa-IR">
+                <a:solidFill>
+                  <a:srgbClr val="1B1816"/>
                 </a:solidFill>
                 <a:latin typeface="Calibri"/>
                 <a:ea typeface="B Nazanin"/>
                 <a:cs typeface="B Nazanin"/>
               </a:rPr>
-              <a:t>تطابق کامل</a:t>
-            </a:r>
-          </a:p>
-        </p:txBody>
-      </p:sp>
-      <p:sp>
-        <p:nvSpPr>
-          <p:cNvPr id="20" name="TextBox 19"/>
-          <p:cNvSpPr txBox="1"/>
-          <p:nvPr/>
-        </p:nvSpPr>
-        <p:spPr>
-          <a:xfrm>
-            <a:off x="4501896" y="3657600"/>
-            <a:ext cx="3157728" cy="1828800"/>
-          </a:xfrm>
-          <a:prstGeom prst="rect">
-            <a:avLst/>
-          </a:prstGeom>
-          <a:noFill/>
-        </p:spPr>
-        <p:txBody>
-          <a:bodyPr wrap="square">
-            <a:spAutoFit/>
-          </a:bodyPr>
-          <a:lstStyle/>
-          <a:p>
-            <a:pPr algn="r" rtl="1">
-              <a:spcAft>
-                <a:spcPts val="0"/>
-              </a:spcAft>
-            </a:pPr>
-            <a:r>
-              <a:rPr sz="1800" b="0" rtl="1" lang="fa-IR">
-                <a:solidFill>
-                  <a:srgbClr val="1B1816"/>
-                </a:solidFill>
-                <a:latin typeface="Calibri"/>
-                <a:ea typeface="B Nazanin"/>
-                <a:cs typeface="B Nazanin"/>
-              </a:rPr>
-              <a:t>دو الگوریتم از پایه متوسط به ۱ رسیدند.</a:t>
-            </a:r>
-          </a:p>
-        </p:txBody>
-      </p:sp>
-      <p:sp>
-        <p:nvSpPr>
-          <p:cNvPr id="21" name="Rounded Rectangle 20"/>
-          <p:cNvSpPr/>
-          <p:nvPr/>
-        </p:nvSpPr>
-        <p:spPr>
-          <a:xfrm>
-            <a:off x="457200" y="1554480"/>
-            <a:ext cx="3614928" cy="4114800"/>
-          </a:xfrm>
-          <a:prstGeom prst="roundRect">
-            <a:avLst>
-              <a:gd name="adj" fmla="val 10000"/>
-            </a:avLst>
-          </a:prstGeom>
-          <a:solidFill>
-            <a:srgbClr val="FFFCF8"/>
-          </a:solidFill>
-          <a:ln>
-            <a:noFill/>
-          </a:ln>
-          <a:effectLst>
-            <a:outerShdw blurRad="256032" dist="73152" dir="7200000" algn="ctr" rotWithShape="0">
-              <a:srgbClr val="1A334A">
-                <a:alpha val="18000"/>
-              </a:srgbClr>
-            </a:outerShdw>
-          </a:effectLst>
-        </p:spPr>
-        <p:style>
-          <a:lnRef idx="1">
-            <a:schemeClr val="accent1"/>
-          </a:lnRef>
-          <a:fillRef idx="3">
-            <a:schemeClr val="accent1"/>
-          </a:fillRef>
-          <a:effectRef idx="2">
-            <a:schemeClr val="accent1"/>
-          </a:effectRef>
-          <a:fontRef idx="minor">
-            <a:schemeClr val="lt1"/>
-          </a:fontRef>
-        </p:style>
-        <p:txBody>
-          <a:bodyPr rtlCol="0" anchor="ctr"/>
-          <a:lstStyle/>
-          <a:p>
-            <a:pPr algn="ctr"/>
-          </a:p>
-        </p:txBody>
-      </p:sp>
-      <p:sp>
-        <p:nvSpPr>
-          <p:cNvPr id="22" name="Rectangle 21"/>
-          <p:cNvSpPr/>
-          <p:nvPr/>
-        </p:nvSpPr>
-        <p:spPr>
-          <a:xfrm>
-            <a:off x="457200" y="1554480"/>
-            <a:ext cx="3614928" cy="109728"/>
-          </a:xfrm>
-          <a:prstGeom prst="rect">
-            <a:avLst/>
-          </a:prstGeom>
-          <a:solidFill>
-            <a:srgbClr val="1A334A"/>
-          </a:solidFill>
-          <a:ln>
-            <a:noFill/>
-          </a:ln>
-        </p:spPr>
-        <p:style>
-          <a:lnRef idx="1">
-            <a:schemeClr val="accent1"/>
-          </a:lnRef>
-          <a:fillRef idx="3">
-            <a:schemeClr val="accent1"/>
-          </a:fillRef>
-          <a:effectRef idx="2">
-            <a:schemeClr val="accent1"/>
-          </a:effectRef>
-          <a:fontRef idx="minor">
-            <a:schemeClr val="lt1"/>
-          </a:fontRef>
-        </p:style>
-        <p:txBody>
-          <a:bodyPr rtlCol="0" anchor="ctr"/>
-          <a:lstStyle/>
-          <a:p>
-            <a:pPr algn="ctr"/>
-          </a:p>
-        </p:txBody>
-      </p:sp>
-      <p:sp>
-        <p:nvSpPr>
-          <p:cNvPr id="23" name="TextBox 22"/>
-          <p:cNvSpPr txBox="1"/>
-          <p:nvPr/>
-        </p:nvSpPr>
-        <p:spPr>
-          <a:xfrm>
-            <a:off x="685800" y="1874519"/>
-            <a:ext cx="3157728" cy="365760"/>
-          </a:xfrm>
-          <a:prstGeom prst="rect">
-            <a:avLst/>
-          </a:prstGeom>
-          <a:noFill/>
-        </p:spPr>
-        <p:txBody>
-          <a:bodyPr wrap="square">
-            <a:spAutoFit/>
-          </a:bodyPr>
-          <a:lstStyle/>
-          <a:p>
-            <a:pPr algn="r" rtl="1">
-              <a:spcAft>
-                <a:spcPts val="0"/>
-              </a:spcAft>
-            </a:pPr>
-            <a:r>
-              <a:rPr sz="1400" b="0" rtl="1" lang="fa-IR">
-                <a:solidFill>
-                  <a:srgbClr val="A33B24"/>
-                </a:solidFill>
-                <a:latin typeface="Calibri"/>
-                <a:ea typeface="B Nazanin"/>
-                <a:cs typeface="B Nazanin"/>
-              </a:rPr>
-              <a:t>اسکناس</a:t>
-            </a:r>
-          </a:p>
-        </p:txBody>
-      </p:sp>
-      <p:sp>
-        <p:nvSpPr>
-          <p:cNvPr id="24" name="TextBox 23"/>
-          <p:cNvSpPr txBox="1"/>
-          <p:nvPr/>
-        </p:nvSpPr>
-        <p:spPr>
-          <a:xfrm>
-            <a:off x="685800" y="2377440"/>
-            <a:ext cx="3157728" cy="1188720"/>
-          </a:xfrm>
-          <a:prstGeom prst="rect">
-            <a:avLst/>
-          </a:prstGeom>
-          <a:noFill/>
-        </p:spPr>
-        <p:txBody>
-          <a:bodyPr wrap="square">
-            <a:spAutoFit/>
-          </a:bodyPr>
-          <a:lstStyle/>
-          <a:p>
-            <a:pPr algn="r" rtl="1">
-              <a:spcAft>
-                <a:spcPts val="0"/>
-              </a:spcAft>
-            </a:pPr>
-            <a:r>
-              <a:rPr sz="2600" b="1" rtl="1" lang="fa-IR">
-                <a:solidFill>
-                  <a:srgbClr val="1A334A"/>
-                </a:solidFill>
-                <a:latin typeface="Calibri"/>
-                <a:ea typeface="B Nazanin"/>
-                <a:cs typeface="B Nazanin"/>
-              </a:rPr>
-              <a:t>طیفی ضعیف بود</a:t>
-            </a:r>
-          </a:p>
-        </p:txBody>
-      </p:sp>
-      <p:sp>
-        <p:nvSpPr>
-          <p:cNvPr id="25" name="TextBox 24"/>
-          <p:cNvSpPr txBox="1"/>
-          <p:nvPr/>
-        </p:nvSpPr>
-        <p:spPr>
-          <a:xfrm>
-            <a:off x="685800" y="3657600"/>
-            <a:ext cx="3157728" cy="1828800"/>
-          </a:xfrm>
-          <a:prstGeom prst="rect">
-            <a:avLst/>
-          </a:prstGeom>
-          <a:noFill/>
-        </p:spPr>
-        <p:txBody>
-          <a:bodyPr wrap="square">
-            <a:spAutoFit/>
-          </a:bodyPr>
-          <a:lstStyle/>
-          <a:p>
-            <a:pPr algn="r" rtl="1">
-              <a:spcAft>
-                <a:spcPts val="0"/>
-              </a:spcAft>
-            </a:pPr>
-            <a:r>
-              <a:rPr sz="1800" b="0" rtl="1" lang="fa-IR">
-                <a:solidFill>
-                  <a:srgbClr val="1B1816"/>
-                </a:solidFill>
-                <a:latin typeface="Calibri"/>
-                <a:ea typeface="B Nazanin"/>
-                <a:cs typeface="B Nazanin"/>
-              </a:rPr>
-              <a:t>خوشه‌بندی طیفی از حدود ۰/۱۹ به حدود ۰/۸۲ رسید.</a:t>
+              <a:t> نزدیکی خوشه پیش‌بینی‌شده به برچسب واقعی را می‌سنجد.</a:t>
             </a:r>
           </a:p>
         </p:txBody>
@@ -16635,7 +16541,7 @@
                 <a:ea typeface="B Nazanin"/>
                 <a:cs typeface="B Nazanin"/>
               </a:rPr>
-              <a:t>جمع‌بندی</a:t>
+              <a:t>سه مجموعه با بیشترین بهبود</a:t>
             </a:r>
           </a:p>
         </p:txBody>
@@ -16898,7 +16804,7 @@
                 <a:ea typeface="B Nazanin"/>
                 <a:cs typeface="B Nazanin"/>
               </a:rPr>
-              <a:t>۱</a:t>
+              <a:t>شراب</a:t>
             </a:r>
           </a:p>
         </p:txBody>
@@ -16939,7 +16845,7 @@
                 <a:ea typeface="B Nazanin"/>
                 <a:cs typeface="B Nazanin"/>
               </a:rPr>
-              <a:t>لم فشرده می‌کند</a:t>
+              <a:t>پایه ضعیف، لم قوی</a:t>
             </a:r>
           </a:p>
         </p:txBody>
@@ -16980,7 +16886,7 @@
                 <a:ea typeface="B Nazanin"/>
                 <a:cs typeface="B Nazanin"/>
               </a:rPr>
-              <a:t>گراف بزرگ به چند ده رأس کاهش پیدا می‌کند.</a:t>
+              <a:t>سه الگوریتم از حدود نیم به نزدیک ۰/۸۹ رسیدند.</a:t>
             </a:r>
           </a:p>
         </p:txBody>
@@ -17116,7 +17022,7 @@
                 <a:ea typeface="B Nazanin"/>
                 <a:cs typeface="B Nazanin"/>
               </a:rPr>
-              <a:t>۲</a:t>
+              <a:t>آپاندیسیت</a:t>
             </a:r>
           </a:p>
         </p:txBody>
@@ -17157,7 +17063,7 @@
                 <a:ea typeface="B Nazanin"/>
                 <a:cs typeface="B Nazanin"/>
               </a:rPr>
-              <a:t>کیفیت معمولاً بهتر ماند</a:t>
+              <a:t>تطابق کامل</a:t>
             </a:r>
           </a:p>
         </p:txBody>
@@ -17198,7 +17104,7 @@
                 <a:ea typeface="B Nazanin"/>
                 <a:cs typeface="B Nazanin"/>
               </a:rPr>
-              <a:t>در ۶۰ مقایسه گراف کوچک بهتر بود، در ۳ مقایسه برابر، در ۱۵ مقایسه بدتر.</a:t>
+              <a:t>دو الگوریتم از پایه متوسط به ۱ رسیدند.</a:t>
             </a:r>
           </a:p>
         </p:txBody>
@@ -17334,7 +17240,7 @@
                 <a:ea typeface="B Nazanin"/>
                 <a:cs typeface="B Nazanin"/>
               </a:rPr>
-              <a:t>۳</a:t>
+              <a:t>اسکناس</a:t>
             </a:r>
           </a:p>
         </p:txBody>
@@ -17375,7 +17281,7 @@
                 <a:ea typeface="B Nazanin"/>
                 <a:cs typeface="B Nazanin"/>
               </a:rPr>
-              <a:t>الگوریتم قدیمی قوی‌تر شد</a:t>
+              <a:t>طیفی ضعیف بود</a:t>
             </a:r>
           </a:p>
         </p:txBody>
@@ -17416,7 +17322,7 @@
                 <a:ea typeface="B Nazanin"/>
                 <a:cs typeface="B Nazanin"/>
               </a:rPr>
-              <a:t>همان روش‌های کلاسیک، بعد از کوچک کردن گراف، در بیشتر آزمایش‌ها دقیق‌تر شدند. بیشترین سود جایی بود که راه پایه ناپایدار بود.</a:t>
+              <a:t>خوشه‌بندی طیفی از حدود ۰/۱۹ به حدود ۰/۸۲ رسید.</a:t>
             </a:r>
           </a:p>
         </p:txBody>
@@ -17430,6 +17336,1000 @@
 </file>
 
 <file path=ppt/slides/slide24.xml><?xml version="1.0" encoding="utf-8"?>
+<p:sld xmlns:a="http://schemas.openxmlformats.org/drawingml/2006/main" xmlns:p="http://schemas.openxmlformats.org/presentationml/2006/main" xmlns:r="http://schemas.openxmlformats.org/officeDocument/2006/relationships">
+  <p:cSld>
+    <p:spTree>
+      <p:nvGrpSpPr>
+        <p:cNvPr id="1" name=""/>
+        <p:cNvGrpSpPr/>
+        <p:nvPr/>
+      </p:nvGrpSpPr>
+      <p:grpSpPr/>
+      <p:sp>
+        <p:nvSpPr>
+          <p:cNvPr id="2" name="Rectangle 1"/>
+          <p:cNvSpPr/>
+          <p:nvPr/>
+        </p:nvSpPr>
+        <p:spPr>
+          <a:xfrm>
+            <a:off x="0" y="0"/>
+            <a:ext cx="12191695" cy="6858000"/>
+          </a:xfrm>
+          <a:prstGeom prst="rect">
+            <a:avLst/>
+          </a:prstGeom>
+          <a:gradFill rotWithShape="1">
+            <a:gsLst>
+              <a:gs pos="0">
+                <a:srgbClr val="EBE4D6"/>
+              </a:gs>
+              <a:gs pos="100000">
+                <a:srgbClr val="F7F1E6"/>
+              </a:gs>
+            </a:gsLst>
+            <a:lin scaled="0" ang="15120000"/>
+          </a:gradFill>
+          <a:ln>
+            <a:noFill/>
+          </a:ln>
+        </p:spPr>
+        <p:style>
+          <a:lnRef idx="1">
+            <a:schemeClr val="accent1"/>
+          </a:lnRef>
+          <a:fillRef idx="3">
+            <a:schemeClr val="accent1"/>
+          </a:fillRef>
+          <a:effectRef idx="2">
+            <a:schemeClr val="accent1"/>
+          </a:effectRef>
+          <a:fontRef idx="minor">
+            <a:schemeClr val="lt1"/>
+          </a:fontRef>
+        </p:style>
+        <p:txBody>
+          <a:bodyPr rtlCol="0" anchor="ctr"/>
+          <a:lstStyle/>
+          <a:p>
+            <a:pPr algn="ctr"/>
+          </a:p>
+        </p:txBody>
+      </p:sp>
+      <p:sp>
+        <p:nvSpPr>
+          <p:cNvPr id="3" name="Oval 2"/>
+          <p:cNvSpPr/>
+          <p:nvPr/>
+        </p:nvSpPr>
+        <p:spPr>
+          <a:xfrm>
+            <a:off x="8961120" y="-1280160"/>
+            <a:ext cx="4754880" cy="4754880"/>
+          </a:xfrm>
+          <a:prstGeom prst="ellipse">
+            <a:avLst/>
+          </a:prstGeom>
+          <a:solidFill>
+            <a:srgbClr val="A33B24">
+              <a:alpha val="8000"/>
+            </a:srgbClr>
+          </a:solidFill>
+          <a:ln>
+            <a:noFill/>
+          </a:ln>
+        </p:spPr>
+        <p:style>
+          <a:lnRef idx="1">
+            <a:schemeClr val="accent1"/>
+          </a:lnRef>
+          <a:fillRef idx="3">
+            <a:schemeClr val="accent1"/>
+          </a:fillRef>
+          <a:effectRef idx="2">
+            <a:schemeClr val="accent1"/>
+          </a:effectRef>
+          <a:fontRef idx="minor">
+            <a:schemeClr val="lt1"/>
+          </a:fontRef>
+        </p:style>
+        <p:txBody>
+          <a:bodyPr rtlCol="0" anchor="ctr"/>
+          <a:lstStyle/>
+          <a:p>
+            <a:pPr algn="ctr"/>
+          </a:p>
+        </p:txBody>
+      </p:sp>
+      <p:sp>
+        <p:nvSpPr>
+          <p:cNvPr id="4" name="Oval 3"/>
+          <p:cNvSpPr/>
+          <p:nvPr/>
+        </p:nvSpPr>
+        <p:spPr>
+          <a:xfrm>
+            <a:off x="-1463040" y="4206240"/>
+            <a:ext cx="4023360" cy="4023360"/>
+          </a:xfrm>
+          <a:prstGeom prst="ellipse">
+            <a:avLst/>
+          </a:prstGeom>
+          <a:solidFill>
+            <a:srgbClr val="1A334A">
+              <a:alpha val="9000"/>
+            </a:srgbClr>
+          </a:solidFill>
+          <a:ln>
+            <a:noFill/>
+          </a:ln>
+        </p:spPr>
+        <p:style>
+          <a:lnRef idx="1">
+            <a:schemeClr val="accent1"/>
+          </a:lnRef>
+          <a:fillRef idx="3">
+            <a:schemeClr val="accent1"/>
+          </a:fillRef>
+          <a:effectRef idx="2">
+            <a:schemeClr val="accent1"/>
+          </a:effectRef>
+          <a:fontRef idx="minor">
+            <a:schemeClr val="lt1"/>
+          </a:fontRef>
+        </p:style>
+        <p:txBody>
+          <a:bodyPr rtlCol="0" anchor="ctr"/>
+          <a:lstStyle/>
+          <a:p>
+            <a:pPr algn="ctr"/>
+          </a:p>
+        </p:txBody>
+      </p:sp>
+      <p:sp>
+        <p:nvSpPr>
+          <p:cNvPr id="5" name="Rectangle 4"/>
+          <p:cNvSpPr/>
+          <p:nvPr/>
+        </p:nvSpPr>
+        <p:spPr>
+          <a:xfrm>
+            <a:off x="0" y="0"/>
+            <a:ext cx="128016" cy="6858000"/>
+          </a:xfrm>
+          <a:prstGeom prst="rect">
+            <a:avLst/>
+          </a:prstGeom>
+          <a:solidFill>
+            <a:srgbClr val="A33B24"/>
+          </a:solidFill>
+          <a:ln>
+            <a:noFill/>
+          </a:ln>
+        </p:spPr>
+        <p:style>
+          <a:lnRef idx="1">
+            <a:schemeClr val="accent1"/>
+          </a:lnRef>
+          <a:fillRef idx="3">
+            <a:schemeClr val="accent1"/>
+          </a:fillRef>
+          <a:effectRef idx="2">
+            <a:schemeClr val="accent1"/>
+          </a:effectRef>
+          <a:fontRef idx="minor">
+            <a:schemeClr val="lt1"/>
+          </a:fontRef>
+        </p:style>
+        <p:txBody>
+          <a:bodyPr rtlCol="0" anchor="ctr"/>
+          <a:lstStyle/>
+          <a:p>
+            <a:pPr algn="ctr"/>
+          </a:p>
+        </p:txBody>
+      </p:sp>
+      <p:sp>
+        <p:nvSpPr>
+          <p:cNvPr id="6" name="Rounded Rectangle 5"/>
+          <p:cNvSpPr/>
+          <p:nvPr/>
+        </p:nvSpPr>
+        <p:spPr>
+          <a:xfrm>
+            <a:off x="411480" y="256032"/>
+            <a:ext cx="11384280" cy="841248"/>
+          </a:xfrm>
+          <a:prstGeom prst="roundRect">
+            <a:avLst>
+              <a:gd name="adj" fmla="val 10000"/>
+            </a:avLst>
+          </a:prstGeom>
+          <a:solidFill>
+            <a:srgbClr val="FFFCF8"/>
+          </a:solidFill>
+          <a:ln>
+            <a:noFill/>
+          </a:ln>
+          <a:effectLst>
+            <a:outerShdw blurRad="201168" dist="45720" dir="7200000" algn="ctr" rotWithShape="0">
+              <a:srgbClr val="1A334A">
+                <a:alpha val="16000"/>
+              </a:srgbClr>
+            </a:outerShdw>
+          </a:effectLst>
+        </p:spPr>
+        <p:style>
+          <a:lnRef idx="1">
+            <a:schemeClr val="accent1"/>
+          </a:lnRef>
+          <a:fillRef idx="3">
+            <a:schemeClr val="accent1"/>
+          </a:fillRef>
+          <a:effectRef idx="2">
+            <a:schemeClr val="accent1"/>
+          </a:effectRef>
+          <a:fontRef idx="minor">
+            <a:schemeClr val="lt1"/>
+          </a:fontRef>
+        </p:style>
+        <p:txBody>
+          <a:bodyPr rtlCol="0" anchor="ctr"/>
+          <a:lstStyle/>
+          <a:p>
+            <a:pPr algn="ctr"/>
+          </a:p>
+        </p:txBody>
+      </p:sp>
+      <p:sp>
+        <p:nvSpPr>
+          <p:cNvPr id="7" name="TextBox 6"/>
+          <p:cNvSpPr txBox="1"/>
+          <p:nvPr/>
+        </p:nvSpPr>
+        <p:spPr>
+          <a:xfrm>
+            <a:off x="640080" y="384048"/>
+            <a:ext cx="10728655" cy="566928"/>
+          </a:xfrm>
+          <a:prstGeom prst="rect">
+            <a:avLst/>
+          </a:prstGeom>
+          <a:noFill/>
+        </p:spPr>
+        <p:txBody>
+          <a:bodyPr wrap="square">
+            <a:spAutoFit/>
+          </a:bodyPr>
+          <a:lstStyle/>
+          <a:p>
+            <a:pPr algn="r" rtl="1">
+              <a:spcAft>
+                <a:spcPts val="0"/>
+              </a:spcAft>
+            </a:pPr>
+            <a:r>
+              <a:rPr sz="2600" b="1" rtl="1" lang="fa-IR">
+                <a:solidFill>
+                  <a:srgbClr val="1A334A"/>
+                </a:solidFill>
+                <a:latin typeface="Calibri"/>
+                <a:ea typeface="B Nazanin"/>
+                <a:cs typeface="B Nazanin"/>
+              </a:rPr>
+              <a:t>جمع‌بندی</a:t>
+            </a:r>
+          </a:p>
+        </p:txBody>
+      </p:sp>
+      <p:sp>
+        <p:nvSpPr>
+          <p:cNvPr id="8" name="TextBox 7"/>
+          <p:cNvSpPr txBox="1"/>
+          <p:nvPr/>
+        </p:nvSpPr>
+        <p:spPr>
+          <a:xfrm>
+            <a:off x="502920" y="6510528"/>
+            <a:ext cx="7772400" cy="256032"/>
+          </a:xfrm>
+          <a:prstGeom prst="rect">
+            <a:avLst/>
+          </a:prstGeom>
+          <a:noFill/>
+        </p:spPr>
+        <p:txBody>
+          <a:bodyPr wrap="square">
+            <a:spAutoFit/>
+          </a:bodyPr>
+          <a:lstStyle/>
+          <a:p>
+            <a:pPr algn="r" rtl="1">
+              <a:spcAft>
+                <a:spcPts val="0"/>
+              </a:spcAft>
+            </a:pPr>
+            <a:r>
+              <a:rPr sz="1100" b="0" rtl="1" lang="fa-IR">
+                <a:solidFill>
+                  <a:srgbClr val="6B645C"/>
+                </a:solidFill>
+                <a:latin typeface="Calibri"/>
+                <a:ea typeface="B Nazanin"/>
+                <a:cs typeface="B Nazanin"/>
+              </a:rPr>
+              <a:t>خوشه‌بندی گرافی با لم نظم زمردی</a:t>
+            </a:r>
+          </a:p>
+        </p:txBody>
+      </p:sp>
+      <p:sp>
+        <p:nvSpPr>
+          <p:cNvPr id="9" name="Rounded Rectangle 8"/>
+          <p:cNvSpPr/>
+          <p:nvPr/>
+        </p:nvSpPr>
+        <p:spPr>
+          <a:xfrm>
+            <a:off x="10774375" y="6473952"/>
+            <a:ext cx="868680" cy="256032"/>
+          </a:xfrm>
+          <a:prstGeom prst="roundRect">
+            <a:avLst>
+              <a:gd name="adj" fmla="val 10000"/>
+            </a:avLst>
+          </a:prstGeom>
+          <a:solidFill>
+            <a:srgbClr val="1A334A"/>
+          </a:solidFill>
+          <a:ln>
+            <a:noFill/>
+          </a:ln>
+        </p:spPr>
+        <p:style>
+          <a:lnRef idx="1">
+            <a:schemeClr val="accent1"/>
+          </a:lnRef>
+          <a:fillRef idx="3">
+            <a:schemeClr val="accent1"/>
+          </a:fillRef>
+          <a:effectRef idx="2">
+            <a:schemeClr val="accent1"/>
+          </a:effectRef>
+          <a:fontRef idx="minor">
+            <a:schemeClr val="lt1"/>
+          </a:fontRef>
+        </p:style>
+        <p:txBody>
+          <a:bodyPr rtlCol="0" anchor="ctr"/>
+          <a:lstStyle/>
+          <a:p>
+            <a:pPr algn="ctr"/>
+          </a:p>
+        </p:txBody>
+      </p:sp>
+      <p:sp>
+        <p:nvSpPr>
+          <p:cNvPr id="10" name="TextBox 9"/>
+          <p:cNvSpPr txBox="1"/>
+          <p:nvPr/>
+        </p:nvSpPr>
+        <p:spPr>
+          <a:xfrm>
+            <a:off x="10774375" y="6455664"/>
+            <a:ext cx="868680" cy="256032"/>
+          </a:xfrm>
+          <a:prstGeom prst="rect">
+            <a:avLst/>
+          </a:prstGeom>
+          <a:noFill/>
+        </p:spPr>
+        <p:txBody>
+          <a:bodyPr wrap="square">
+            <a:spAutoFit/>
+          </a:bodyPr>
+          <a:lstStyle/>
+          <a:p>
+            <a:pPr algn="ctr" rtl="0">
+              <a:spcAft>
+                <a:spcPts val="0"/>
+              </a:spcAft>
+            </a:pPr>
+            <a:r>
+              <a:rPr sz="1100" b="0" rtl="1" lang="fa-IR">
+                <a:solidFill>
+                  <a:srgbClr val="FFFFFF"/>
+                </a:solidFill>
+                <a:latin typeface="Calibri"/>
+                <a:ea typeface="B Nazanin"/>
+                <a:cs typeface="B Nazanin"/>
+              </a:rPr>
+              <a:t>۲۴</a:t>
+            </a:r>
+          </a:p>
+        </p:txBody>
+      </p:sp>
+      <p:sp>
+        <p:nvSpPr>
+          <p:cNvPr id="11" name="TextBox 10"/>
+          <p:cNvSpPr txBox="1"/>
+          <p:nvPr/>
+        </p:nvSpPr>
+        <p:spPr>
+          <a:xfrm>
+            <a:off x="502920" y="1298448"/>
+            <a:ext cx="11155680" cy="640080"/>
+          </a:xfrm>
+          <a:prstGeom prst="rect">
+            <a:avLst/>
+          </a:prstGeom>
+          <a:noFill/>
+        </p:spPr>
+        <p:txBody>
+          <a:bodyPr wrap="square">
+            <a:spAutoFit/>
+          </a:bodyPr>
+          <a:lstStyle/>
+          <a:p>
+            <a:pPr algn="r" rtl="1">
+              <a:spcAft>
+                <a:spcPts val="0"/>
+              </a:spcAft>
+            </a:pPr>
+            <a:r>
+              <a:rPr sz="1600" b="0" rtl="1" lang="fa-IR">
+                <a:solidFill>
+                  <a:srgbClr val="6B645C"/>
+                </a:solidFill>
+                <a:latin typeface="Calibri"/>
+                <a:ea typeface="B Nazanin"/>
+                <a:cs typeface="B Nazanin"/>
+              </a:rPr>
+              <a:t>مقایسه با راه پایه خود پروژه. مجموعه‌های نمونه‌گیری‌شده، جدا از عدد مقاله.</a:t>
+            </a:r>
+          </a:p>
+        </p:txBody>
+      </p:sp>
+      <p:sp>
+        <p:nvSpPr>
+          <p:cNvPr id="12" name="Rounded Rectangle 11"/>
+          <p:cNvSpPr/>
+          <p:nvPr/>
+        </p:nvSpPr>
+        <p:spPr>
+          <a:xfrm>
+            <a:off x="8138160" y="2103120"/>
+            <a:ext cx="3611880" cy="2880360"/>
+          </a:xfrm>
+          <a:prstGeom prst="roundRect">
+            <a:avLst>
+              <a:gd name="adj" fmla="val 10000"/>
+            </a:avLst>
+          </a:prstGeom>
+          <a:solidFill>
+            <a:srgbClr val="FFFCF8"/>
+          </a:solidFill>
+          <a:ln>
+            <a:noFill/>
+          </a:ln>
+          <a:effectLst>
+            <a:outerShdw blurRad="292608" dist="91440" dir="7200000" algn="ctr" rotWithShape="0">
+              <a:srgbClr val="1A334A">
+                <a:alpha val="20000"/>
+              </a:srgbClr>
+            </a:outerShdw>
+          </a:effectLst>
+        </p:spPr>
+        <p:style>
+          <a:lnRef idx="1">
+            <a:schemeClr val="accent1"/>
+          </a:lnRef>
+          <a:fillRef idx="3">
+            <a:schemeClr val="accent1"/>
+          </a:fillRef>
+          <a:effectRef idx="2">
+            <a:schemeClr val="accent1"/>
+          </a:effectRef>
+          <a:fontRef idx="minor">
+            <a:schemeClr val="lt1"/>
+          </a:fontRef>
+        </p:style>
+        <p:txBody>
+          <a:bodyPr rtlCol="0" anchor="ctr"/>
+          <a:lstStyle/>
+          <a:p>
+            <a:pPr algn="ctr"/>
+          </a:p>
+        </p:txBody>
+      </p:sp>
+      <p:sp>
+        <p:nvSpPr>
+          <p:cNvPr id="13" name="Rectangle 12"/>
+          <p:cNvSpPr/>
+          <p:nvPr/>
+        </p:nvSpPr>
+        <p:spPr>
+          <a:xfrm>
+            <a:off x="8138160" y="2103120"/>
+            <a:ext cx="3611880" cy="109728"/>
+          </a:xfrm>
+          <a:prstGeom prst="rect">
+            <a:avLst/>
+          </a:prstGeom>
+          <a:solidFill>
+            <a:srgbClr val="2C5E52"/>
+          </a:solidFill>
+          <a:ln>
+            <a:noFill/>
+          </a:ln>
+        </p:spPr>
+        <p:style>
+          <a:lnRef idx="1">
+            <a:schemeClr val="accent1"/>
+          </a:lnRef>
+          <a:fillRef idx="3">
+            <a:schemeClr val="accent1"/>
+          </a:fillRef>
+          <a:effectRef idx="2">
+            <a:schemeClr val="accent1"/>
+          </a:effectRef>
+          <a:fontRef idx="minor">
+            <a:schemeClr val="lt1"/>
+          </a:fontRef>
+        </p:style>
+        <p:txBody>
+          <a:bodyPr rtlCol="0" anchor="ctr"/>
+          <a:lstStyle/>
+          <a:p>
+            <a:pPr algn="ctr"/>
+          </a:p>
+        </p:txBody>
+      </p:sp>
+      <p:sp>
+        <p:nvSpPr>
+          <p:cNvPr id="14" name="TextBox 13"/>
+          <p:cNvSpPr txBox="1"/>
+          <p:nvPr/>
+        </p:nvSpPr>
+        <p:spPr>
+          <a:xfrm>
+            <a:off x="8138160" y="2377440"/>
+            <a:ext cx="3611880" cy="1371600"/>
+          </a:xfrm>
+          <a:prstGeom prst="rect">
+            <a:avLst/>
+          </a:prstGeom>
+          <a:noFill/>
+        </p:spPr>
+        <p:txBody>
+          <a:bodyPr wrap="square">
+            <a:spAutoFit/>
+          </a:bodyPr>
+          <a:lstStyle/>
+          <a:p>
+            <a:pPr algn="ctr" rtl="0">
+              <a:spcAft>
+                <a:spcPts val="0"/>
+              </a:spcAft>
+            </a:pPr>
+            <a:r>
+              <a:rPr sz="6000" b="1" rtl="1" lang="fa-IR">
+                <a:solidFill>
+                  <a:srgbClr val="2C5E52"/>
+                </a:solidFill>
+                <a:latin typeface="Calibri"/>
+                <a:ea typeface="B Nazanin"/>
+                <a:cs typeface="B Nazanin"/>
+              </a:rPr>
+              <a:t>۶۰</a:t>
+            </a:r>
+          </a:p>
+        </p:txBody>
+      </p:sp>
+      <p:sp>
+        <p:nvSpPr>
+          <p:cNvPr id="15" name="TextBox 14"/>
+          <p:cNvSpPr txBox="1"/>
+          <p:nvPr/>
+        </p:nvSpPr>
+        <p:spPr>
+          <a:xfrm>
+            <a:off x="8138160" y="3931920"/>
+            <a:ext cx="3611880" cy="640080"/>
+          </a:xfrm>
+          <a:prstGeom prst="rect">
+            <a:avLst/>
+          </a:prstGeom>
+          <a:noFill/>
+        </p:spPr>
+        <p:txBody>
+          <a:bodyPr wrap="square">
+            <a:spAutoFit/>
+          </a:bodyPr>
+          <a:lstStyle/>
+          <a:p>
+            <a:pPr algn="ctr" rtl="0">
+              <a:spcAft>
+                <a:spcPts val="0"/>
+              </a:spcAft>
+            </a:pPr>
+            <a:r>
+              <a:rPr sz="2000" b="0" rtl="1" lang="fa-IR">
+                <a:solidFill>
+                  <a:srgbClr val="1B1816"/>
+                </a:solidFill>
+                <a:latin typeface="Calibri"/>
+                <a:ea typeface="B Nazanin"/>
+                <a:cs typeface="B Nazanin"/>
+              </a:rPr>
+              <a:t>گراف کوچک بهتر</a:t>
+            </a:r>
+          </a:p>
+        </p:txBody>
+      </p:sp>
+      <p:sp>
+        <p:nvSpPr>
+          <p:cNvPr id="16" name="Rounded Rectangle 15"/>
+          <p:cNvSpPr/>
+          <p:nvPr/>
+        </p:nvSpPr>
+        <p:spPr>
+          <a:xfrm>
+            <a:off x="4297680" y="2103120"/>
+            <a:ext cx="3611880" cy="2880360"/>
+          </a:xfrm>
+          <a:prstGeom prst="roundRect">
+            <a:avLst>
+              <a:gd name="adj" fmla="val 10000"/>
+            </a:avLst>
+          </a:prstGeom>
+          <a:solidFill>
+            <a:srgbClr val="FFFCF8"/>
+          </a:solidFill>
+          <a:ln>
+            <a:noFill/>
+          </a:ln>
+          <a:effectLst>
+            <a:outerShdw blurRad="292608" dist="91440" dir="7200000" algn="ctr" rotWithShape="0">
+              <a:srgbClr val="1A334A">
+                <a:alpha val="20000"/>
+              </a:srgbClr>
+            </a:outerShdw>
+          </a:effectLst>
+        </p:spPr>
+        <p:style>
+          <a:lnRef idx="1">
+            <a:schemeClr val="accent1"/>
+          </a:lnRef>
+          <a:fillRef idx="3">
+            <a:schemeClr val="accent1"/>
+          </a:fillRef>
+          <a:effectRef idx="2">
+            <a:schemeClr val="accent1"/>
+          </a:effectRef>
+          <a:fontRef idx="minor">
+            <a:schemeClr val="lt1"/>
+          </a:fontRef>
+        </p:style>
+        <p:txBody>
+          <a:bodyPr rtlCol="0" anchor="ctr"/>
+          <a:lstStyle/>
+          <a:p>
+            <a:pPr algn="ctr"/>
+          </a:p>
+        </p:txBody>
+      </p:sp>
+      <p:sp>
+        <p:nvSpPr>
+          <p:cNvPr id="17" name="Rectangle 16"/>
+          <p:cNvSpPr/>
+          <p:nvPr/>
+        </p:nvSpPr>
+        <p:spPr>
+          <a:xfrm>
+            <a:off x="4297680" y="2103120"/>
+            <a:ext cx="3611880" cy="109728"/>
+          </a:xfrm>
+          <a:prstGeom prst="rect">
+            <a:avLst/>
+          </a:prstGeom>
+          <a:solidFill>
+            <a:srgbClr val="1A334A"/>
+          </a:solidFill>
+          <a:ln>
+            <a:noFill/>
+          </a:ln>
+        </p:spPr>
+        <p:style>
+          <a:lnRef idx="1">
+            <a:schemeClr val="accent1"/>
+          </a:lnRef>
+          <a:fillRef idx="3">
+            <a:schemeClr val="accent1"/>
+          </a:fillRef>
+          <a:effectRef idx="2">
+            <a:schemeClr val="accent1"/>
+          </a:effectRef>
+          <a:fontRef idx="minor">
+            <a:schemeClr val="lt1"/>
+          </a:fontRef>
+        </p:style>
+        <p:txBody>
+          <a:bodyPr rtlCol="0" anchor="ctr"/>
+          <a:lstStyle/>
+          <a:p>
+            <a:pPr algn="ctr"/>
+          </a:p>
+        </p:txBody>
+      </p:sp>
+      <p:sp>
+        <p:nvSpPr>
+          <p:cNvPr id="18" name="TextBox 17"/>
+          <p:cNvSpPr txBox="1"/>
+          <p:nvPr/>
+        </p:nvSpPr>
+        <p:spPr>
+          <a:xfrm>
+            <a:off x="4297680" y="2377440"/>
+            <a:ext cx="3611880" cy="1371600"/>
+          </a:xfrm>
+          <a:prstGeom prst="rect">
+            <a:avLst/>
+          </a:prstGeom>
+          <a:noFill/>
+        </p:spPr>
+        <p:txBody>
+          <a:bodyPr wrap="square">
+            <a:spAutoFit/>
+          </a:bodyPr>
+          <a:lstStyle/>
+          <a:p>
+            <a:pPr algn="ctr" rtl="0">
+              <a:spcAft>
+                <a:spcPts val="0"/>
+              </a:spcAft>
+            </a:pPr>
+            <a:r>
+              <a:rPr sz="6000" b="1" rtl="1" lang="fa-IR">
+                <a:solidFill>
+                  <a:srgbClr val="1A334A"/>
+                </a:solidFill>
+                <a:latin typeface="Calibri"/>
+                <a:ea typeface="B Nazanin"/>
+                <a:cs typeface="B Nazanin"/>
+              </a:rPr>
+              <a:t>۳</a:t>
+            </a:r>
+          </a:p>
+        </p:txBody>
+      </p:sp>
+      <p:sp>
+        <p:nvSpPr>
+          <p:cNvPr id="19" name="TextBox 18"/>
+          <p:cNvSpPr txBox="1"/>
+          <p:nvPr/>
+        </p:nvSpPr>
+        <p:spPr>
+          <a:xfrm>
+            <a:off x="4297680" y="3931920"/>
+            <a:ext cx="3611880" cy="640080"/>
+          </a:xfrm>
+          <a:prstGeom prst="rect">
+            <a:avLst/>
+          </a:prstGeom>
+          <a:noFill/>
+        </p:spPr>
+        <p:txBody>
+          <a:bodyPr wrap="square">
+            <a:spAutoFit/>
+          </a:bodyPr>
+          <a:lstStyle/>
+          <a:p>
+            <a:pPr algn="ctr" rtl="0">
+              <a:spcAft>
+                <a:spcPts val="0"/>
+              </a:spcAft>
+            </a:pPr>
+            <a:r>
+              <a:rPr sz="2000" b="0" rtl="1" lang="fa-IR">
+                <a:solidFill>
+                  <a:srgbClr val="1B1816"/>
+                </a:solidFill>
+                <a:latin typeface="Calibri"/>
+                <a:ea typeface="B Nazanin"/>
+                <a:cs typeface="B Nazanin"/>
+              </a:rPr>
+              <a:t>برابر</a:t>
+            </a:r>
+          </a:p>
+        </p:txBody>
+      </p:sp>
+      <p:sp>
+        <p:nvSpPr>
+          <p:cNvPr id="20" name="Rounded Rectangle 19"/>
+          <p:cNvSpPr/>
+          <p:nvPr/>
+        </p:nvSpPr>
+        <p:spPr>
+          <a:xfrm>
+            <a:off x="457200" y="2103120"/>
+            <a:ext cx="3611880" cy="2880360"/>
+          </a:xfrm>
+          <a:prstGeom prst="roundRect">
+            <a:avLst>
+              <a:gd name="adj" fmla="val 10000"/>
+            </a:avLst>
+          </a:prstGeom>
+          <a:solidFill>
+            <a:srgbClr val="FFFCF8"/>
+          </a:solidFill>
+          <a:ln>
+            <a:noFill/>
+          </a:ln>
+          <a:effectLst>
+            <a:outerShdw blurRad="292608" dist="91440" dir="7200000" algn="ctr" rotWithShape="0">
+              <a:srgbClr val="1A334A">
+                <a:alpha val="20000"/>
+              </a:srgbClr>
+            </a:outerShdw>
+          </a:effectLst>
+        </p:spPr>
+        <p:style>
+          <a:lnRef idx="1">
+            <a:schemeClr val="accent1"/>
+          </a:lnRef>
+          <a:fillRef idx="3">
+            <a:schemeClr val="accent1"/>
+          </a:fillRef>
+          <a:effectRef idx="2">
+            <a:schemeClr val="accent1"/>
+          </a:effectRef>
+          <a:fontRef idx="minor">
+            <a:schemeClr val="lt1"/>
+          </a:fontRef>
+        </p:style>
+        <p:txBody>
+          <a:bodyPr rtlCol="0" anchor="ctr"/>
+          <a:lstStyle/>
+          <a:p>
+            <a:pPr algn="ctr"/>
+          </a:p>
+        </p:txBody>
+      </p:sp>
+      <p:sp>
+        <p:nvSpPr>
+          <p:cNvPr id="21" name="Rectangle 20"/>
+          <p:cNvSpPr/>
+          <p:nvPr/>
+        </p:nvSpPr>
+        <p:spPr>
+          <a:xfrm>
+            <a:off x="457200" y="2103120"/>
+            <a:ext cx="3611880" cy="109728"/>
+          </a:xfrm>
+          <a:prstGeom prst="rect">
+            <a:avLst/>
+          </a:prstGeom>
+          <a:solidFill>
+            <a:srgbClr val="A33B24"/>
+          </a:solidFill>
+          <a:ln>
+            <a:noFill/>
+          </a:ln>
+        </p:spPr>
+        <p:style>
+          <a:lnRef idx="1">
+            <a:schemeClr val="accent1"/>
+          </a:lnRef>
+          <a:fillRef idx="3">
+            <a:schemeClr val="accent1"/>
+          </a:fillRef>
+          <a:effectRef idx="2">
+            <a:schemeClr val="accent1"/>
+          </a:effectRef>
+          <a:fontRef idx="minor">
+            <a:schemeClr val="lt1"/>
+          </a:fontRef>
+        </p:style>
+        <p:txBody>
+          <a:bodyPr rtlCol="0" anchor="ctr"/>
+          <a:lstStyle/>
+          <a:p>
+            <a:pPr algn="ctr"/>
+          </a:p>
+        </p:txBody>
+      </p:sp>
+      <p:sp>
+        <p:nvSpPr>
+          <p:cNvPr id="22" name="TextBox 21"/>
+          <p:cNvSpPr txBox="1"/>
+          <p:nvPr/>
+        </p:nvSpPr>
+        <p:spPr>
+          <a:xfrm>
+            <a:off x="457200" y="2377440"/>
+            <a:ext cx="3611880" cy="1371600"/>
+          </a:xfrm>
+          <a:prstGeom prst="rect">
+            <a:avLst/>
+          </a:prstGeom>
+          <a:noFill/>
+        </p:spPr>
+        <p:txBody>
+          <a:bodyPr wrap="square">
+            <a:spAutoFit/>
+          </a:bodyPr>
+          <a:lstStyle/>
+          <a:p>
+            <a:pPr algn="ctr" rtl="0">
+              <a:spcAft>
+                <a:spcPts val="0"/>
+              </a:spcAft>
+            </a:pPr>
+            <a:r>
+              <a:rPr sz="6000" b="1" rtl="1" lang="fa-IR">
+                <a:solidFill>
+                  <a:srgbClr val="A33B24"/>
+                </a:solidFill>
+                <a:latin typeface="Calibri"/>
+                <a:ea typeface="B Nazanin"/>
+                <a:cs typeface="B Nazanin"/>
+              </a:rPr>
+              <a:t>۱۵</a:t>
+            </a:r>
+          </a:p>
+        </p:txBody>
+      </p:sp>
+      <p:sp>
+        <p:nvSpPr>
+          <p:cNvPr id="23" name="TextBox 22"/>
+          <p:cNvSpPr txBox="1"/>
+          <p:nvPr/>
+        </p:nvSpPr>
+        <p:spPr>
+          <a:xfrm>
+            <a:off x="457200" y="3931920"/>
+            <a:ext cx="3611880" cy="640080"/>
+          </a:xfrm>
+          <a:prstGeom prst="rect">
+            <a:avLst/>
+          </a:prstGeom>
+          <a:noFill/>
+        </p:spPr>
+        <p:txBody>
+          <a:bodyPr wrap="square">
+            <a:spAutoFit/>
+          </a:bodyPr>
+          <a:lstStyle/>
+          <a:p>
+            <a:pPr algn="ctr" rtl="0">
+              <a:spcAft>
+                <a:spcPts val="0"/>
+              </a:spcAft>
+            </a:pPr>
+            <a:r>
+              <a:rPr sz="2000" b="0" rtl="1" lang="fa-IR">
+                <a:solidFill>
+                  <a:srgbClr val="1B1816"/>
+                </a:solidFill>
+                <a:latin typeface="Calibri"/>
+                <a:ea typeface="B Nazanin"/>
+                <a:cs typeface="B Nazanin"/>
+              </a:rPr>
+              <a:t>گراف اصلی بهتر</a:t>
+            </a:r>
+          </a:p>
+        </p:txBody>
+      </p:sp>
+    </p:spTree>
+  </p:cSld>
+  <p:clrMapOvr>
+    <a:masterClrMapping/>
+  </p:clrMapOvr>
+</p:sld>
+</file>
+
+<file path=ppt/slides/slide25.xml><?xml version="1.0" encoding="utf-8"?>
 <p:sld xmlns:a="http://schemas.openxmlformats.org/drawingml/2006/main" xmlns:p="http://schemas.openxmlformats.org/presentationml/2006/main" xmlns:r="http://schemas.openxmlformats.org/officeDocument/2006/relationships">
   <p:cSld>
     <p:spTree>
@@ -19660,7 +20560,7 @@
                 <a:ea typeface="B Nazanin"/>
                 <a:cs typeface="B Nazanin"/>
               </a:rPr>
-              <a:t>قدم اول: گروه‌های هم‌اندازه</a:t>
+              <a:t>لم نظم زمردی چه می‌گوید</a:t>
             </a:r>
           </a:p>
         </p:txBody>
@@ -19891,7 +20791,7 @@
       </p:sp>
       <p:pic>
         <p:nvPicPr>
-          <p:cNvPr id="13" name="Picture 12" descr="concept_partition.png"/>
+          <p:cNvPr id="13" name="Picture 12" descr="concept_lemma_says.png"/>
           <p:cNvPicPr>
             <a:picLocks noChangeAspect="1"/>
           </p:cNvPicPr>
@@ -19905,8 +20805,8 @@
         </p:blipFill>
         <p:spPr>
           <a:xfrm>
-            <a:off x="530352" y="1878676"/>
-            <a:ext cx="6958584" cy="3795591"/>
+            <a:off x="530352" y="1912566"/>
+            <a:ext cx="6958584" cy="3727812"/>
           </a:xfrm>
           <a:prstGeom prst="rect">
             <a:avLst/>
@@ -20046,7 +20946,7 @@
                 <a:ea typeface="B Nazanin"/>
                 <a:cs typeface="B Nazanin"/>
               </a:rPr>
-              <a:t>لم اول رأس‌ها را به چند گروه تقریباً هم‌اندازه تقسیم می‌کند.</a:t>
+              <a:t>گراف به‌قدر کافی بزرگ.</a:t>
             </a:r>
           </a:p>
           <a:p>
@@ -20066,7 +20966,7 @@
                 <a:ea typeface="B Nazanin"/>
                 <a:cs typeface="B Nazanin"/>
               </a:rPr>
-              <a:t>لکه‌های رنگی همین گروه‌ها هستند.</a:t>
+              <a:t>چند گروه تقریباً هم‌اندازه. تعداد گروه‌ها خیلی کمتر از تعداد رأس‌ها.</a:t>
             </a:r>
           </a:p>
           <a:p>
@@ -20086,7 +20986,7 @@
                 <a:ea typeface="B Nazanin"/>
                 <a:cs typeface="B Nazanin"/>
               </a:rPr>
-              <a:t>نقطه‌های خاکستری در هیچ گروه تمیزی جا نشده‌اند.</a:t>
+              <a:t>یال یکنواخت بین بیشتر گروه‌ها. یک عدد برای هر جفت: چگالی.</a:t>
             </a:r>
           </a:p>
           <a:p>
@@ -20106,7 +21006,7 @@
                 <a:ea typeface="B Nazanin"/>
                 <a:cs typeface="B Nazanin"/>
               </a:rPr>
-              <a:t>آن ته مانده را مجموعه استثنایی می‌نامند.</a:t>
+              <a:t>هر گروه یک رأس. خوشه‌بندی راه لم روی همین گراف کوچک.</a:t>
             </a:r>
           </a:p>
         </p:txBody>
@@ -20401,7 +21301,7 @@
                 <a:ea typeface="B Nazanin"/>
                 <a:cs typeface="B Nazanin"/>
               </a:rPr>
-              <a:t>جفت منظم: یال‌ها یکنواخت‌اند</a:t>
+              <a:t>جفت منظم و جفت نامنظم</a:t>
             </a:r>
           </a:p>
         </p:txBody>
@@ -20541,8 +21441,8 @@
         </p:nvSpPr>
         <p:spPr>
           <a:xfrm>
-            <a:off x="329184" y="1170432"/>
-            <a:ext cx="7360920" cy="5212080"/>
+            <a:off x="6190488" y="1280160"/>
+            <a:ext cx="5513832" cy="4983480"/>
           </a:xfrm>
           <a:prstGeom prst="roundRect">
             <a:avLst>
@@ -20550,15 +21450,15 @@
             </a:avLst>
           </a:prstGeom>
           <a:solidFill>
-            <a:srgbClr val="DED5C4"/>
+            <a:srgbClr val="FFFCF8"/>
           </a:solidFill>
           <a:ln>
             <a:noFill/>
           </a:ln>
           <a:effectLst>
-            <a:outerShdw blurRad="201168" dist="54864" dir="7200000" algn="ctr" rotWithShape="0">
+            <a:outerShdw blurRad="256032" dist="73152" dir="7200000" algn="ctr" rotWithShape="0">
               <a:srgbClr val="1A334A">
-                <a:alpha val="16000"/>
+                <a:alpha val="18000"/>
               </a:srgbClr>
             </a:outerShdw>
           </a:effectLst>
@@ -20587,52 +21487,132 @@
       </p:sp>
       <p:sp>
         <p:nvSpPr>
-          <p:cNvPr id="12" name="Rounded Rectangle 11"/>
-          <p:cNvSpPr/>
-          <p:nvPr/>
-        </p:nvSpPr>
-        <p:spPr>
-          <a:xfrm>
-            <a:off x="420624" y="1261872"/>
-            <a:ext cx="7178040" cy="5029200"/>
-          </a:xfrm>
-          <a:prstGeom prst="roundRect">
-            <a:avLst>
-              <a:gd name="adj" fmla="val 10000"/>
-            </a:avLst>
-          </a:prstGeom>
-          <a:solidFill>
-            <a:srgbClr val="FFFCF8"/>
-          </a:solidFill>
-          <a:ln>
-            <a:noFill/>
-          </a:ln>
-        </p:spPr>
-        <p:style>
-          <a:lnRef idx="1">
-            <a:schemeClr val="accent1"/>
-          </a:lnRef>
-          <a:fillRef idx="3">
-            <a:schemeClr val="accent1"/>
-          </a:fillRef>
-          <a:effectRef idx="2">
-            <a:schemeClr val="accent1"/>
-          </a:effectRef>
-          <a:fontRef idx="minor">
-            <a:schemeClr val="lt1"/>
-          </a:fontRef>
-        </p:style>
-        <p:txBody>
-          <a:bodyPr rtlCol="0" anchor="ctr"/>
-          <a:lstStyle/>
-          <a:p>
-            <a:pPr algn="ctr"/>
+          <p:cNvPr id="12" name="Rectangle 11"/>
+          <p:cNvSpPr/>
+          <p:nvPr/>
+        </p:nvSpPr>
+        <p:spPr>
+          <a:xfrm>
+            <a:off x="6190488" y="1280160"/>
+            <a:ext cx="5513832" cy="91440"/>
+          </a:xfrm>
+          <a:prstGeom prst="rect">
+            <a:avLst/>
+          </a:prstGeom>
+          <a:solidFill>
+            <a:srgbClr val="A33B24"/>
+          </a:solidFill>
+          <a:ln>
+            <a:noFill/>
+          </a:ln>
+        </p:spPr>
+        <p:style>
+          <a:lnRef idx="1">
+            <a:schemeClr val="accent1"/>
+          </a:lnRef>
+          <a:fillRef idx="3">
+            <a:schemeClr val="accent1"/>
+          </a:fillRef>
+          <a:effectRef idx="2">
+            <a:schemeClr val="accent1"/>
+          </a:effectRef>
+          <a:fontRef idx="minor">
+            <a:schemeClr val="lt1"/>
+          </a:fontRef>
+        </p:style>
+        <p:txBody>
+          <a:bodyPr rtlCol="0" anchor="ctr"/>
+          <a:lstStyle/>
+          <a:p>
+            <a:pPr algn="ctr"/>
+          </a:p>
+        </p:txBody>
+      </p:sp>
+      <p:sp>
+        <p:nvSpPr>
+          <p:cNvPr id="13" name="TextBox 12"/>
+          <p:cNvSpPr txBox="1"/>
+          <p:nvPr/>
+        </p:nvSpPr>
+        <p:spPr>
+          <a:xfrm>
+            <a:off x="6446520" y="1508760"/>
+            <a:ext cx="5001768" cy="457200"/>
+          </a:xfrm>
+          <a:prstGeom prst="rect">
+            <a:avLst/>
+          </a:prstGeom>
+          <a:noFill/>
+        </p:spPr>
+        <p:txBody>
+          <a:bodyPr wrap="square">
+            <a:spAutoFit/>
+          </a:bodyPr>
+          <a:lstStyle/>
+          <a:p>
+            <a:pPr algn="r" rtl="1">
+              <a:spcAft>
+                <a:spcPts val="0"/>
+              </a:spcAft>
+            </a:pPr>
+            <a:r>
+              <a:rPr sz="2200" b="1" rtl="1" lang="fa-IR">
+                <a:solidFill>
+                  <a:srgbClr val="1A334A"/>
+                </a:solidFill>
+                <a:latin typeface="Calibri"/>
+                <a:ea typeface="B Nazanin"/>
+                <a:cs typeface="B Nazanin"/>
+              </a:rPr>
+              <a:t>جفت منظم</a:t>
+            </a:r>
+          </a:p>
+        </p:txBody>
+      </p:sp>
+      <p:sp>
+        <p:nvSpPr>
+          <p:cNvPr id="14" name="TextBox 13"/>
+          <p:cNvSpPr txBox="1"/>
+          <p:nvPr/>
+        </p:nvSpPr>
+        <p:spPr>
+          <a:xfrm>
+            <a:off x="6446520" y="2011680"/>
+            <a:ext cx="5001768" cy="822960"/>
+          </a:xfrm>
+          <a:prstGeom prst="rect">
+            <a:avLst/>
+          </a:prstGeom>
+          <a:noFill/>
+        </p:spPr>
+        <p:txBody>
+          <a:bodyPr wrap="square">
+            <a:spAutoFit/>
+          </a:bodyPr>
+          <a:lstStyle/>
+          <a:p>
+            <a:pPr algn="r" rtl="1">
+              <a:spcAft>
+                <a:spcPts val="0"/>
+              </a:spcAft>
+            </a:pPr>
+            <a:r>
+              <a:rPr sz="1600" b="0" rtl="1" lang="fa-IR">
+                <a:solidFill>
+                  <a:srgbClr val="1B1816"/>
+                </a:solidFill>
+                <a:latin typeface="Calibri"/>
+                <a:ea typeface="B Nazanin"/>
+                <a:cs typeface="B Nazanin"/>
+              </a:rPr>
+              <a:t>یال یکنواخت بین دو گروه. یک چگالی برای کل رابطه.</a:t>
+            </a:r>
           </a:p>
         </p:txBody>
       </p:sp>
       <p:pic>
         <p:nvPicPr>
-          <p:cNvPr id="13" name="Picture 12" descr="concept_regular.png"/>
+          <p:cNvPr id="15" name="Picture 14" descr="concept_regular.png"/>
           <p:cNvPicPr>
             <a:picLocks noChangeAspect="1"/>
           </p:cNvPicPr>
@@ -20646,8 +21626,8 @@
         </p:blipFill>
         <p:spPr>
           <a:xfrm>
-            <a:off x="530352" y="1878676"/>
-            <a:ext cx="6958584" cy="3795591"/>
+            <a:off x="6556248" y="3130573"/>
+            <a:ext cx="4782312" cy="2608533"/>
           </a:xfrm>
           <a:prstGeom prst="rect">
             <a:avLst/>
@@ -20656,14 +21636,14 @@
       </p:pic>
       <p:sp>
         <p:nvSpPr>
-          <p:cNvPr id="14" name="Rounded Rectangle 13"/>
-          <p:cNvSpPr/>
-          <p:nvPr/>
-        </p:nvSpPr>
-        <p:spPr>
-          <a:xfrm>
-            <a:off x="7836408" y="1170432"/>
-            <a:ext cx="4050791" cy="5212080"/>
+          <p:cNvPr id="16" name="Rounded Rectangle 15"/>
+          <p:cNvSpPr/>
+          <p:nvPr/>
+        </p:nvSpPr>
+        <p:spPr>
+          <a:xfrm>
+            <a:off x="457200" y="1280160"/>
+            <a:ext cx="5513832" cy="4983480"/>
           </a:xfrm>
           <a:prstGeom prst="roundRect">
             <a:avLst>
@@ -20677,9 +21657,9 @@
             <a:noFill/>
           </a:ln>
           <a:effectLst>
-            <a:outerShdw blurRad="201168" dist="54864" dir="7200000" algn="ctr" rotWithShape="0">
+            <a:outerShdw blurRad="256032" dist="73152" dir="7200000" algn="ctr" rotWithShape="0">
               <a:srgbClr val="1A334A">
-                <a:alpha val="16000"/>
+                <a:alpha val="18000"/>
               </a:srgbClr>
             </a:outerShdw>
           </a:effectLst>
@@ -20708,57 +21688,57 @@
       </p:sp>
       <p:sp>
         <p:nvSpPr>
-          <p:cNvPr id="15" name="Rectangle 14"/>
-          <p:cNvSpPr/>
-          <p:nvPr/>
-        </p:nvSpPr>
-        <p:spPr>
-          <a:xfrm>
-            <a:off x="11649456" y="1170432"/>
-            <a:ext cx="91440" cy="5212080"/>
-          </a:xfrm>
-          <a:prstGeom prst="rect">
-            <a:avLst/>
-          </a:prstGeom>
-          <a:solidFill>
-            <a:srgbClr val="A33B24"/>
-          </a:solidFill>
-          <a:ln>
-            <a:noFill/>
-          </a:ln>
-        </p:spPr>
-        <p:style>
-          <a:lnRef idx="1">
-            <a:schemeClr val="accent1"/>
-          </a:lnRef>
-          <a:fillRef idx="3">
-            <a:schemeClr val="accent1"/>
-          </a:fillRef>
-          <a:effectRef idx="2">
-            <a:schemeClr val="accent1"/>
-          </a:effectRef>
-          <a:fontRef idx="minor">
-            <a:schemeClr val="lt1"/>
-          </a:fontRef>
-        </p:style>
-        <p:txBody>
-          <a:bodyPr rtlCol="0" anchor="ctr"/>
-          <a:lstStyle/>
-          <a:p>
-            <a:pPr algn="ctr"/>
-          </a:p>
-        </p:txBody>
-      </p:sp>
-      <p:sp>
-        <p:nvSpPr>
-          <p:cNvPr id="16" name="TextBox 15"/>
+          <p:cNvPr id="17" name="Rectangle 16"/>
+          <p:cNvSpPr/>
+          <p:nvPr/>
+        </p:nvSpPr>
+        <p:spPr>
+          <a:xfrm>
+            <a:off x="457200" y="1280160"/>
+            <a:ext cx="5513832" cy="91440"/>
+          </a:xfrm>
+          <a:prstGeom prst="rect">
+            <a:avLst/>
+          </a:prstGeom>
+          <a:solidFill>
+            <a:srgbClr val="1A334A"/>
+          </a:solidFill>
+          <a:ln>
+            <a:noFill/>
+          </a:ln>
+        </p:spPr>
+        <p:style>
+          <a:lnRef idx="1">
+            <a:schemeClr val="accent1"/>
+          </a:lnRef>
+          <a:fillRef idx="3">
+            <a:schemeClr val="accent1"/>
+          </a:fillRef>
+          <a:effectRef idx="2">
+            <a:schemeClr val="accent1"/>
+          </a:effectRef>
+          <a:fontRef idx="minor">
+            <a:schemeClr val="lt1"/>
+          </a:fontRef>
+        </p:style>
+        <p:txBody>
+          <a:bodyPr rtlCol="0" anchor="ctr"/>
+          <a:lstStyle/>
+          <a:p>
+            <a:pPr algn="ctr"/>
+          </a:p>
+        </p:txBody>
+      </p:sp>
+      <p:sp>
+        <p:nvSpPr>
+          <p:cNvPr id="18" name="TextBox 17"/>
           <p:cNvSpPr txBox="1"/>
           <p:nvPr/>
         </p:nvSpPr>
         <p:spPr>
           <a:xfrm>
-            <a:off x="8001000" y="1353312"/>
-            <a:ext cx="3666744" cy="4846320"/>
+            <a:off x="713232" y="1508760"/>
+            <a:ext cx="5001768" cy="457200"/>
           </a:xfrm>
           <a:prstGeom prst="rect">
             <a:avLst/>
@@ -20766,40 +21746,59 @@
           <a:noFill/>
         </p:spPr>
         <p:txBody>
-          <a:bodyPr wrap="square" anchor="ctr">
+          <a:bodyPr wrap="square">
             <a:spAutoFit/>
           </a:bodyPr>
           <a:lstStyle/>
           <a:p>
             <a:pPr algn="r" rtl="1">
               <a:spcAft>
-                <a:spcPts val="1200"/>
+                <a:spcPts val="0"/>
               </a:spcAft>
-              <a:buFont typeface="Calibri"/>
-              <a:buChar char="•"/>
             </a:pPr>
             <a:r>
-              <a:rPr sz="1800" b="0" rtl="1" lang="fa-IR">
-                <a:solidFill>
-                  <a:srgbClr val="1B1816"/>
+              <a:rPr sz="2200" b="1" rtl="1" lang="fa-IR">
+                <a:solidFill>
+                  <a:srgbClr val="1A334A"/>
                 </a:solidFill>
                 <a:latin typeface="Calibri"/>
                 <a:ea typeface="B Nazanin"/>
                 <a:cs typeface="B Nazanin"/>
               </a:rPr>
-              <a:t>منظم بودن درباره یال بین دو گروه است، نه داخل هر گروه.</a:t>
-            </a:r>
-          </a:p>
+              <a:t>جفت نامنظم</a:t>
+            </a:r>
+          </a:p>
+        </p:txBody>
+      </p:sp>
+      <p:sp>
+        <p:nvSpPr>
+          <p:cNvPr id="19" name="TextBox 18"/>
+          <p:cNvSpPr txBox="1"/>
+          <p:nvPr/>
+        </p:nvSpPr>
+        <p:spPr>
+          <a:xfrm>
+            <a:off x="713232" y="2011680"/>
+            <a:ext cx="5001768" cy="822960"/>
+          </a:xfrm>
+          <a:prstGeom prst="rect">
+            <a:avLst/>
+          </a:prstGeom>
+          <a:noFill/>
+        </p:spPr>
+        <p:txBody>
+          <a:bodyPr wrap="square">
+            <a:spAutoFit/>
+          </a:bodyPr>
+          <a:lstStyle/>
           <a:p>
             <a:pPr algn="r" rtl="1">
               <a:spcAft>
-                <a:spcPts val="1200"/>
+                <a:spcPts val="0"/>
               </a:spcAft>
-              <a:buFont typeface="Calibri"/>
-              <a:buChar char="•"/>
             </a:pPr>
             <a:r>
-              <a:rPr sz="1800" b="0" rtl="1" lang="fa-IR">
+              <a:rPr sz="1600" b="0" rtl="1" lang="fa-IR">
                 <a:solidFill>
                   <a:srgbClr val="1B1816"/>
                 </a:solidFill>
@@ -20807,51 +21806,35 @@
                 <a:ea typeface="B Nazanin"/>
                 <a:cs typeface="B Nazanin"/>
               </a:rPr>
-              <a:t>باید زیرمجموعه‌های به‌قدر کافی بزرگ را هم چک کرد، نه تکه‌های خیلی کوچک را.</a:t>
-            </a:r>
-          </a:p>
-          <a:p>
-            <a:pPr algn="r" rtl="1">
-              <a:spcAft>
-                <a:spcPts val="1200"/>
-              </a:spcAft>
-              <a:buFont typeface="Calibri"/>
-              <a:buChar char="•"/>
-            </a:pPr>
-            <a:r>
-              <a:rPr sz="1800" b="0" rtl="1" lang="fa-IR">
-                <a:solidFill>
-                  <a:srgbClr val="1B1816"/>
-                </a:solidFill>
-                <a:latin typeface="Calibri"/>
-                <a:ea typeface="B Nazanin"/>
-                <a:cs typeface="B Nazanin"/>
-              </a:rPr>
-              <a:t>حد اندازه، کسری از خود گروه است. از آن حد به بعد، چگالی هر دو زیرمجموعه باید نزدیک چگالی کل بماند.</a:t>
-            </a:r>
-          </a:p>
-          <a:p>
-            <a:pPr algn="r" rtl="1">
-              <a:spcAft>
-                <a:spcPts val="1200"/>
-              </a:spcAft>
-              <a:buFont typeface="Calibri"/>
-              <a:buChar char="•"/>
-            </a:pPr>
-            <a:r>
-              <a:rPr sz="1800" b="0" rtl="1" lang="fa-IR">
-                <a:solidFill>
-                  <a:srgbClr val="1B1816"/>
-                </a:solidFill>
-                <a:latin typeface="Calibri"/>
-                <a:ea typeface="B Nazanin"/>
-                <a:cs typeface="B Nazanin"/>
-              </a:rPr>
-              <a:t>اگر این طور باشد، یک عدد چگالی کل رابطه را خلاصه می‌کند.</a:t>
-            </a:r>
-          </a:p>
-        </p:txBody>
-      </p:sp>
+              <a:t>یک تکه شلوغ، بقیه خلوت. یک عدد ناکافی.</a:t>
+            </a:r>
+          </a:p>
+        </p:txBody>
+      </p:sp>
+      <p:pic>
+        <p:nvPicPr>
+          <p:cNvPr id="20" name="Picture 19" descr="concept_irregular.png"/>
+          <p:cNvPicPr>
+            <a:picLocks noChangeAspect="1"/>
+          </p:cNvPicPr>
+          <p:nvPr/>
+        </p:nvPicPr>
+        <p:blipFill>
+          <a:blip r:embed="rId3"/>
+          <a:stretch>
+            <a:fillRect/>
+          </a:stretch>
+        </p:blipFill>
+        <p:spPr>
+          <a:xfrm>
+            <a:off x="822960" y="3130573"/>
+            <a:ext cx="4782312" cy="2608533"/>
+          </a:xfrm>
+          <a:prstGeom prst="rect">
+            <a:avLst/>
+          </a:prstGeom>
+        </p:spPr>
+      </p:pic>
     </p:spTree>
   </p:cSld>
   <p:clrMapOvr>
@@ -21142,7 +22125,7 @@
                 <a:ea typeface="B Nazanin"/>
                 <a:cs typeface="B Nazanin"/>
               </a:rPr>
-              <a:t>جفت نامنظم: یک عدد کافی نیست</a:t>
+              <a:t>قدم اول: گروه‌های هم‌اندازه</a:t>
             </a:r>
           </a:p>
         </p:txBody>
@@ -21373,7 +22356,7 @@
       </p:sp>
       <p:pic>
         <p:nvPicPr>
-          <p:cNvPr id="13" name="Picture 12" descr="concept_irregular.png"/>
+          <p:cNvPr id="13" name="Picture 12" descr="concept_partition.png"/>
           <p:cNvPicPr>
             <a:picLocks noChangeAspect="1"/>
           </p:cNvPicPr>
@@ -21528,7 +22511,7 @@
                 <a:ea typeface="B Nazanin"/>
                 <a:cs typeface="B Nazanin"/>
               </a:rPr>
-              <a:t>اینجا بالای تصویر پر از یال است و پایین تقریباً خالی.</a:t>
+              <a:t>لم اول رأس‌ها را به چند گروه تقریباً هم‌اندازه تقسیم می‌کند.</a:t>
             </a:r>
           </a:p>
           <a:p>
@@ -21548,7 +22531,7 @@
                 <a:ea typeface="B Nazanin"/>
                 <a:cs typeface="B Nazanin"/>
               </a:rPr>
-              <a:t>میانگین، این تفاوت را پنهان می‌کند.</a:t>
+              <a:t>لکه‌های رنگی همین گروه‌ها هستند.</a:t>
             </a:r>
           </a:p>
           <a:p>
@@ -21568,7 +22551,27 @@
                 <a:ea typeface="B Nazanin"/>
                 <a:cs typeface="B Nazanin"/>
               </a:rPr>
-              <a:t>لم چنین جفتی را نامنظم می‌گیرد و باید بعداً بریده شود.</a:t>
+              <a:t>نقطه‌های خاکستری در هیچ گروه تمیزی جا نشده‌اند.</a:t>
+            </a:r>
+          </a:p>
+          <a:p>
+            <a:pPr algn="r" rtl="1">
+              <a:spcAft>
+                <a:spcPts val="1200"/>
+              </a:spcAft>
+              <a:buFont typeface="Calibri"/>
+              <a:buChar char="•"/>
+            </a:pPr>
+            <a:r>
+              <a:rPr sz="1800" b="0" rtl="1" lang="fa-IR">
+                <a:solidFill>
+                  <a:srgbClr val="1B1816"/>
+                </a:solidFill>
+                <a:latin typeface="Calibri"/>
+                <a:ea typeface="B Nazanin"/>
+                <a:cs typeface="B Nazanin"/>
+              </a:rPr>
+              <a:t>آن ته مانده را مجموعه استثنایی می‌نامند.</a:t>
             </a:r>
           </a:p>
         </p:txBody>
@@ -21863,7 +22866,7 @@
                 <a:ea typeface="B Nazanin"/>
                 <a:cs typeface="B Nazanin"/>
               </a:rPr>
-              <a:t>اپسیلون، مرز منظم و نامنظم</a:t>
+              <a:t>جفت منظم: یال‌ها یکنواخت‌اند</a:t>
             </a:r>
           </a:p>
         </p:txBody>
@@ -22004,7 +23007,7 @@
         <p:spPr>
           <a:xfrm>
             <a:off x="329184" y="1170432"/>
-            <a:ext cx="8366760" cy="5212080"/>
+            <a:ext cx="7360920" cy="5212080"/>
           </a:xfrm>
           <a:prstGeom prst="roundRect">
             <a:avLst>
@@ -22056,7 +23059,7 @@
         <p:spPr>
           <a:xfrm>
             <a:off x="420624" y="1261872"/>
-            <a:ext cx="8183880" cy="5029200"/>
+            <a:ext cx="7178040" cy="5029200"/>
           </a:xfrm>
           <a:prstGeom prst="roundRect">
             <a:avLst>
@@ -22094,7 +23097,7 @@
       </p:sp>
       <p:pic>
         <p:nvPicPr>
-          <p:cNvPr id="13" name="Picture 12" descr="fig_eps_regular_pair.png"/>
+          <p:cNvPr id="13" name="Picture 12" descr="concept_regular.png"/>
           <p:cNvPicPr>
             <a:picLocks noChangeAspect="1"/>
           </p:cNvPicPr>
@@ -22108,8 +23111,8 @@
         </p:blipFill>
         <p:spPr>
           <a:xfrm>
-            <a:off x="530352" y="1536478"/>
-            <a:ext cx="7964424" cy="4479988"/>
+            <a:off x="530352" y="1878676"/>
+            <a:ext cx="6958584" cy="3795591"/>
           </a:xfrm>
           <a:prstGeom prst="rect">
             <a:avLst/>
@@ -22124,8 +23127,8 @@
         </p:nvSpPr>
         <p:spPr>
           <a:xfrm>
-            <a:off x="8842248" y="1170432"/>
-            <a:ext cx="3044952" cy="5212080"/>
+            <a:off x="7836408" y="1170432"/>
+            <a:ext cx="4050791" cy="5212080"/>
           </a:xfrm>
           <a:prstGeom prst="roundRect">
             <a:avLst>
@@ -22219,8 +23222,8 @@
         </p:nvSpPr>
         <p:spPr>
           <a:xfrm>
-            <a:off x="9006840" y="1353312"/>
-            <a:ext cx="2660904" cy="4846320"/>
+            <a:off x="8001000" y="1353312"/>
+            <a:ext cx="3666744" cy="4846320"/>
           </a:xfrm>
           <a:prstGeom prst="rect">
             <a:avLst/>
@@ -22249,18 +23252,7 @@
                 <a:ea typeface="B Nazanin"/>
                 <a:cs typeface="B Nazanin"/>
               </a:rPr>
-              <a:t>چپ جفت منظم است: چگالی تقریباً ثابت و نزدیک </a:t>
-            </a:r>
-            <a:r>
-              <a:rPr sz="1800" b="0" rtl="0" lang="en-US">
-                <a:solidFill>
-                  <a:srgbClr val="1B1816"/>
-                </a:solidFill>
-                <a:latin typeface="Calibri"/>
-                <a:ea typeface="Calibri"/>
-                <a:cs typeface="Calibri"/>
-              </a:rPr>
-              <a:t>d.</a:t>
+              <a:t>منظم بودن درباره یال بین دو گروه است، نه داخل هر گروه.</a:t>
             </a:r>
           </a:p>
           <a:p>
@@ -22280,7 +23272,7 @@
                 <a:ea typeface="B Nazanin"/>
                 <a:cs typeface="B Nazanin"/>
               </a:rPr>
-              <a:t>راست جفت نامنظم است: یک تکه شلوغ و بقیه خلوت.</a:t>
+              <a:t>باید زیرمجموعه‌های به‌قدر کافی بزرگ را هم چک کرد، نه تکه‌های خیلی کوچک را.</a:t>
             </a:r>
           </a:p>
           <a:p>
@@ -22300,7 +23292,7 @@
                 <a:ea typeface="B Nazanin"/>
                 <a:cs typeface="B Nazanin"/>
               </a:rPr>
-              <a:t>اپسیلون هم حد اختلاف چگالی است و هم کف اندازه زیرمجموعه.</a:t>
+              <a:t>حد اندازه، کسری از خود گروه است. از آن حد به بعد، چگالی هر دو زیرمجموعه باید نزدیک چگالی کل بماند.</a:t>
             </a:r>
           </a:p>
           <a:p>
@@ -22320,7 +23312,7 @@
                 <a:ea typeface="B Nazanin"/>
                 <a:cs typeface="B Nazanin"/>
               </a:rPr>
-              <a:t>زیرمجموعه کوچک‌تر از این کف کنار گذاشته می‌شود. بزرگ‌تر از آن، باید چگالی‌اش نزدیک چگالی کل بماند.</a:t>
+              <a:t>اگر این طور باشد، یک عدد چگالی کل رابطه را خلاصه می‌کند.</a:t>
             </a:r>
           </a:p>
         </p:txBody>
@@ -22615,7 +23607,7 @@
                 <a:ea typeface="B Nazanin"/>
                 <a:cs typeface="B Nazanin"/>
               </a:rPr>
-              <a:t>چطور جفت نامنظم را پیدا می‌کنیم</a:t>
+              <a:t>جفت نامنظم: یک عدد کافی نیست</a:t>
             </a:r>
           </a:p>
         </p:txBody>
@@ -22755,8 +23747,8 @@
         </p:nvSpPr>
         <p:spPr>
           <a:xfrm>
-            <a:off x="8089392" y="1371600"/>
-            <a:ext cx="3614928" cy="4709160"/>
+            <a:off x="329184" y="1170432"/>
+            <a:ext cx="7360920" cy="5212080"/>
           </a:xfrm>
           <a:prstGeom prst="roundRect">
             <a:avLst>
@@ -22764,15 +23756,15 @@
             </a:avLst>
           </a:prstGeom>
           <a:solidFill>
-            <a:srgbClr val="FFFCF8"/>
+            <a:srgbClr val="DED5C4"/>
           </a:solidFill>
           <a:ln>
             <a:noFill/>
           </a:ln>
           <a:effectLst>
-            <a:outerShdw blurRad="256032" dist="73152" dir="7200000" algn="ctr" rotWithShape="0">
+            <a:outerShdw blurRad="201168" dist="54864" dir="7200000" algn="ctr" rotWithShape="0">
               <a:srgbClr val="1A334A">
-                <a:alpha val="18000"/>
+                <a:alpha val="16000"/>
               </a:srgbClr>
             </a:outerShdw>
           </a:effectLst>
@@ -22801,173 +23793,52 @@
       </p:sp>
       <p:sp>
         <p:nvSpPr>
-          <p:cNvPr id="12" name="Rectangle 11"/>
-          <p:cNvSpPr/>
-          <p:nvPr/>
-        </p:nvSpPr>
-        <p:spPr>
-          <a:xfrm>
-            <a:off x="8089392" y="1371600"/>
-            <a:ext cx="3614928" cy="91440"/>
-          </a:xfrm>
-          <a:prstGeom prst="rect">
-            <a:avLst/>
-          </a:prstGeom>
-          <a:solidFill>
-            <a:srgbClr val="A33B24"/>
-          </a:solidFill>
-          <a:ln>
-            <a:noFill/>
-          </a:ln>
-        </p:spPr>
-        <p:style>
-          <a:lnRef idx="1">
-            <a:schemeClr val="accent1"/>
-          </a:lnRef>
-          <a:fillRef idx="3">
-            <a:schemeClr val="accent1"/>
-          </a:fillRef>
-          <a:effectRef idx="2">
-            <a:schemeClr val="accent1"/>
-          </a:effectRef>
-          <a:fontRef idx="minor">
-            <a:schemeClr val="lt1"/>
-          </a:fontRef>
-        </p:style>
-        <p:txBody>
-          <a:bodyPr rtlCol="0" anchor="ctr"/>
-          <a:lstStyle/>
-          <a:p>
-            <a:pPr algn="ctr"/>
-          </a:p>
-        </p:txBody>
-      </p:sp>
-      <p:sp>
-        <p:nvSpPr>
-          <p:cNvPr id="13" name="TextBox 12"/>
-          <p:cNvSpPr txBox="1"/>
-          <p:nvPr/>
-        </p:nvSpPr>
-        <p:spPr>
-          <a:xfrm>
-            <a:off x="8253984" y="1554480"/>
-            <a:ext cx="3285744" cy="292608"/>
-          </a:xfrm>
-          <a:prstGeom prst="rect">
-            <a:avLst/>
-          </a:prstGeom>
-          <a:noFill/>
-        </p:spPr>
-        <p:txBody>
-          <a:bodyPr wrap="square">
-            <a:spAutoFit/>
-          </a:bodyPr>
-          <a:lstStyle/>
-          <a:p>
-            <a:pPr algn="r" rtl="1">
-              <a:spcAft>
-                <a:spcPts val="0"/>
-              </a:spcAft>
-            </a:pPr>
-            <a:r>
-              <a:rPr sz="1400" b="0" rtl="1" lang="fa-IR">
-                <a:solidFill>
-                  <a:srgbClr val="A33B24"/>
-                </a:solidFill>
-                <a:latin typeface="Calibri"/>
-                <a:ea typeface="B Nazanin"/>
-                <a:cs typeface="B Nazanin"/>
-              </a:rPr>
-              <a:t>آزمون ۱</a:t>
-            </a:r>
-          </a:p>
-        </p:txBody>
-      </p:sp>
-      <p:sp>
-        <p:nvSpPr>
-          <p:cNvPr id="14" name="TextBox 13"/>
-          <p:cNvSpPr txBox="1"/>
-          <p:nvPr/>
-        </p:nvSpPr>
-        <p:spPr>
-          <a:xfrm>
-            <a:off x="8253984" y="1847088"/>
-            <a:ext cx="3285744" cy="640080"/>
-          </a:xfrm>
-          <a:prstGeom prst="rect">
-            <a:avLst/>
-          </a:prstGeom>
-          <a:noFill/>
-        </p:spPr>
-        <p:txBody>
-          <a:bodyPr wrap="square">
-            <a:spAutoFit/>
-          </a:bodyPr>
-          <a:lstStyle/>
-          <a:p>
-            <a:pPr algn="r" rtl="1">
-              <a:spcAft>
-                <a:spcPts val="0"/>
-              </a:spcAft>
-            </a:pPr>
-            <a:r>
-              <a:rPr sz="1800" b="1" rtl="1" lang="fa-IR">
-                <a:solidFill>
-                  <a:srgbClr val="1A334A"/>
-                </a:solidFill>
-                <a:latin typeface="Calibri"/>
-                <a:ea typeface="B Nazanin"/>
-                <a:cs typeface="B Nazanin"/>
-              </a:rPr>
-              <a:t>یال خیلی کم، جفت منظم است</a:t>
-            </a:r>
-          </a:p>
-        </p:txBody>
-      </p:sp>
-      <p:sp>
-        <p:nvSpPr>
-          <p:cNvPr id="15" name="TextBox 14"/>
-          <p:cNvSpPr txBox="1"/>
-          <p:nvPr/>
-        </p:nvSpPr>
-        <p:spPr>
-          <a:xfrm>
-            <a:off x="8253984" y="2468880"/>
-            <a:ext cx="3285744" cy="1143000"/>
-          </a:xfrm>
-          <a:prstGeom prst="rect">
-            <a:avLst/>
-          </a:prstGeom>
-          <a:noFill/>
-        </p:spPr>
-        <p:txBody>
-          <a:bodyPr wrap="square">
-            <a:spAutoFit/>
-          </a:bodyPr>
-          <a:lstStyle/>
-          <a:p>
-            <a:pPr algn="r" rtl="1">
-              <a:spcAft>
-                <a:spcPts val="0"/>
-              </a:spcAft>
-            </a:pPr>
-            <a:r>
-              <a:rPr sz="1400" b="0" rtl="1" lang="fa-IR">
-                <a:solidFill>
-                  <a:srgbClr val="1B1816"/>
-                </a:solidFill>
-                <a:latin typeface="Calibri"/>
-                <a:ea typeface="B Nazanin"/>
-                <a:cs typeface="B Nazanin"/>
-              </a:rPr>
-              <a:t>اگر میانگین یال بین دو گروه از حدی کمتر باشد، جفت را منظم می‌گیریم. گراف خالی هم منظم است.</a:t>
-            </a:r>
+          <p:cNvPr id="12" name="Rounded Rectangle 11"/>
+          <p:cNvSpPr/>
+          <p:nvPr/>
+        </p:nvSpPr>
+        <p:spPr>
+          <a:xfrm>
+            <a:off x="420624" y="1261872"/>
+            <a:ext cx="7178040" cy="5029200"/>
+          </a:xfrm>
+          <a:prstGeom prst="roundRect">
+            <a:avLst>
+              <a:gd name="adj" fmla="val 10000"/>
+            </a:avLst>
+          </a:prstGeom>
+          <a:solidFill>
+            <a:srgbClr val="FFFCF8"/>
+          </a:solidFill>
+          <a:ln>
+            <a:noFill/>
+          </a:ln>
+        </p:spPr>
+        <p:style>
+          <a:lnRef idx="1">
+            <a:schemeClr val="accent1"/>
+          </a:lnRef>
+          <a:fillRef idx="3">
+            <a:schemeClr val="accent1"/>
+          </a:fillRef>
+          <a:effectRef idx="2">
+            <a:schemeClr val="accent1"/>
+          </a:effectRef>
+          <a:fontRef idx="minor">
+            <a:schemeClr val="lt1"/>
+          </a:fontRef>
+        </p:style>
+        <p:txBody>
+          <a:bodyPr rtlCol="0" anchor="ctr"/>
+          <a:lstStyle/>
+          <a:p>
+            <a:pPr algn="ctr"/>
           </a:p>
         </p:txBody>
       </p:sp>
       <p:pic>
         <p:nvPicPr>
-          <p:cNvPr id="16" name="Picture 15" descr="concept_alon1.png"/>
+          <p:cNvPr id="13" name="Picture 12" descr="concept_irregular.png"/>
           <p:cNvPicPr>
             <a:picLocks noChangeAspect="1"/>
           </p:cNvPicPr>
@@ -22981,8 +23852,8 @@
         </p:blipFill>
         <p:spPr>
           <a:xfrm>
-            <a:off x="8382000" y="3823106"/>
-            <a:ext cx="3029712" cy="1817827"/>
+            <a:off x="530352" y="1878676"/>
+            <a:ext cx="6958584" cy="3795591"/>
           </a:xfrm>
           <a:prstGeom prst="rect">
             <a:avLst/>
@@ -22991,14 +23862,14 @@
       </p:pic>
       <p:sp>
         <p:nvSpPr>
-          <p:cNvPr id="17" name="Rounded Rectangle 16"/>
-          <p:cNvSpPr/>
-          <p:nvPr/>
-        </p:nvSpPr>
-        <p:spPr>
-          <a:xfrm>
-            <a:off x="4273296" y="1371600"/>
-            <a:ext cx="3614928" cy="4709160"/>
+          <p:cNvPr id="14" name="Rounded Rectangle 13"/>
+          <p:cNvSpPr/>
+          <p:nvPr/>
+        </p:nvSpPr>
+        <p:spPr>
+          <a:xfrm>
+            <a:off x="7836408" y="1170432"/>
+            <a:ext cx="4050791" cy="5212080"/>
           </a:xfrm>
           <a:prstGeom prst="roundRect">
             <a:avLst>
@@ -23012,9 +23883,9 @@
             <a:noFill/>
           </a:ln>
           <a:effectLst>
-            <a:outerShdw blurRad="256032" dist="73152" dir="7200000" algn="ctr" rotWithShape="0">
+            <a:outerShdw blurRad="201168" dist="54864" dir="7200000" algn="ctr" rotWithShape="0">
               <a:srgbClr val="1A334A">
-                <a:alpha val="18000"/>
+                <a:alpha val="16000"/>
               </a:srgbClr>
             </a:outerShdw>
           </a:effectLst>
@@ -23043,57 +23914,57 @@
       </p:sp>
       <p:sp>
         <p:nvSpPr>
-          <p:cNvPr id="18" name="Rectangle 17"/>
-          <p:cNvSpPr/>
-          <p:nvPr/>
-        </p:nvSpPr>
-        <p:spPr>
-          <a:xfrm>
-            <a:off x="4273296" y="1371600"/>
-            <a:ext cx="3614928" cy="91440"/>
-          </a:xfrm>
-          <a:prstGeom prst="rect">
-            <a:avLst/>
-          </a:prstGeom>
-          <a:solidFill>
-            <a:srgbClr val="1A334A"/>
-          </a:solidFill>
-          <a:ln>
-            <a:noFill/>
-          </a:ln>
-        </p:spPr>
-        <p:style>
-          <a:lnRef idx="1">
-            <a:schemeClr val="accent1"/>
-          </a:lnRef>
-          <a:fillRef idx="3">
-            <a:schemeClr val="accent1"/>
-          </a:fillRef>
-          <a:effectRef idx="2">
-            <a:schemeClr val="accent1"/>
-          </a:effectRef>
-          <a:fontRef idx="minor">
-            <a:schemeClr val="lt1"/>
-          </a:fontRef>
-        </p:style>
-        <p:txBody>
-          <a:bodyPr rtlCol="0" anchor="ctr"/>
-          <a:lstStyle/>
-          <a:p>
-            <a:pPr algn="ctr"/>
-          </a:p>
-        </p:txBody>
-      </p:sp>
-      <p:sp>
-        <p:nvSpPr>
-          <p:cNvPr id="19" name="TextBox 18"/>
+          <p:cNvPr id="15" name="Rectangle 14"/>
+          <p:cNvSpPr/>
+          <p:nvPr/>
+        </p:nvSpPr>
+        <p:spPr>
+          <a:xfrm>
+            <a:off x="11649456" y="1170432"/>
+            <a:ext cx="91440" cy="5212080"/>
+          </a:xfrm>
+          <a:prstGeom prst="rect">
+            <a:avLst/>
+          </a:prstGeom>
+          <a:solidFill>
+            <a:srgbClr val="A33B24"/>
+          </a:solidFill>
+          <a:ln>
+            <a:noFill/>
+          </a:ln>
+        </p:spPr>
+        <p:style>
+          <a:lnRef idx="1">
+            <a:schemeClr val="accent1"/>
+          </a:lnRef>
+          <a:fillRef idx="3">
+            <a:schemeClr val="accent1"/>
+          </a:fillRef>
+          <a:effectRef idx="2">
+            <a:schemeClr val="accent1"/>
+          </a:effectRef>
+          <a:fontRef idx="minor">
+            <a:schemeClr val="lt1"/>
+          </a:fontRef>
+        </p:style>
+        <p:txBody>
+          <a:bodyPr rtlCol="0" anchor="ctr"/>
+          <a:lstStyle/>
+          <a:p>
+            <a:pPr algn="ctr"/>
+          </a:p>
+        </p:txBody>
+      </p:sp>
+      <p:sp>
+        <p:nvSpPr>
+          <p:cNvPr id="16" name="TextBox 15"/>
           <p:cNvSpPr txBox="1"/>
           <p:nvPr/>
         </p:nvSpPr>
         <p:spPr>
           <a:xfrm>
-            <a:off x="4437888" y="1554480"/>
-            <a:ext cx="3285744" cy="292608"/>
+            <a:off x="8001000" y="1353312"/>
+            <a:ext cx="3666744" cy="4846320"/>
           </a:xfrm>
           <a:prstGeom prst="rect">
             <a:avLst/>
@@ -23101,100 +23972,60 @@
           <a:noFill/>
         </p:spPr>
         <p:txBody>
-          <a:bodyPr wrap="square">
+          <a:bodyPr wrap="square" anchor="ctr">
             <a:spAutoFit/>
           </a:bodyPr>
           <a:lstStyle/>
           <a:p>
             <a:pPr algn="r" rtl="1">
               <a:spcAft>
-                <a:spcPts val="0"/>
+                <a:spcPts val="1200"/>
               </a:spcAft>
+              <a:buFont typeface="Calibri"/>
+              <a:buChar char="•"/>
             </a:pPr>
             <a:r>
-              <a:rPr sz="1400" b="0" rtl="1" lang="fa-IR">
-                <a:solidFill>
-                  <a:srgbClr val="A33B24"/>
+              <a:rPr sz="1800" b="0" rtl="1" lang="fa-IR">
+                <a:solidFill>
+                  <a:srgbClr val="1B1816"/>
                 </a:solidFill>
                 <a:latin typeface="Calibri"/>
                 <a:ea typeface="B Nazanin"/>
                 <a:cs typeface="B Nazanin"/>
               </a:rPr>
-              <a:t>آزمون ۳</a:t>
-            </a:r>
-          </a:p>
-        </p:txBody>
-      </p:sp>
-      <p:sp>
-        <p:nvSpPr>
-          <p:cNvPr id="20" name="TextBox 19"/>
-          <p:cNvSpPr txBox="1"/>
-          <p:nvPr/>
-        </p:nvSpPr>
-        <p:spPr>
-          <a:xfrm>
-            <a:off x="4437888" y="1847088"/>
-            <a:ext cx="3285744" cy="640080"/>
-          </a:xfrm>
-          <a:prstGeom prst="rect">
-            <a:avLst/>
-          </a:prstGeom>
-          <a:noFill/>
-        </p:spPr>
-        <p:txBody>
-          <a:bodyPr wrap="square">
-            <a:spAutoFit/>
-          </a:bodyPr>
-          <a:lstStyle/>
+              <a:t>اینجا بالای تصویر پر از یال است و پایین تقریباً خالی.</a:t>
+            </a:r>
+          </a:p>
           <a:p>
             <a:pPr algn="r" rtl="1">
               <a:spcAft>
-                <a:spcPts val="0"/>
+                <a:spcPts val="1200"/>
               </a:spcAft>
+              <a:buFont typeface="Calibri"/>
+              <a:buChar char="•"/>
             </a:pPr>
             <a:r>
-              <a:rPr sz="1800" b="1" rtl="1" lang="fa-IR">
-                <a:solidFill>
-                  <a:srgbClr val="1A334A"/>
+              <a:rPr sz="1800" b="0" rtl="1" lang="fa-IR">
+                <a:solidFill>
+                  <a:srgbClr val="1B1816"/>
                 </a:solidFill>
                 <a:latin typeface="Calibri"/>
                 <a:ea typeface="B Nazanin"/>
                 <a:cs typeface="B Nazanin"/>
               </a:rPr>
-              <a:t>همسایه مشترکِ زیاد</a:t>
-            </a:r>
-          </a:p>
-        </p:txBody>
-      </p:sp>
-      <p:sp>
-        <p:nvSpPr>
-          <p:cNvPr id="21" name="TextBox 20"/>
-          <p:cNvSpPr txBox="1"/>
-          <p:nvPr/>
-        </p:nvSpPr>
-        <p:spPr>
-          <a:xfrm>
-            <a:off x="4437888" y="2468880"/>
-            <a:ext cx="3285744" cy="1143000"/>
-          </a:xfrm>
-          <a:prstGeom prst="rect">
-            <a:avLst/>
-          </a:prstGeom>
-          <a:noFill/>
-        </p:spPr>
-        <p:txBody>
-          <a:bodyPr wrap="square">
-            <a:spAutoFit/>
-          </a:bodyPr>
-          <a:lstStyle/>
+              <a:t>میانگین، این تفاوت را پنهان می‌کند.</a:t>
+            </a:r>
+          </a:p>
           <a:p>
             <a:pPr algn="r" rtl="1">
               <a:spcAft>
-                <a:spcPts val="0"/>
+                <a:spcPts val="1200"/>
               </a:spcAft>
+              <a:buFont typeface="Calibri"/>
+              <a:buChar char="•"/>
             </a:pPr>
             <a:r>
-              <a:rPr sz="1400" b="0" rtl="1" lang="fa-IR">
+              <a:rPr sz="1800" b="0" rtl="1" lang="fa-IR">
                 <a:solidFill>
                   <a:srgbClr val="1B1816"/>
                 </a:solidFill>
@@ -23202,299 +24033,11 @@
                 <a:ea typeface="B Nazanin"/>
                 <a:cs typeface="B Nazanin"/>
               </a:rPr>
-              <a:t>اگر دسته‌ای از رأس‌ها همسایه‌های خیلی شبیه داشته باشند، همان دسته شاهد نامنظمی است.</a:t>
-            </a:r>
-          </a:p>
-        </p:txBody>
-      </p:sp>
-      <p:pic>
-        <p:nvPicPr>
-          <p:cNvPr id="22" name="Picture 21" descr="concept_alon3.png"/>
-          <p:cNvPicPr>
-            <a:picLocks noChangeAspect="1"/>
-          </p:cNvPicPr>
-          <p:nvPr/>
-        </p:nvPicPr>
-        <p:blipFill>
-          <a:blip r:embed="rId3"/>
-          <a:stretch>
-            <a:fillRect/>
-          </a:stretch>
-        </p:blipFill>
-        <p:spPr>
-          <a:xfrm>
-            <a:off x="4565904" y="3823106"/>
-            <a:ext cx="3029712" cy="1817827"/>
-          </a:xfrm>
-          <a:prstGeom prst="rect">
-            <a:avLst/>
-          </a:prstGeom>
-        </p:spPr>
-      </p:pic>
-      <p:sp>
-        <p:nvSpPr>
-          <p:cNvPr id="23" name="Rounded Rectangle 22"/>
-          <p:cNvSpPr/>
-          <p:nvPr/>
-        </p:nvSpPr>
-        <p:spPr>
-          <a:xfrm>
-            <a:off x="457200" y="1371600"/>
-            <a:ext cx="3614928" cy="4709160"/>
-          </a:xfrm>
-          <a:prstGeom prst="roundRect">
-            <a:avLst>
-              <a:gd name="adj" fmla="val 10000"/>
-            </a:avLst>
-          </a:prstGeom>
-          <a:solidFill>
-            <a:srgbClr val="FFFCF8"/>
-          </a:solidFill>
-          <a:ln>
-            <a:noFill/>
-          </a:ln>
-          <a:effectLst>
-            <a:outerShdw blurRad="256032" dist="73152" dir="7200000" algn="ctr" rotWithShape="0">
-              <a:srgbClr val="1A334A">
-                <a:alpha val="18000"/>
-              </a:srgbClr>
-            </a:outerShdw>
-          </a:effectLst>
-        </p:spPr>
-        <p:style>
-          <a:lnRef idx="1">
-            <a:schemeClr val="accent1"/>
-          </a:lnRef>
-          <a:fillRef idx="3">
-            <a:schemeClr val="accent1"/>
-          </a:fillRef>
-          <a:effectRef idx="2">
-            <a:schemeClr val="accent1"/>
-          </a:effectRef>
-          <a:fontRef idx="minor">
-            <a:schemeClr val="lt1"/>
-          </a:fontRef>
-        </p:style>
-        <p:txBody>
-          <a:bodyPr rtlCol="0" anchor="ctr"/>
-          <a:lstStyle/>
-          <a:p>
-            <a:pPr algn="ctr"/>
-          </a:p>
-        </p:txBody>
-      </p:sp>
-      <p:sp>
-        <p:nvSpPr>
-          <p:cNvPr id="24" name="Rectangle 23"/>
-          <p:cNvSpPr/>
-          <p:nvPr/>
-        </p:nvSpPr>
-        <p:spPr>
-          <a:xfrm>
-            <a:off x="457200" y="1371600"/>
-            <a:ext cx="3614928" cy="91440"/>
-          </a:xfrm>
-          <a:prstGeom prst="rect">
-            <a:avLst/>
-          </a:prstGeom>
-          <a:solidFill>
-            <a:srgbClr val="1A334A"/>
-          </a:solidFill>
-          <a:ln>
-            <a:noFill/>
-          </a:ln>
-        </p:spPr>
-        <p:style>
-          <a:lnRef idx="1">
-            <a:schemeClr val="accent1"/>
-          </a:lnRef>
-          <a:fillRef idx="3">
-            <a:schemeClr val="accent1"/>
-          </a:fillRef>
-          <a:effectRef idx="2">
-            <a:schemeClr val="accent1"/>
-          </a:effectRef>
-          <a:fontRef idx="minor">
-            <a:schemeClr val="lt1"/>
-          </a:fontRef>
-        </p:style>
-        <p:txBody>
-          <a:bodyPr rtlCol="0" anchor="ctr"/>
-          <a:lstStyle/>
-          <a:p>
-            <a:pPr algn="ctr"/>
-          </a:p>
-        </p:txBody>
-      </p:sp>
-      <p:sp>
-        <p:nvSpPr>
-          <p:cNvPr id="25" name="TextBox 24"/>
-          <p:cNvSpPr txBox="1"/>
-          <p:nvPr/>
-        </p:nvSpPr>
-        <p:spPr>
-          <a:xfrm>
-            <a:off x="621792" y="1554480"/>
-            <a:ext cx="3285744" cy="292608"/>
-          </a:xfrm>
-          <a:prstGeom prst="rect">
-            <a:avLst/>
-          </a:prstGeom>
-          <a:noFill/>
-        </p:spPr>
-        <p:txBody>
-          <a:bodyPr wrap="square">
-            <a:spAutoFit/>
-          </a:bodyPr>
-          <a:lstStyle/>
-          <a:p>
-            <a:pPr algn="r" rtl="1">
-              <a:spcAft>
-                <a:spcPts val="0"/>
-              </a:spcAft>
-            </a:pPr>
-            <a:r>
-              <a:rPr sz="1400" b="0" rtl="1" lang="fa-IR">
-                <a:solidFill>
-                  <a:srgbClr val="A33B24"/>
-                </a:solidFill>
-                <a:latin typeface="Calibri"/>
-                <a:ea typeface="B Nazanin"/>
-                <a:cs typeface="B Nazanin"/>
-              </a:rPr>
-              <a:t>آزمون ۲</a:t>
-            </a:r>
-          </a:p>
-        </p:txBody>
-      </p:sp>
-      <p:sp>
-        <p:nvSpPr>
-          <p:cNvPr id="26" name="TextBox 25"/>
-          <p:cNvSpPr txBox="1"/>
-          <p:nvPr/>
-        </p:nvSpPr>
-        <p:spPr>
-          <a:xfrm>
-            <a:off x="621792" y="1847088"/>
-            <a:ext cx="3285744" cy="640080"/>
-          </a:xfrm>
-          <a:prstGeom prst="rect">
-            <a:avLst/>
-          </a:prstGeom>
-          <a:noFill/>
-        </p:spPr>
-        <p:txBody>
-          <a:bodyPr wrap="square">
-            <a:spAutoFit/>
-          </a:bodyPr>
-          <a:lstStyle/>
-          <a:p>
-            <a:pPr algn="r" rtl="1">
-              <a:spcAft>
-                <a:spcPts val="0"/>
-              </a:spcAft>
-            </a:pPr>
-            <a:r>
-              <a:rPr sz="1800" b="1" rtl="1" lang="fa-IR">
-                <a:solidFill>
-                  <a:srgbClr val="1A334A"/>
-                </a:solidFill>
-                <a:latin typeface="Calibri"/>
-                <a:ea typeface="B Nazanin"/>
-                <a:cs typeface="B Nazanin"/>
-              </a:rPr>
-              <a:t>درجه خیلی دور از میانگین</a:t>
-            </a:r>
-          </a:p>
-        </p:txBody>
-      </p:sp>
-      <p:sp>
-        <p:nvSpPr>
-          <p:cNvPr id="27" name="TextBox 26"/>
-          <p:cNvSpPr txBox="1"/>
-          <p:nvPr/>
-        </p:nvSpPr>
-        <p:spPr>
-          <a:xfrm>
-            <a:off x="621792" y="2468880"/>
-            <a:ext cx="3285744" cy="1143000"/>
-          </a:xfrm>
-          <a:prstGeom prst="rect">
-            <a:avLst/>
-          </a:prstGeom>
-          <a:noFill/>
-        </p:spPr>
-        <p:txBody>
-          <a:bodyPr wrap="square">
-            <a:spAutoFit/>
-          </a:bodyPr>
-          <a:lstStyle/>
-          <a:p>
-            <a:pPr algn="r" rtl="1">
-              <a:spcAft>
-                <a:spcPts val="0"/>
-              </a:spcAft>
-            </a:pPr>
-            <a:r>
-              <a:rPr sz="1400" b="0" rtl="1" lang="fa-IR">
-                <a:solidFill>
-                  <a:srgbClr val="1B1816"/>
-                </a:solidFill>
-                <a:latin typeface="Calibri"/>
-                <a:ea typeface="B Nazanin"/>
-                <a:cs typeface="B Nazanin"/>
-              </a:rPr>
-              <a:t>رأس‌هایی که درجه‌شان از میانگین خیلی پرت است جمع می‌شوند. اگر تعدادشان زیاد باشد، </a:t>
-            </a:r>
-            <a:r>
-              <a:rPr sz="1400" b="0" rtl="0" lang="en-US">
-                <a:solidFill>
-                  <a:srgbClr val="1B1816"/>
-                </a:solidFill>
-                <a:latin typeface="Calibri"/>
-                <a:ea typeface="Calibri"/>
-                <a:cs typeface="Calibri"/>
-              </a:rPr>
-              <a:t>certificate</a:t>
-            </a:r>
-            <a:r>
-              <a:rPr sz="1400" b="0" rtl="1" lang="fa-IR">
-                <a:solidFill>
-                  <a:srgbClr val="1B1816"/>
-                </a:solidFill>
-                <a:latin typeface="Calibri"/>
-                <a:ea typeface="B Nazanin"/>
-                <a:cs typeface="B Nazanin"/>
-              </a:rPr>
-              <a:t> همان‌هاست.</a:t>
-            </a:r>
-          </a:p>
-        </p:txBody>
-      </p:sp>
-      <p:pic>
-        <p:nvPicPr>
-          <p:cNvPr id="28" name="Picture 27" descr="concept_alon2.png"/>
-          <p:cNvPicPr>
-            <a:picLocks noChangeAspect="1"/>
-          </p:cNvPicPr>
-          <p:nvPr/>
-        </p:nvPicPr>
-        <p:blipFill>
-          <a:blip r:embed="rId4"/>
-          <a:stretch>
-            <a:fillRect/>
-          </a:stretch>
-        </p:blipFill>
-        <p:spPr>
-          <a:xfrm>
-            <a:off x="749808" y="3823106"/>
-            <a:ext cx="3029712" cy="1817827"/>
-          </a:xfrm>
-          <a:prstGeom prst="rect">
-            <a:avLst/>
-          </a:prstGeom>
-        </p:spPr>
-      </p:pic>
+              <a:t>لم چنین جفتی را نامنظم می‌گیرد و باید بعداً بریده شود.</a:t>
+            </a:r>
+          </a:p>
+        </p:txBody>
+      </p:sp>
     </p:spTree>
   </p:cSld>
   <p:clrMapOvr>
